--- a/Smart_Digital_Lending_System_Viva_Presentation.pptx
+++ b/Smart_Digital_Lending_System_Viva_Presentation.pptx
@@ -3086,7 +3086,7 @@
           <a:lstStyle/>
           <a:p>
             <a:pPr>
-              <a:defRPr sz="1800" b="1">
+              <a:defRPr sz="2100" b="1">
                 <a:solidFill>
                   <a:srgbClr val="1F4D39"/>
                 </a:solidFill>
@@ -3094,7 +3094,7 @@
               </a:defRPr>
             </a:pPr>
             <a:r>
-              <a:t>Smart Digital Lending System with Automated Document Verification, Biometric Security and Explainable AI</a:t>
+              <a:t>Smart Digital Lending System with Automated Verification &amp; Explainable AI</a:t>
             </a:r>
           </a:p>
         </p:txBody>
@@ -3121,7 +3121,7 @@
           <a:lstStyle/>
           <a:p>
             <a:pPr>
-              <a:defRPr sz="1000" b="1">
+              <a:defRPr sz="1100" b="0">
                 <a:solidFill>
                   <a:srgbClr val="6B6B6B"/>
                 </a:solidFill>
@@ -4400,12 +4400,15 @@
           <a:lstStyle/>
           <a:p>
             <a:pPr>
-              <a:defRPr sz="1800" b="1">
-                <a:latin typeface="Segoe UI"/>
+              <a:defRPr sz="2200" b="1">
+                <a:solidFill>
+                  <a:srgbClr val="1F4D39"/>
+                </a:solidFill>
+                <a:latin typeface="Calibri"/>
               </a:defRPr>
             </a:pPr>
             <a:r>
-              <a:t>MODEL 5 &amp; BENCHMARKING: RANDOM FOREST VS EBM</a:t>
+              <a:t>MODEL 5: RANDOM FOREST BENCHMARK VS EBM</a:t>
             </a:r>
           </a:p>
         </p:txBody>
@@ -4432,7 +4435,7 @@
           <a:lstStyle/>
           <a:p>
             <a:pPr>
-              <a:defRPr sz="1100">
+              <a:defRPr sz="1100" b="0">
                 <a:solidFill>
                   <a:srgbClr val="6B6B6B"/>
                 </a:solidFill>
@@ -4440,7 +4443,7 @@
               </a:defRPr>
             </a:pPr>
             <a:r>
-              <a:t>Validating Prediction Accuracy by Comparing EBM against Random Forest</a:t>
+              <a:t>Validating prediction accuracy by comparing EBM against Random Forest</a:t>
             </a:r>
           </a:p>
         </p:txBody>
@@ -4535,11 +4538,17 @@
                     <a:lstStyle/>
                     <a:p>
                       <a:pPr>
-                        <a:defRPr sz="950" b="1">
-                          <a:latin typeface="Segoe UI"/>
+                        <a:defRPr>
+                          <a:latin typeface="Calibri"/>
                         </a:defRPr>
                       </a:pPr>
                       <a:r>
+                        <a:rPr sz="1100" b="1">
+                          <a:solidFill>
+                            <a:srgbClr val="FFFFFF"/>
+                          </a:solidFill>
+                          <a:latin typeface="Calibri"/>
+                        </a:rPr>
                         <a:t>EVALUATION CRITERIA</a:t>
                       </a:r>
                     </a:p>
@@ -4580,11 +4589,17 @@
                     <a:lstStyle/>
                     <a:p>
                       <a:pPr>
-                        <a:defRPr sz="950" b="1">
-                          <a:latin typeface="Segoe UI"/>
+                        <a:defRPr>
+                          <a:latin typeface="Calibri"/>
                         </a:defRPr>
                       </a:pPr>
                       <a:r>
+                        <a:rPr sz="1100" b="1">
+                          <a:solidFill>
+                            <a:srgbClr val="FFFFFF"/>
+                          </a:solidFill>
+                          <a:latin typeface="Calibri"/>
+                        </a:rPr>
                         <a:t>RANDOM FOREST (MODEL 5)</a:t>
                       </a:r>
                     </a:p>
@@ -4625,11 +4640,17 @@
                     <a:lstStyle/>
                     <a:p>
                       <a:pPr>
-                        <a:defRPr sz="950" b="1">
-                          <a:latin typeface="Segoe UI"/>
+                        <a:defRPr>
+                          <a:latin typeface="Calibri"/>
                         </a:defRPr>
                       </a:pPr>
                       <a:r>
+                        <a:rPr sz="1100" b="1">
+                          <a:solidFill>
+                            <a:srgbClr val="FFFFFF"/>
+                          </a:solidFill>
+                          <a:latin typeface="Calibri"/>
+                        </a:rPr>
                         <a:t>EXPLAINABLE BOOSTING MACHINE (MODEL 4)</a:t>
                       </a:r>
                     </a:p>
@@ -4677,12 +4698,18 @@
                     <a:lstStyle/>
                     <a:p>
                       <a:pPr>
-                        <a:defRPr sz="819" b="1">
-                          <a:latin typeface="Segoe UI"/>
+                        <a:defRPr>
+                          <a:latin typeface="Calibri"/>
                         </a:defRPr>
                       </a:pPr>
                       <a:r>
-                        <a:t>Algorithm Type</a:t>
+                        <a:rPr sz="1100" b="1">
+                          <a:solidFill>
+                            <a:srgbClr val="1A1A1A"/>
+                          </a:solidFill>
+                          <a:latin typeface="Calibri"/>
+                        </a:rPr>
+                        <a:t>Model Architecture</a:t>
                       </a:r>
                     </a:p>
                   </a:txBody>
@@ -4719,11 +4746,17 @@
                     <a:lstStyle/>
                     <a:p>
                       <a:pPr>
-                        <a:defRPr sz="819">
-                          <a:latin typeface="Segoe UI"/>
+                        <a:defRPr>
+                          <a:latin typeface="Calibri"/>
                         </a:defRPr>
                       </a:pPr>
                       <a:r>
+                        <a:rPr sz="1100" b="0">
+                          <a:solidFill>
+                            <a:srgbClr val="1A1A1A"/>
+                          </a:solidFill>
+                          <a:latin typeface="Calibri"/>
+                        </a:rPr>
                         <a:t>Ensemble of 100+ Decision Trees</a:t>
                       </a:r>
                     </a:p>
@@ -4761,11 +4794,17 @@
                     <a:lstStyle/>
                     <a:p>
                       <a:pPr>
-                        <a:defRPr sz="819">
-                          <a:latin typeface="Segoe UI"/>
+                        <a:defRPr>
+                          <a:latin typeface="Calibri"/>
                         </a:defRPr>
                       </a:pPr>
                       <a:r>
+                        <a:rPr sz="1100" b="0">
+                          <a:solidFill>
+                            <a:srgbClr val="1A1A1A"/>
+                          </a:solidFill>
+                          <a:latin typeface="Calibri"/>
+                        </a:rPr>
                         <a:t>Generalized Additive Model with Pairs (GA²M)</a:t>
                       </a:r>
                     </a:p>
@@ -4810,11 +4849,17 @@
                     <a:lstStyle/>
                     <a:p>
                       <a:pPr>
-                        <a:defRPr sz="819" b="1">
-                          <a:latin typeface="Segoe UI"/>
+                        <a:defRPr>
+                          <a:latin typeface="Calibri"/>
                         </a:defRPr>
                       </a:pPr>
                       <a:r>
+                        <a:rPr sz="1100" b="1">
+                          <a:solidFill>
+                            <a:srgbClr val="1A1A1A"/>
+                          </a:solidFill>
+                          <a:latin typeface="Calibri"/>
+                        </a:rPr>
                         <a:t>Test Accuracy</a:t>
                       </a:r>
                     </a:p>
@@ -4855,12 +4900,18 @@
                     <a:lstStyle/>
                     <a:p>
                       <a:pPr>
-                        <a:defRPr sz="819">
-                          <a:latin typeface="Segoe UI"/>
+                        <a:defRPr>
+                          <a:latin typeface="Calibri"/>
                         </a:defRPr>
                       </a:pPr>
                       <a:r>
-                        <a:t>85.37% (Industry standard accuracy)</a:t>
+                        <a:rPr sz="1100" b="0">
+                          <a:solidFill>
+                            <a:srgbClr val="1A1A1A"/>
+                          </a:solidFill>
+                          <a:latin typeface="Calibri"/>
+                        </a:rPr>
+                        <a:t>85.37% (Industry benchmark)</a:t>
                       </a:r>
                     </a:p>
                   </a:txBody>
@@ -4900,11 +4951,17 @@
                     <a:lstStyle/>
                     <a:p>
                       <a:pPr>
-                        <a:defRPr sz="819">
-                          <a:latin typeface="Segoe UI"/>
+                        <a:defRPr>
+                          <a:latin typeface="Calibri"/>
                         </a:defRPr>
                       </a:pPr>
                       <a:r>
+                        <a:rPr sz="1100" b="0">
+                          <a:solidFill>
+                            <a:srgbClr val="1A1A1A"/>
+                          </a:solidFill>
+                          <a:latin typeface="Calibri"/>
+                        </a:rPr>
                         <a:t>85.37% (Ties Random Forest exactly)</a:t>
                       </a:r>
                     </a:p>
@@ -4952,11 +5009,17 @@
                     <a:lstStyle/>
                     <a:p>
                       <a:pPr>
-                        <a:defRPr sz="819" b="1">
-                          <a:latin typeface="Segoe UI"/>
+                        <a:defRPr>
+                          <a:latin typeface="Calibri"/>
                         </a:defRPr>
                       </a:pPr>
                       <a:r>
+                        <a:rPr sz="1100" b="1">
+                          <a:solidFill>
+                            <a:srgbClr val="1A1A1A"/>
+                          </a:solidFill>
+                          <a:latin typeface="Calibri"/>
+                        </a:rPr>
                         <a:t>AUC-ROC Score</a:t>
                       </a:r>
                     </a:p>
@@ -4994,11 +5057,17 @@
                     <a:lstStyle/>
                     <a:p>
                       <a:pPr>
-                        <a:defRPr sz="819">
-                          <a:latin typeface="Segoe UI"/>
+                        <a:defRPr>
+                          <a:latin typeface="Calibri"/>
                         </a:defRPr>
                       </a:pPr>
                       <a:r>
+                        <a:rPr sz="1100" b="0">
+                          <a:solidFill>
+                            <a:srgbClr val="1A1A1A"/>
+                          </a:solidFill>
+                          <a:latin typeface="Calibri"/>
+                        </a:rPr>
                         <a:t>0.729</a:t>
                       </a:r>
                     </a:p>
@@ -5036,11 +5105,17 @@
                     <a:lstStyle/>
                     <a:p>
                       <a:pPr>
-                        <a:defRPr sz="819">
-                          <a:latin typeface="Segoe UI"/>
+                        <a:defRPr>
+                          <a:latin typeface="Calibri"/>
                         </a:defRPr>
                       </a:pPr>
                       <a:r>
+                        <a:rPr sz="1100" b="0">
+                          <a:solidFill>
+                            <a:srgbClr val="1A1A1A"/>
+                          </a:solidFill>
+                          <a:latin typeface="Calibri"/>
+                        </a:rPr>
                         <a:t>0.752 (EBM leads by +0.023 in discrimination)</a:t>
                       </a:r>
                     </a:p>
@@ -5085,12 +5160,18 @@
                     <a:lstStyle/>
                     <a:p>
                       <a:pPr>
-                        <a:defRPr sz="819" b="1">
-                          <a:latin typeface="Segoe UI"/>
+                        <a:defRPr>
+                          <a:latin typeface="Calibri"/>
                         </a:defRPr>
                       </a:pPr>
                       <a:r>
-                        <a:t>Decision Transparency</a:t>
+                        <a:rPr sz="1100" b="1">
+                          <a:solidFill>
+                            <a:srgbClr val="1A1A1A"/>
+                          </a:solidFill>
+                          <a:latin typeface="Calibri"/>
+                        </a:rPr>
+                        <a:t>Interpretability</a:t>
                       </a:r>
                     </a:p>
                   </a:txBody>
@@ -5130,12 +5211,18 @@
                     <a:lstStyle/>
                     <a:p>
                       <a:pPr>
-                        <a:defRPr sz="819">
-                          <a:latin typeface="Segoe UI"/>
+                        <a:defRPr>
+                          <a:latin typeface="Calibri"/>
                         </a:defRPr>
                       </a:pPr>
                       <a:r>
-                        <a:t>"Black Box" — cannot explain reasons</a:t>
+                        <a:rPr sz="1100" b="0">
+                          <a:solidFill>
+                            <a:srgbClr val="1A1A1A"/>
+                          </a:solidFill>
+                          <a:latin typeface="Calibri"/>
+                        </a:rPr>
+                        <a:t>Black Box — cannot explain reasons</a:t>
                       </a:r>
                     </a:p>
                   </a:txBody>
@@ -5175,12 +5262,18 @@
                     <a:lstStyle/>
                     <a:p>
                       <a:pPr>
-                        <a:defRPr sz="819">
-                          <a:latin typeface="Segoe UI"/>
+                        <a:defRPr>
+                          <a:latin typeface="Calibri"/>
                         </a:defRPr>
                       </a:pPr>
                       <a:r>
-                        <a:t>"Glass Box" — 100% exact reasons by design</a:t>
+                        <a:rPr sz="1100" b="0">
+                          <a:solidFill>
+                            <a:srgbClr val="1A1A1A"/>
+                          </a:solidFill>
+                          <a:latin typeface="Calibri"/>
+                        </a:rPr>
+                        <a:t>Glass Box — 100% exact mathematical reasons</a:t>
                       </a:r>
                     </a:p>
                   </a:txBody>
@@ -5227,12 +5320,18 @@
                     <a:lstStyle/>
                     <a:p>
                       <a:pPr>
-                        <a:defRPr sz="819" b="1">
-                          <a:latin typeface="Segoe UI"/>
+                        <a:defRPr>
+                          <a:latin typeface="Calibri"/>
                         </a:defRPr>
                       </a:pPr>
                       <a:r>
-                        <a:t>Adverse Action Notices</a:t>
+                        <a:rPr sz="1100" b="1">
+                          <a:solidFill>
+                            <a:srgbClr val="1A1A1A"/>
+                          </a:solidFill>
+                          <a:latin typeface="Calibri"/>
+                        </a:rPr>
+                        <a:t>Adverse Action Notice</a:t>
                       </a:r>
                     </a:p>
                   </a:txBody>
@@ -5269,12 +5368,18 @@
                     <a:lstStyle/>
                     <a:p>
                       <a:pPr>
-                        <a:defRPr sz="819">
-                          <a:latin typeface="Segoe UI"/>
+                        <a:defRPr>
+                          <a:latin typeface="Calibri"/>
                         </a:defRPr>
                       </a:pPr>
                       <a:r>
-                        <a:t>Requires complex approximate add-ons</a:t>
+                        <a:rPr sz="1100" b="0">
+                          <a:solidFill>
+                            <a:srgbClr val="1A1A1A"/>
+                          </a:solidFill>
+                          <a:latin typeface="Calibri"/>
+                        </a:rPr>
+                        <a:t>Requires unstable post-hoc SHAP</a:t>
                       </a:r>
                     </a:p>
                   </a:txBody>
@@ -5311,12 +5416,18 @@
                     <a:lstStyle/>
                     <a:p>
                       <a:pPr>
-                        <a:defRPr sz="819">
-                          <a:latin typeface="Segoe UI"/>
+                        <a:defRPr>
+                          <a:latin typeface="Calibri"/>
                         </a:defRPr>
                       </a:pPr>
                       <a:r>
-                        <a:t>Built-in, instant plain-English sentences</a:t>
+                        <a:rPr sz="1100" b="0">
+                          <a:solidFill>
+                            <a:srgbClr val="1A1A1A"/>
+                          </a:solidFill>
+                          <a:latin typeface="Calibri"/>
+                        </a:rPr>
+                        <a:t>Built-in, instant plain-English explanations</a:t>
                       </a:r>
                     </a:p>
                   </a:txBody>
@@ -5591,13 +5702,13 @@
           </a:bodyPr>
           <a:lstStyle/>
           <a:p>
-            <a:pPr>
-              <a:defRPr sz="850">
-                <a:latin typeface="Segoe UI"/>
-              </a:defRPr>
-            </a:pPr>
-            <a:r>
-              <a:t>Key Conclusion: Random Forest was trained as our high-accuracy benchmark. EBM matches Random Forest in accuracy (85.37%) and beats it in AUC (0.752), while providing 100% transparent explanations that Random Forest cannot give.</a:t>
+            <a:r>
+              <a:rPr b="1" sz="1050"/>
+              <a:t>Key takeaway: </a:t>
+            </a:r>
+            <a:r>
+              <a:rPr sz="1050"/>
+              <a:t>Random Forest was trained as our high-accuracy benchmark. EBM matches Random Forest in accuracy (85.37%) and beats it in AUC (0.752), while providing 100% transparent explanations.</a:t>
             </a:r>
           </a:p>
         </p:txBody>
@@ -5821,7 +5932,7 @@
           <a:lstStyle/>
           <a:p>
             <a:pPr>
-              <a:defRPr sz="1100">
+              <a:defRPr sz="1100" b="0">
                 <a:solidFill>
                   <a:srgbClr val="6B6B6B"/>
                 </a:solidFill>
@@ -5829,7 +5940,7 @@
               </a:defRPr>
             </a:pPr>
             <a:r>
-              <a:t>Current Working Status of All 5 Models and Supporting Modules</a:t>
+              <a:t>Major modules and implementation status</a:t>
             </a:r>
           </a:p>
         </p:txBody>
@@ -5924,11 +6035,17 @@
                     <a:lstStyle/>
                     <a:p>
                       <a:pPr>
-                        <a:defRPr sz="950" b="1">
-                          <a:latin typeface="Segoe UI"/>
+                        <a:defRPr>
+                          <a:latin typeface="Calibri"/>
                         </a:defRPr>
                       </a:pPr>
                       <a:r>
+                        <a:rPr sz="1100" b="1">
+                          <a:solidFill>
+                            <a:srgbClr val="FFFFFF"/>
+                          </a:solidFill>
+                          <a:latin typeface="Calibri"/>
+                        </a:rPr>
                         <a:t>MODULE / MODEL</a:t>
                       </a:r>
                     </a:p>
@@ -5969,11 +6086,17 @@
                     <a:lstStyle/>
                     <a:p>
                       <a:pPr>
-                        <a:defRPr sz="950" b="1">
-                          <a:latin typeface="Segoe UI"/>
+                        <a:defRPr>
+                          <a:latin typeface="Calibri"/>
                         </a:defRPr>
                       </a:pPr>
                       <a:r>
+                        <a:rPr sz="1100" b="1">
+                          <a:solidFill>
+                            <a:srgbClr val="FFFFFF"/>
+                          </a:solidFill>
+                          <a:latin typeface="Calibri"/>
+                        </a:rPr>
                         <a:t>FUNCTION AND IMPLEMENTED CAPABILITY</a:t>
                       </a:r>
                     </a:p>
@@ -6014,11 +6137,17 @@
                     <a:lstStyle/>
                     <a:p>
                       <a:pPr>
-                        <a:defRPr sz="950" b="1">
-                          <a:latin typeface="Segoe UI"/>
+                        <a:defRPr>
+                          <a:latin typeface="Calibri"/>
                         </a:defRPr>
                       </a:pPr>
                       <a:r>
+                        <a:rPr sz="1100" b="1">
+                          <a:solidFill>
+                            <a:srgbClr val="FFFFFF"/>
+                          </a:solidFill>
+                          <a:latin typeface="Calibri"/>
+                        </a:rPr>
                         <a:t>STATUS</a:t>
                       </a:r>
                     </a:p>
@@ -6066,12 +6195,18 @@
                     <a:lstStyle/>
                     <a:p>
                       <a:pPr>
-                        <a:defRPr sz="819" b="1">
-                          <a:latin typeface="Segoe UI"/>
+                        <a:defRPr>
+                          <a:latin typeface="Calibri"/>
                         </a:defRPr>
                       </a:pPr>
                       <a:r>
-                        <a:t>Model 1: DigiLocker Service</a:t>
+                        <a:rPr sz="1100" b="1">
+                          <a:solidFill>
+                            <a:srgbClr val="1A1A1A"/>
+                          </a:solidFill>
+                          <a:latin typeface="Calibri"/>
+                        </a:rPr>
+                        <a:t>Model 1: DigiLocker</a:t>
                       </a:r>
                     </a:p>
                   </a:txBody>
@@ -6108,11 +6243,17 @@
                     <a:lstStyle/>
                     <a:p>
                       <a:pPr>
-                        <a:defRPr sz="819">
-                          <a:latin typeface="Segoe UI"/>
+                        <a:defRPr>
+                          <a:latin typeface="Calibri"/>
                         </a:defRPr>
                       </a:pPr>
                       <a:r>
+                        <a:rPr sz="1100" b="0">
+                          <a:solidFill>
+                            <a:srgbClr val="1A1A1A"/>
+                          </a:solidFill>
+                          <a:latin typeface="Calibri"/>
+                        </a:rPr>
                         <a:t>Direct document fetch with e-Aadhaar &amp; PAN verification</a:t>
                       </a:r>
                     </a:p>
@@ -6150,11 +6291,17 @@
                     <a:lstStyle/>
                     <a:p>
                       <a:pPr>
-                        <a:defRPr sz="819">
-                          <a:latin typeface="Segoe UI"/>
+                        <a:defRPr>
+                          <a:latin typeface="Calibri"/>
                         </a:defRPr>
                       </a:pPr>
                       <a:r>
+                        <a:rPr sz="1100" b="0">
+                          <a:solidFill>
+                            <a:srgbClr val="1A1A1A"/>
+                          </a:solidFill>
+                          <a:latin typeface="Calibri"/>
+                        </a:rPr>
                         <a:t>✓ Implemented</a:t>
                       </a:r>
                     </a:p>
@@ -6199,12 +6346,18 @@
                     <a:lstStyle/>
                     <a:p>
                       <a:pPr>
-                        <a:defRPr sz="819" b="1">
-                          <a:latin typeface="Segoe UI"/>
+                        <a:defRPr>
+                          <a:latin typeface="Calibri"/>
                         </a:defRPr>
                       </a:pPr>
                       <a:r>
-                        <a:t>Model 2: Biometric Face Gate</a:t>
+                        <a:rPr sz="1100" b="1">
+                          <a:solidFill>
+                            <a:srgbClr val="1A1A1A"/>
+                          </a:solidFill>
+                          <a:latin typeface="Calibri"/>
+                        </a:rPr>
+                        <a:t>Model 2: Biometric Gate</a:t>
                       </a:r>
                     </a:p>
                   </a:txBody>
@@ -6244,11 +6397,17 @@
                     <a:lstStyle/>
                     <a:p>
                       <a:pPr>
-                        <a:defRPr sz="819">
-                          <a:latin typeface="Segoe UI"/>
+                        <a:defRPr>
+                          <a:latin typeface="Calibri"/>
                         </a:defRPr>
                       </a:pPr>
                       <a:r>
+                        <a:rPr sz="1100" b="0">
+                          <a:solidFill>
+                            <a:srgbClr val="1A1A1A"/>
+                          </a:solidFill>
+                          <a:latin typeface="Calibri"/>
+                        </a:rPr>
                         <a:t>3-way live camera vs document photo matching (≥ 75%)</a:t>
                       </a:r>
                     </a:p>
@@ -6289,11 +6448,17 @@
                     <a:lstStyle/>
                     <a:p>
                       <a:pPr>
-                        <a:defRPr sz="819">
-                          <a:latin typeface="Segoe UI"/>
+                        <a:defRPr>
+                          <a:latin typeface="Calibri"/>
                         </a:defRPr>
                       </a:pPr>
                       <a:r>
+                        <a:rPr sz="1100" b="0">
+                          <a:solidFill>
+                            <a:srgbClr val="1A1A1A"/>
+                          </a:solidFill>
+                          <a:latin typeface="Calibri"/>
+                        </a:rPr>
                         <a:t>✓ Implemented</a:t>
                       </a:r>
                     </a:p>
@@ -6341,11 +6506,17 @@
                     <a:lstStyle/>
                     <a:p>
                       <a:pPr>
-                        <a:defRPr sz="819" b="1">
-                          <a:latin typeface="Segoe UI"/>
+                        <a:defRPr>
+                          <a:latin typeface="Calibri"/>
                         </a:defRPr>
                       </a:pPr>
                       <a:r>
+                        <a:rPr sz="1100" b="1">
+                          <a:solidFill>
+                            <a:srgbClr val="1A1A1A"/>
+                          </a:solidFill>
+                          <a:latin typeface="Calibri"/>
+                        </a:rPr>
                         <a:t>Model 3: OCR Cross-Check</a:t>
                       </a:r>
                     </a:p>
@@ -6383,11 +6554,17 @@
                     <a:lstStyle/>
                     <a:p>
                       <a:pPr>
-                        <a:defRPr sz="819">
-                          <a:latin typeface="Segoe UI"/>
+                        <a:defRPr>
+                          <a:latin typeface="Calibri"/>
                         </a:defRPr>
                       </a:pPr>
                       <a:r>
+                        <a:rPr sz="1100" b="0">
+                          <a:solidFill>
+                            <a:srgbClr val="1A1A1A"/>
+                          </a:solidFill>
+                          <a:latin typeface="Calibri"/>
+                        </a:rPr>
                         <a:t>Text extraction and fuzzy name string comparison</a:t>
                       </a:r>
                     </a:p>
@@ -6425,11 +6602,17 @@
                     <a:lstStyle/>
                     <a:p>
                       <a:pPr>
-                        <a:defRPr sz="819">
-                          <a:latin typeface="Segoe UI"/>
+                        <a:defRPr>
+                          <a:latin typeface="Calibri"/>
                         </a:defRPr>
                       </a:pPr>
                       <a:r>
+                        <a:rPr sz="1100" b="0">
+                          <a:solidFill>
+                            <a:srgbClr val="1A1A1A"/>
+                          </a:solidFill>
+                          <a:latin typeface="Calibri"/>
+                        </a:rPr>
                         <a:t>✓ Implemented</a:t>
                       </a:r>
                     </a:p>
@@ -6474,11 +6657,17 @@
                     <a:lstStyle/>
                     <a:p>
                       <a:pPr>
-                        <a:defRPr sz="819" b="1">
-                          <a:latin typeface="Segoe UI"/>
+                        <a:defRPr>
+                          <a:latin typeface="Calibri"/>
                         </a:defRPr>
                       </a:pPr>
                       <a:r>
+                        <a:rPr sz="1100" b="1">
+                          <a:solidFill>
+                            <a:srgbClr val="1A1A1A"/>
+                          </a:solidFill>
+                          <a:latin typeface="Calibri"/>
+                        </a:rPr>
                         <a:t>Model 4: EBM Underwriting</a:t>
                       </a:r>
                     </a:p>
@@ -6519,11 +6708,17 @@
                     <a:lstStyle/>
                     <a:p>
                       <a:pPr>
-                        <a:defRPr sz="819">
-                          <a:latin typeface="Segoe UI"/>
+                        <a:defRPr>
+                          <a:latin typeface="Calibri"/>
                         </a:defRPr>
                       </a:pPr>
                       <a:r>
+                        <a:rPr sz="1100" b="0">
+                          <a:solidFill>
+                            <a:srgbClr val="1A1A1A"/>
+                          </a:solidFill>
+                          <a:latin typeface="Calibri"/>
+                        </a:rPr>
                         <a:t>Exact scoring with waterfall charts and plain-English reasons</a:t>
                       </a:r>
                     </a:p>
@@ -6564,11 +6759,17 @@
                     <a:lstStyle/>
                     <a:p>
                       <a:pPr>
-                        <a:defRPr sz="819">
-                          <a:latin typeface="Segoe UI"/>
+                        <a:defRPr>
+                          <a:latin typeface="Calibri"/>
                         </a:defRPr>
                       </a:pPr>
                       <a:r>
+                        <a:rPr sz="1100" b="0">
+                          <a:solidFill>
+                            <a:srgbClr val="1A1A1A"/>
+                          </a:solidFill>
+                          <a:latin typeface="Calibri"/>
+                        </a:rPr>
                         <a:t>✓ Implemented</a:t>
                       </a:r>
                     </a:p>
@@ -6616,11 +6817,17 @@
                     <a:lstStyle/>
                     <a:p>
                       <a:pPr>
-                        <a:defRPr sz="819" b="1">
-                          <a:latin typeface="Segoe UI"/>
+                        <a:defRPr>
+                          <a:latin typeface="Calibri"/>
                         </a:defRPr>
                       </a:pPr>
                       <a:r>
+                        <a:rPr sz="1100" b="1">
+                          <a:solidFill>
+                            <a:srgbClr val="1A1A1A"/>
+                          </a:solidFill>
+                          <a:latin typeface="Calibri"/>
+                        </a:rPr>
                         <a:t>Model 5: Random Forest</a:t>
                       </a:r>
                     </a:p>
@@ -6658,11 +6865,17 @@
                     <a:lstStyle/>
                     <a:p>
                       <a:pPr>
-                        <a:defRPr sz="819">
-                          <a:latin typeface="Segoe UI"/>
+                        <a:defRPr>
+                          <a:latin typeface="Calibri"/>
                         </a:defRPr>
                       </a:pPr>
                       <a:r>
+                        <a:rPr sz="1100" b="0">
+                          <a:solidFill>
+                            <a:srgbClr val="1A1A1A"/>
+                          </a:solidFill>
+                          <a:latin typeface="Calibri"/>
+                        </a:rPr>
                         <a:t>Benchmark ensemble model trained and evaluated</a:t>
                       </a:r>
                     </a:p>
@@ -6700,11 +6913,17 @@
                     <a:lstStyle/>
                     <a:p>
                       <a:pPr>
-                        <a:defRPr sz="819">
-                          <a:latin typeface="Segoe UI"/>
+                        <a:defRPr>
+                          <a:latin typeface="Calibri"/>
                         </a:defRPr>
                       </a:pPr>
                       <a:r>
+                        <a:rPr sz="1100" b="0">
+                          <a:solidFill>
+                            <a:srgbClr val="1A1A1A"/>
+                          </a:solidFill>
+                          <a:latin typeface="Calibri"/>
+                        </a:rPr>
                         <a:t>✓ Implemented</a:t>
                       </a:r>
                     </a:p>
@@ -6749,11 +6968,17 @@
                     <a:lstStyle/>
                     <a:p>
                       <a:pPr>
-                        <a:defRPr sz="819" b="1">
-                          <a:latin typeface="Segoe UI"/>
+                        <a:defRPr>
+                          <a:latin typeface="Calibri"/>
                         </a:defRPr>
                       </a:pPr>
                       <a:r>
+                        <a:rPr sz="1100" b="1">
+                          <a:solidFill>
+                            <a:srgbClr val="1A1A1A"/>
+                          </a:solidFill>
+                          <a:latin typeface="Calibri"/>
+                        </a:rPr>
                         <a:t>Web Application</a:t>
                       </a:r>
                     </a:p>
@@ -6794,11 +7019,17 @@
                     <a:lstStyle/>
                     <a:p>
                       <a:pPr>
-                        <a:defRPr sz="819">
-                          <a:latin typeface="Segoe UI"/>
+                        <a:defRPr>
+                          <a:latin typeface="Calibri"/>
                         </a:defRPr>
                       </a:pPr>
                       <a:r>
+                        <a:rPr sz="1100" b="0">
+                          <a:solidFill>
+                            <a:srgbClr val="1A1A1A"/>
+                          </a:solidFill>
+                          <a:latin typeface="Calibri"/>
+                        </a:rPr>
                         <a:t>6-step underwriting wizard, camera viewfinder &amp; audit cockpit</a:t>
                       </a:r>
                     </a:p>
@@ -6839,11 +7070,17 @@
                     <a:lstStyle/>
                     <a:p>
                       <a:pPr>
-                        <a:defRPr sz="819">
-                          <a:latin typeface="Segoe UI"/>
+                        <a:defRPr>
+                          <a:latin typeface="Calibri"/>
                         </a:defRPr>
                       </a:pPr>
                       <a:r>
+                        <a:rPr sz="1100" b="0">
+                          <a:solidFill>
+                            <a:srgbClr val="1A1A1A"/>
+                          </a:solidFill>
+                          <a:latin typeface="Calibri"/>
+                        </a:rPr>
                         <a:t>✓ Implemented</a:t>
                       </a:r>
                     </a:p>
@@ -6891,12 +7128,18 @@
                     <a:lstStyle/>
                     <a:p>
                       <a:pPr>
-                        <a:defRPr sz="819" b="1">
-                          <a:latin typeface="Segoe UI"/>
+                        <a:defRPr>
+                          <a:latin typeface="Calibri"/>
                         </a:defRPr>
                       </a:pPr>
                       <a:r>
-                        <a:t>Live Cloud Deployment</a:t>
+                        <a:rPr sz="1100" b="1">
+                          <a:solidFill>
+                            <a:srgbClr val="1A1A1A"/>
+                          </a:solidFill>
+                          <a:latin typeface="Calibri"/>
+                        </a:rPr>
+                        <a:t>Next Phase (Proposed)</a:t>
                       </a:r>
                     </a:p>
                   </a:txBody>
@@ -6933,12 +7176,18 @@
                     <a:lstStyle/>
                     <a:p>
                       <a:pPr>
-                        <a:defRPr sz="819">
-                          <a:latin typeface="Segoe UI"/>
+                        <a:defRPr>
+                          <a:latin typeface="Calibri"/>
                         </a:defRPr>
                       </a:pPr>
                       <a:r>
-                        <a:t>Production web app active on GitHub Pages with mock fallback</a:t>
+                        <a:rPr sz="1100" b="0">
+                          <a:solidFill>
+                            <a:srgbClr val="1A1A1A"/>
+                          </a:solidFill>
+                          <a:latin typeface="Calibri"/>
+                        </a:rPr>
+                        <a:t>Production UIDAI FaceRD API, Account Aggregator, regional audio</a:t>
                       </a:r>
                     </a:p>
                   </a:txBody>
@@ -6975,12 +7224,18 @@
                     <a:lstStyle/>
                     <a:p>
                       <a:pPr>
-                        <a:defRPr sz="819">
-                          <a:latin typeface="Segoe UI"/>
+                        <a:defRPr>
+                          <a:latin typeface="Calibri"/>
                         </a:defRPr>
                       </a:pPr>
                       <a:r>
-                        <a:t>✓ Live &amp; Active</a:t>
+                        <a:rPr sz="1100" b="0">
+                          <a:solidFill>
+                            <a:srgbClr val="1A1A1A"/>
+                          </a:solidFill>
+                          <a:latin typeface="Calibri"/>
+                        </a:rPr>
+                        <a:t>Planned</a:t>
                       </a:r>
                     </a:p>
                   </a:txBody>
@@ -7216,7 +7471,7 @@
           <a:lstStyle/>
           <a:p>
             <a:pPr>
-              <a:defRPr sz="1100">
+              <a:defRPr sz="1100" b="0">
                 <a:solidFill>
                   <a:srgbClr val="6B6B6B"/>
                 </a:solidFill>
@@ -7224,7 +7479,7 @@
               </a:defRPr>
             </a:pPr>
             <a:r>
-              <a:t>Evaluating Five Different Machine Learning Models on 614 Credit Records</a:t>
+              <a:t>Same 491 training / 123 test records for all five models; bureau attributes are generated</a:t>
             </a:r>
           </a:p>
         </p:txBody>
@@ -7340,11 +7595,17 @@
                     <a:lstStyle/>
                     <a:p>
                       <a:pPr>
-                        <a:defRPr sz="950" b="1">
-                          <a:latin typeface="Segoe UI"/>
+                        <a:defRPr>
+                          <a:latin typeface="Calibri"/>
                         </a:defRPr>
                       </a:pPr>
                       <a:r>
+                        <a:rPr sz="1100" b="1">
+                          <a:solidFill>
+                            <a:srgbClr val="FFFFFF"/>
+                          </a:solidFill>
+                          <a:latin typeface="Calibri"/>
+                        </a:rPr>
                         <a:t>MODEL</a:t>
                       </a:r>
                     </a:p>
@@ -7385,11 +7646,17 @@
                     <a:lstStyle/>
                     <a:p>
                       <a:pPr>
-                        <a:defRPr sz="950" b="1">
-                          <a:latin typeface="Segoe UI"/>
+                        <a:defRPr>
+                          <a:latin typeface="Calibri"/>
                         </a:defRPr>
                       </a:pPr>
                       <a:r>
+                        <a:rPr sz="1100" b="1">
+                          <a:solidFill>
+                            <a:srgbClr val="FFFFFF"/>
+                          </a:solidFill>
+                          <a:latin typeface="Calibri"/>
+                        </a:rPr>
                         <a:t>ACC. %</a:t>
                       </a:r>
                     </a:p>
@@ -7430,11 +7697,17 @@
                     <a:lstStyle/>
                     <a:p>
                       <a:pPr>
-                        <a:defRPr sz="950" b="1">
-                          <a:latin typeface="Segoe UI"/>
+                        <a:defRPr>
+                          <a:latin typeface="Calibri"/>
                         </a:defRPr>
                       </a:pPr>
                       <a:r>
+                        <a:rPr sz="1100" b="1">
+                          <a:solidFill>
+                            <a:srgbClr val="FFFFFF"/>
+                          </a:solidFill>
+                          <a:latin typeface="Calibri"/>
+                        </a:rPr>
                         <a:t>PREC. %</a:t>
                       </a:r>
                     </a:p>
@@ -7475,11 +7748,17 @@
                     <a:lstStyle/>
                     <a:p>
                       <a:pPr>
-                        <a:defRPr sz="950" b="1">
-                          <a:latin typeface="Segoe UI"/>
+                        <a:defRPr>
+                          <a:latin typeface="Calibri"/>
                         </a:defRPr>
                       </a:pPr>
                       <a:r>
+                        <a:rPr sz="1100" b="1">
+                          <a:solidFill>
+                            <a:srgbClr val="FFFFFF"/>
+                          </a:solidFill>
+                          <a:latin typeface="Calibri"/>
+                        </a:rPr>
                         <a:t>REC. %</a:t>
                       </a:r>
                     </a:p>
@@ -7520,11 +7799,17 @@
                     <a:lstStyle/>
                     <a:p>
                       <a:pPr>
-                        <a:defRPr sz="950" b="1">
-                          <a:latin typeface="Segoe UI"/>
+                        <a:defRPr>
+                          <a:latin typeface="Calibri"/>
                         </a:defRPr>
                       </a:pPr>
                       <a:r>
+                        <a:rPr sz="1100" b="1">
+                          <a:solidFill>
+                            <a:srgbClr val="FFFFFF"/>
+                          </a:solidFill>
+                          <a:latin typeface="Calibri"/>
+                        </a:rPr>
                         <a:t>F1 %</a:t>
                       </a:r>
                     </a:p>
@@ -7565,11 +7850,17 @@
                     <a:lstStyle/>
                     <a:p>
                       <a:pPr>
-                        <a:defRPr sz="950" b="1">
-                          <a:latin typeface="Segoe UI"/>
+                        <a:defRPr>
+                          <a:latin typeface="Calibri"/>
                         </a:defRPr>
                       </a:pPr>
                       <a:r>
+                        <a:rPr sz="1100" b="1">
+                          <a:solidFill>
+                            <a:srgbClr val="FFFFFF"/>
+                          </a:solidFill>
+                          <a:latin typeface="Calibri"/>
+                        </a:rPr>
                         <a:t>AUC</a:t>
                       </a:r>
                     </a:p>
@@ -7617,11 +7908,17 @@
                     <a:lstStyle/>
                     <a:p>
                       <a:pPr>
-                        <a:defRPr sz="850" b="1">
-                          <a:latin typeface="Segoe UI"/>
+                        <a:defRPr>
+                          <a:latin typeface="Calibri"/>
                         </a:defRPr>
                       </a:pPr>
                       <a:r>
+                        <a:rPr sz="1100" b="1">
+                          <a:solidFill>
+                            <a:srgbClr val="1A1A1A"/>
+                          </a:solidFill>
+                          <a:latin typeface="Calibri"/>
+                        </a:rPr>
                         <a:t>Logistic regression</a:t>
                       </a:r>
                     </a:p>
@@ -7659,11 +7956,17 @@
                     <a:lstStyle/>
                     <a:p>
                       <a:pPr>
-                        <a:defRPr sz="850">
-                          <a:latin typeface="Segoe UI"/>
+                        <a:defRPr>
+                          <a:latin typeface="Calibri"/>
                         </a:defRPr>
                       </a:pPr>
                       <a:r>
+                        <a:rPr sz="1100" b="0">
+                          <a:solidFill>
+                            <a:srgbClr val="1A1A1A"/>
+                          </a:solidFill>
+                          <a:latin typeface="Calibri"/>
+                        </a:rPr>
                         <a:t>74.80</a:t>
                       </a:r>
                     </a:p>
@@ -7701,11 +8004,17 @@
                     <a:lstStyle/>
                     <a:p>
                       <a:pPr>
-                        <a:defRPr sz="850">
-                          <a:latin typeface="Segoe UI"/>
+                        <a:defRPr>
+                          <a:latin typeface="Calibri"/>
                         </a:defRPr>
                       </a:pPr>
                       <a:r>
+                        <a:rPr sz="1100" b="0">
+                          <a:solidFill>
+                            <a:srgbClr val="1A1A1A"/>
+                          </a:solidFill>
+                          <a:latin typeface="Calibri"/>
+                        </a:rPr>
                         <a:t>80.68</a:t>
                       </a:r>
                     </a:p>
@@ -7743,11 +8052,17 @@
                     <a:lstStyle/>
                     <a:p>
                       <a:pPr>
-                        <a:defRPr sz="850">
-                          <a:latin typeface="Segoe UI"/>
+                        <a:defRPr>
+                          <a:latin typeface="Calibri"/>
                         </a:defRPr>
                       </a:pPr>
                       <a:r>
+                        <a:rPr sz="1100" b="0">
+                          <a:solidFill>
+                            <a:srgbClr val="1A1A1A"/>
+                          </a:solidFill>
+                          <a:latin typeface="Calibri"/>
+                        </a:rPr>
                         <a:t>83.53</a:t>
                       </a:r>
                     </a:p>
@@ -7785,11 +8100,17 @@
                     <a:lstStyle/>
                     <a:p>
                       <a:pPr>
-                        <a:defRPr sz="850">
-                          <a:latin typeface="Segoe UI"/>
+                        <a:defRPr>
+                          <a:latin typeface="Calibri"/>
                         </a:defRPr>
                       </a:pPr>
                       <a:r>
+                        <a:rPr sz="1100" b="0">
+                          <a:solidFill>
+                            <a:srgbClr val="1A1A1A"/>
+                          </a:solidFill>
+                          <a:latin typeface="Calibri"/>
+                        </a:rPr>
                         <a:t>82.08</a:t>
                       </a:r>
                     </a:p>
@@ -7827,11 +8148,17 @@
                     <a:lstStyle/>
                     <a:p>
                       <a:pPr>
-                        <a:defRPr sz="850">
-                          <a:latin typeface="Segoe UI"/>
+                        <a:defRPr>
+                          <a:latin typeface="Calibri"/>
                         </a:defRPr>
                       </a:pPr>
                       <a:r>
+                        <a:rPr sz="1100" b="0">
+                          <a:solidFill>
+                            <a:srgbClr val="1A1A1A"/>
+                          </a:solidFill>
+                          <a:latin typeface="Calibri"/>
+                        </a:rPr>
                         <a:t>0.728</a:t>
                       </a:r>
                     </a:p>
@@ -7876,11 +8203,17 @@
                     <a:lstStyle/>
                     <a:p>
                       <a:pPr>
-                        <a:defRPr sz="850" b="1">
-                          <a:latin typeface="Segoe UI"/>
+                        <a:defRPr>
+                          <a:latin typeface="Calibri"/>
                         </a:defRPr>
                       </a:pPr>
                       <a:r>
+                        <a:rPr sz="1100" b="1">
+                          <a:solidFill>
+                            <a:srgbClr val="1A1A1A"/>
+                          </a:solidFill>
+                          <a:latin typeface="Calibri"/>
+                        </a:rPr>
                         <a:t>Gradient boosting</a:t>
                       </a:r>
                     </a:p>
@@ -7921,11 +8254,17 @@
                     <a:lstStyle/>
                     <a:p>
                       <a:pPr>
-                        <a:defRPr sz="850">
-                          <a:latin typeface="Segoe UI"/>
+                        <a:defRPr>
+                          <a:latin typeface="Calibri"/>
                         </a:defRPr>
                       </a:pPr>
                       <a:r>
+                        <a:rPr sz="1100" b="0">
+                          <a:solidFill>
+                            <a:srgbClr val="1A1A1A"/>
+                          </a:solidFill>
+                          <a:latin typeface="Calibri"/>
+                        </a:rPr>
                         <a:t>80.49</a:t>
                       </a:r>
                     </a:p>
@@ -7966,11 +8305,17 @@
                     <a:lstStyle/>
                     <a:p>
                       <a:pPr>
-                        <a:defRPr sz="850">
-                          <a:latin typeface="Segoe UI"/>
+                        <a:defRPr>
+                          <a:latin typeface="Calibri"/>
                         </a:defRPr>
                       </a:pPr>
                       <a:r>
+                        <a:rPr sz="1100" b="0">
+                          <a:solidFill>
+                            <a:srgbClr val="1A1A1A"/>
+                          </a:solidFill>
+                          <a:latin typeface="Calibri"/>
+                        </a:rPr>
                         <a:t>82.80</a:t>
                       </a:r>
                     </a:p>
@@ -8011,11 +8356,17 @@
                     <a:lstStyle/>
                     <a:p>
                       <a:pPr>
-                        <a:defRPr sz="850">
-                          <a:latin typeface="Segoe UI"/>
+                        <a:defRPr>
+                          <a:latin typeface="Calibri"/>
                         </a:defRPr>
                       </a:pPr>
                       <a:r>
+                        <a:rPr sz="1100" b="0">
+                          <a:solidFill>
+                            <a:srgbClr val="1A1A1A"/>
+                          </a:solidFill>
+                          <a:latin typeface="Calibri"/>
+                        </a:rPr>
                         <a:t>90.59</a:t>
                       </a:r>
                     </a:p>
@@ -8056,11 +8407,17 @@
                     <a:lstStyle/>
                     <a:p>
                       <a:pPr>
-                        <a:defRPr sz="850">
-                          <a:latin typeface="Segoe UI"/>
+                        <a:defRPr>
+                          <a:latin typeface="Calibri"/>
                         </a:defRPr>
                       </a:pPr>
                       <a:r>
+                        <a:rPr sz="1100" b="0">
+                          <a:solidFill>
+                            <a:srgbClr val="1A1A1A"/>
+                          </a:solidFill>
+                          <a:latin typeface="Calibri"/>
+                        </a:rPr>
                         <a:t>86.52</a:t>
                       </a:r>
                     </a:p>
@@ -8101,11 +8458,17 @@
                     <a:lstStyle/>
                     <a:p>
                       <a:pPr>
-                        <a:defRPr sz="850">
-                          <a:latin typeface="Segoe UI"/>
+                        <a:defRPr>
+                          <a:latin typeface="Calibri"/>
                         </a:defRPr>
                       </a:pPr>
                       <a:r>
+                        <a:rPr sz="1100" b="0">
+                          <a:solidFill>
+                            <a:srgbClr val="1A1A1A"/>
+                          </a:solidFill>
+                          <a:latin typeface="Calibri"/>
+                        </a:rPr>
                         <a:t>0.705</a:t>
                       </a:r>
                     </a:p>
@@ -8153,11 +8516,17 @@
                     <a:lstStyle/>
                     <a:p>
                       <a:pPr>
-                        <a:defRPr sz="850" b="1">
-                          <a:latin typeface="Segoe UI"/>
+                        <a:defRPr>
+                          <a:latin typeface="Calibri"/>
                         </a:defRPr>
                       </a:pPr>
                       <a:r>
+                        <a:rPr sz="1100" b="1">
+                          <a:solidFill>
+                            <a:srgbClr val="1A1A1A"/>
+                          </a:solidFill>
+                          <a:latin typeface="Calibri"/>
+                        </a:rPr>
                         <a:t>Hist. grad. boosting</a:t>
                       </a:r>
                     </a:p>
@@ -8195,11 +8564,17 @@
                     <a:lstStyle/>
                     <a:p>
                       <a:pPr>
-                        <a:defRPr sz="850">
-                          <a:latin typeface="Segoe UI"/>
+                        <a:defRPr>
+                          <a:latin typeface="Calibri"/>
                         </a:defRPr>
                       </a:pPr>
                       <a:r>
+                        <a:rPr sz="1100" b="0">
+                          <a:solidFill>
+                            <a:srgbClr val="1A1A1A"/>
+                          </a:solidFill>
+                          <a:latin typeface="Calibri"/>
+                        </a:rPr>
                         <a:t>82.11</a:t>
                       </a:r>
                     </a:p>
@@ -8237,11 +8612,17 @@
                     <a:lstStyle/>
                     <a:p>
                       <a:pPr>
-                        <a:defRPr sz="850">
-                          <a:latin typeface="Segoe UI"/>
+                        <a:defRPr>
+                          <a:latin typeface="Calibri"/>
                         </a:defRPr>
                       </a:pPr>
                       <a:r>
+                        <a:rPr sz="1100" b="0">
+                          <a:solidFill>
+                            <a:srgbClr val="1A1A1A"/>
+                          </a:solidFill>
+                          <a:latin typeface="Calibri"/>
+                        </a:rPr>
                         <a:t>82.47</a:t>
                       </a:r>
                     </a:p>
@@ -8279,11 +8660,17 @@
                     <a:lstStyle/>
                     <a:p>
                       <a:pPr>
-                        <a:defRPr sz="850">
-                          <a:latin typeface="Segoe UI"/>
+                        <a:defRPr>
+                          <a:latin typeface="Calibri"/>
                         </a:defRPr>
                       </a:pPr>
                       <a:r>
+                        <a:rPr sz="1100" b="0">
+                          <a:solidFill>
+                            <a:srgbClr val="1A1A1A"/>
+                          </a:solidFill>
+                          <a:latin typeface="Calibri"/>
+                        </a:rPr>
                         <a:t>94.12</a:t>
                       </a:r>
                     </a:p>
@@ -8321,11 +8708,17 @@
                     <a:lstStyle/>
                     <a:p>
                       <a:pPr>
-                        <a:defRPr sz="850">
-                          <a:latin typeface="Segoe UI"/>
+                        <a:defRPr>
+                          <a:latin typeface="Calibri"/>
                         </a:defRPr>
                       </a:pPr>
                       <a:r>
+                        <a:rPr sz="1100" b="0">
+                          <a:solidFill>
+                            <a:srgbClr val="1A1A1A"/>
+                          </a:solidFill>
+                          <a:latin typeface="Calibri"/>
+                        </a:rPr>
                         <a:t>87.91</a:t>
                       </a:r>
                     </a:p>
@@ -8363,11 +8756,17 @@
                     <a:lstStyle/>
                     <a:p>
                       <a:pPr>
-                        <a:defRPr sz="850">
-                          <a:latin typeface="Segoe UI"/>
+                        <a:defRPr>
+                          <a:latin typeface="Calibri"/>
                         </a:defRPr>
                       </a:pPr>
                       <a:r>
+                        <a:rPr sz="1100" b="0">
+                          <a:solidFill>
+                            <a:srgbClr val="1A1A1A"/>
+                          </a:solidFill>
+                          <a:latin typeface="Calibri"/>
+                        </a:rPr>
                         <a:t>0.734</a:t>
                       </a:r>
                     </a:p>
@@ -8412,11 +8811,17 @@
                     <a:lstStyle/>
                     <a:p>
                       <a:pPr>
-                        <a:defRPr sz="850" b="1">
-                          <a:latin typeface="Segoe UI"/>
+                        <a:defRPr>
+                          <a:latin typeface="Calibri"/>
                         </a:defRPr>
                       </a:pPr>
                       <a:r>
+                        <a:rPr sz="1100" b="1">
+                          <a:solidFill>
+                            <a:srgbClr val="1A1A1A"/>
+                          </a:solidFill>
+                          <a:latin typeface="Calibri"/>
+                        </a:rPr>
                         <a:t>Random forest (Model 5)</a:t>
                       </a:r>
                     </a:p>
@@ -8457,11 +8862,17 @@
                     <a:lstStyle/>
                     <a:p>
                       <a:pPr>
-                        <a:defRPr sz="850">
-                          <a:latin typeface="Segoe UI"/>
+                        <a:defRPr>
+                          <a:latin typeface="Calibri"/>
                         </a:defRPr>
                       </a:pPr>
                       <a:r>
+                        <a:rPr sz="1100" b="0">
+                          <a:solidFill>
+                            <a:srgbClr val="1A1A1A"/>
+                          </a:solidFill>
+                          <a:latin typeface="Calibri"/>
+                        </a:rPr>
                         <a:t>85.37</a:t>
                       </a:r>
                     </a:p>
@@ -8502,11 +8913,17 @@
                     <a:lstStyle/>
                     <a:p>
                       <a:pPr>
-                        <a:defRPr sz="850">
-                          <a:latin typeface="Segoe UI"/>
+                        <a:defRPr>
+                          <a:latin typeface="Calibri"/>
                         </a:defRPr>
                       </a:pPr>
                       <a:r>
+                        <a:rPr sz="1100" b="0">
+                          <a:solidFill>
+                            <a:srgbClr val="1A1A1A"/>
+                          </a:solidFill>
+                          <a:latin typeface="Calibri"/>
+                        </a:rPr>
                         <a:t>83.17</a:t>
                       </a:r>
                     </a:p>
@@ -8547,11 +8964,17 @@
                     <a:lstStyle/>
                     <a:p>
                       <a:pPr>
-                        <a:defRPr sz="850">
-                          <a:latin typeface="Segoe UI"/>
+                        <a:defRPr>
+                          <a:latin typeface="Calibri"/>
                         </a:defRPr>
                       </a:pPr>
                       <a:r>
+                        <a:rPr sz="1100" b="0">
+                          <a:solidFill>
+                            <a:srgbClr val="1A1A1A"/>
+                          </a:solidFill>
+                          <a:latin typeface="Calibri"/>
+                        </a:rPr>
                         <a:t>98.82</a:t>
                       </a:r>
                     </a:p>
@@ -8592,11 +9015,17 @@
                     <a:lstStyle/>
                     <a:p>
                       <a:pPr>
-                        <a:defRPr sz="850">
-                          <a:latin typeface="Segoe UI"/>
+                        <a:defRPr>
+                          <a:latin typeface="Calibri"/>
                         </a:defRPr>
                       </a:pPr>
                       <a:r>
+                        <a:rPr sz="1100" b="0">
+                          <a:solidFill>
+                            <a:srgbClr val="1A1A1A"/>
+                          </a:solidFill>
+                          <a:latin typeface="Calibri"/>
+                        </a:rPr>
                         <a:t>90.32</a:t>
                       </a:r>
                     </a:p>
@@ -8637,11 +9066,17 @@
                     <a:lstStyle/>
                     <a:p>
                       <a:pPr>
-                        <a:defRPr sz="850">
-                          <a:latin typeface="Segoe UI"/>
+                        <a:defRPr>
+                          <a:latin typeface="Calibri"/>
                         </a:defRPr>
                       </a:pPr>
                       <a:r>
+                        <a:rPr sz="1100" b="0">
+                          <a:solidFill>
+                            <a:srgbClr val="1A1A1A"/>
+                          </a:solidFill>
+                          <a:latin typeface="Calibri"/>
+                        </a:rPr>
                         <a:t>0.729</a:t>
                       </a:r>
                     </a:p>
@@ -8689,11 +9124,17 @@
                     <a:lstStyle/>
                     <a:p>
                       <a:pPr>
-                        <a:defRPr sz="850" b="1">
-                          <a:latin typeface="Segoe UI"/>
+                        <a:defRPr>
+                          <a:latin typeface="Calibri"/>
                         </a:defRPr>
                       </a:pPr>
                       <a:r>
+                        <a:rPr sz="1100" b="1">
+                          <a:solidFill>
+                            <a:srgbClr val="1A1A1A"/>
+                          </a:solidFill>
+                          <a:latin typeface="Calibri"/>
+                        </a:rPr>
                         <a:t>EBM Glass-Box (Model 4)</a:t>
                       </a:r>
                     </a:p>
@@ -8731,11 +9172,17 @@
                     <a:lstStyle/>
                     <a:p>
                       <a:pPr>
-                        <a:defRPr sz="850">
-                          <a:latin typeface="Segoe UI"/>
+                        <a:defRPr>
+                          <a:latin typeface="Calibri"/>
                         </a:defRPr>
                       </a:pPr>
                       <a:r>
+                        <a:rPr sz="1100" b="0">
+                          <a:solidFill>
+                            <a:srgbClr val="1A1A1A"/>
+                          </a:solidFill>
+                          <a:latin typeface="Calibri"/>
+                        </a:rPr>
                         <a:t>85.37</a:t>
                       </a:r>
                     </a:p>
@@ -8773,11 +9220,17 @@
                     <a:lstStyle/>
                     <a:p>
                       <a:pPr>
-                        <a:defRPr sz="850">
-                          <a:latin typeface="Segoe UI"/>
+                        <a:defRPr>
+                          <a:latin typeface="Calibri"/>
                         </a:defRPr>
                       </a:pPr>
                       <a:r>
+                        <a:rPr sz="1100" b="0">
+                          <a:solidFill>
+                            <a:srgbClr val="1A1A1A"/>
+                          </a:solidFill>
+                          <a:latin typeface="Calibri"/>
+                        </a:rPr>
                         <a:t>83.17</a:t>
                       </a:r>
                     </a:p>
@@ -8815,11 +9268,17 @@
                     <a:lstStyle/>
                     <a:p>
                       <a:pPr>
-                        <a:defRPr sz="850">
-                          <a:latin typeface="Segoe UI"/>
+                        <a:defRPr>
+                          <a:latin typeface="Calibri"/>
                         </a:defRPr>
                       </a:pPr>
                       <a:r>
+                        <a:rPr sz="1100" b="0">
+                          <a:solidFill>
+                            <a:srgbClr val="1A1A1A"/>
+                          </a:solidFill>
+                          <a:latin typeface="Calibri"/>
+                        </a:rPr>
                         <a:t>98.82</a:t>
                       </a:r>
                     </a:p>
@@ -8857,11 +9316,17 @@
                     <a:lstStyle/>
                     <a:p>
                       <a:pPr>
-                        <a:defRPr sz="850">
-                          <a:latin typeface="Segoe UI"/>
+                        <a:defRPr>
+                          <a:latin typeface="Calibri"/>
                         </a:defRPr>
                       </a:pPr>
                       <a:r>
+                        <a:rPr sz="1100" b="0">
+                          <a:solidFill>
+                            <a:srgbClr val="1A1A1A"/>
+                          </a:solidFill>
+                          <a:latin typeface="Calibri"/>
+                        </a:rPr>
                         <a:t>90.32</a:t>
                       </a:r>
                     </a:p>
@@ -8899,11 +9364,17 @@
                     <a:lstStyle/>
                     <a:p>
                       <a:pPr>
-                        <a:defRPr sz="850">
-                          <a:latin typeface="Segoe UI"/>
+                        <a:defRPr>
+                          <a:latin typeface="Calibri"/>
                         </a:defRPr>
                       </a:pPr>
                       <a:r>
+                        <a:rPr sz="1100" b="0">
+                          <a:solidFill>
+                            <a:srgbClr val="1A1A1A"/>
+                          </a:solidFill>
+                          <a:latin typeface="Calibri"/>
+                        </a:rPr>
                         <a:t>0.752</a:t>
                       </a:r>
                     </a:p>
@@ -9179,16 +9650,13 @@
           </a:bodyPr>
           <a:lstStyle/>
           <a:p>
-            <a:pPr>
-              <a:defRPr sz="850">
-                <a:solidFill>
-                  <a:srgbClr val="1A1A1A"/>
-                </a:solidFill>
-                <a:latin typeface="Calibri"/>
-              </a:defRPr>
-            </a:pPr>
-            <a:r>
-              <a:t>Outcome: EBM ties Random Forest at 85.37% accuracy and leads in AUC (0.752). It provides state-of-the-art predictive power while remaining 100% explainable, beating logistic regression by +10.57% accuracy.</a:t>
+            <a:r>
+              <a:rPr b="1" sz="1100"/>
+              <a:t>Outcome: </a:t>
+            </a:r>
+            <a:r>
+              <a:rPr sz="1100"/>
+              <a:t>EBM ties random forest and leads in AUC; +10.57 points accuracy over logistic regression. 5-fold CV: 83.25 ± 1.72% accuracy, AUC 0.763.</a:t>
             </a:r>
           </a:p>
         </p:txBody>
@@ -9351,13 +9819,17 @@
           </a:bodyPr>
           <a:lstStyle/>
           <a:p>
-            <a:pPr>
-              <a:defRPr sz="1800" b="1">
-                <a:latin typeface="Segoe UI"/>
-              </a:defRPr>
+            <a:pPr marL="12700">
+              <a:lnSpc>
+                <a:spcPct val="100000"/>
+              </a:lnSpc>
+              <a:spcBef>
+                <a:spcPts val="95"/>
+              </a:spcBef>
             </a:pPr>
             <a:r>
-              <a:t>RESULTS: DEMO PERSONAS &amp; FRAUD DEFENSE</a:t>
+              <a:rPr spc="-45" dirty="0"/>
+              <a:t>RESULTS: SAMPLE PREDICTIONS AND ABLATION</a:t>
             </a:r>
           </a:p>
         </p:txBody>
@@ -9384,7 +9856,7 @@
           <a:lstStyle/>
           <a:p>
             <a:pPr>
-              <a:defRPr sz="1100">
+              <a:defRPr sz="1100" b="0">
                 <a:solidFill>
                   <a:srgbClr val="6B6B6B"/>
                 </a:solidFill>
@@ -9392,7 +9864,7 @@
               </a:defRPr>
             </a:pPr>
             <a:r>
-              <a:t>Real-World Verification Demonstrating How Fraud is Stopped and Decisions are Explained</a:t>
+              <a:t>Three end-to-end runs of the prototype and fraud defense results</a:t>
             </a:r>
           </a:p>
         </p:txBody>
@@ -9460,17 +9932,28 @@
           </a:bodyPr>
           <a:lstStyle/>
           <a:p>
-            <a:pPr>
-              <a:defRPr sz="1100" b="1">
+            <a:pPr marL="12700">
+              <a:lnSpc>
+                <a:spcPct val="100000"/>
+              </a:lnSpc>
+              <a:spcBef>
+                <a:spcPts val="95"/>
+              </a:spcBef>
+            </a:pPr>
+            <a:r>
+              <a:rPr sz="950" b="1" spc="70" dirty="0">
                 <a:solidFill>
                   <a:srgbClr val="1F4D39"/>
                 </a:solidFill>
                 <a:latin typeface="Calibri"/>
-              </a:defRPr>
-            </a:pPr>
-            <a:r>
-              <a:t>DEMONSTRATION TEST CASES</a:t>
-            </a:r>
+                <a:cs typeface="Calibri"/>
+              </a:rPr>
+              <a:t>SAMPLE PREDICTIONS</a:t>
+            </a:r>
+            <a:endParaRPr sz="950">
+              <a:latin typeface="Calibri"/>
+              <a:cs typeface="Calibri"/>
+            </a:endParaRPr>
           </a:p>
         </p:txBody>
       </p:sp>
@@ -9495,17 +9978,28 @@
           </a:bodyPr>
           <a:lstStyle/>
           <a:p>
-            <a:pPr>
-              <a:defRPr sz="1100" b="1">
+            <a:pPr marL="12700">
+              <a:lnSpc>
+                <a:spcPct val="100000"/>
+              </a:lnSpc>
+              <a:spcBef>
+                <a:spcPts val="95"/>
+              </a:spcBef>
+            </a:pPr>
+            <a:r>
+              <a:rPr sz="950" b="1" spc="65" dirty="0">
                 <a:solidFill>
                   <a:srgbClr val="1F4D39"/>
                 </a:solidFill>
                 <a:latin typeface="Calibri"/>
-              </a:defRPr>
-            </a:pPr>
-            <a:r>
-              <a:t>SAMPLE EBM REJECTION REASONS</a:t>
-            </a:r>
+                <a:cs typeface="Calibri"/>
+              </a:rPr>
+              <a:t>ABLATION STUDY (TEST SPLIT)</a:t>
+            </a:r>
+            <a:endParaRPr sz="950">
+              <a:latin typeface="Calibri"/>
+              <a:cs typeface="Calibri"/>
+            </a:endParaRPr>
           </a:p>
         </p:txBody>
       </p:sp>
@@ -9578,12 +10072,18 @@
                     <a:lstStyle/>
                     <a:p>
                       <a:pPr>
-                        <a:defRPr sz="900" b="1">
-                          <a:latin typeface="Segoe UI"/>
+                        <a:defRPr>
+                          <a:latin typeface="Calibri"/>
                         </a:defRPr>
                       </a:pPr>
                       <a:r>
-                        <a:t>TEST CASE</a:t>
+                        <a:rPr sz="1050" b="1">
+                          <a:solidFill>
+                            <a:srgbClr val="FFFFFF"/>
+                          </a:solidFill>
+                          <a:latin typeface="Calibri"/>
+                        </a:rPr>
+                        <a:t>PROFILE</a:t>
                       </a:r>
                     </a:p>
                   </a:txBody>
@@ -9623,12 +10123,18 @@
                     <a:lstStyle/>
                     <a:p>
                       <a:pPr>
-                        <a:defRPr sz="900" b="1">
-                          <a:latin typeface="Segoe UI"/>
+                        <a:defRPr>
+                          <a:latin typeface="Calibri"/>
                         </a:defRPr>
                       </a:pPr>
                       <a:r>
-                        <a:t>OTP</a:t>
+                        <a:rPr sz="1050" b="1">
+                          <a:solidFill>
+                            <a:srgbClr val="FFFFFF"/>
+                          </a:solidFill>
+                          <a:latin typeface="Calibri"/>
+                        </a:rPr>
+                        <a:t>SCORE</a:t>
                       </a:r>
                     </a:p>
                   </a:txBody>
@@ -9668,12 +10174,18 @@
                     <a:lstStyle/>
                     <a:p>
                       <a:pPr>
-                        <a:defRPr sz="900" b="1">
-                          <a:latin typeface="Segoe UI"/>
+                        <a:defRPr>
+                          <a:latin typeface="Calibri"/>
                         </a:defRPr>
                       </a:pPr>
                       <a:r>
-                        <a:t>FACE MATCH</a:t>
+                        <a:rPr sz="1050" b="1">
+                          <a:solidFill>
+                            <a:srgbClr val="FFFFFF"/>
+                          </a:solidFill>
+                          <a:latin typeface="Calibri"/>
+                        </a:rPr>
+                        <a:t>DTI %</a:t>
                       </a:r>
                     </a:p>
                   </a:txBody>
@@ -9713,12 +10225,18 @@
                     <a:lstStyle/>
                     <a:p>
                       <a:pPr>
-                        <a:defRPr sz="900" b="1">
-                          <a:latin typeface="Segoe UI"/>
+                        <a:defRPr>
+                          <a:latin typeface="Calibri"/>
                         </a:defRPr>
                       </a:pPr>
                       <a:r>
-                        <a:t>OCR NAME</a:t>
+                        <a:rPr sz="1050" b="1">
+                          <a:solidFill>
+                            <a:srgbClr val="FFFFFF"/>
+                          </a:solidFill>
+                          <a:latin typeface="Calibri"/>
+                        </a:rPr>
+                        <a:t>UTIL. %</a:t>
                       </a:r>
                     </a:p>
                   </a:txBody>
@@ -9758,12 +10276,18 @@
                     <a:lstStyle/>
                     <a:p>
                       <a:pPr>
-                        <a:defRPr sz="900" b="1">
-                          <a:latin typeface="Segoe UI"/>
+                        <a:defRPr>
+                          <a:latin typeface="Calibri"/>
                         </a:defRPr>
                       </a:pPr>
                       <a:r>
-                        <a:t>VERDICT</a:t>
+                        <a:rPr sz="1050" b="1">
+                          <a:solidFill>
+                            <a:srgbClr val="FFFFFF"/>
+                          </a:solidFill>
+                          <a:latin typeface="Calibri"/>
+                        </a:rPr>
+                        <a:t>PROB.</a:t>
                       </a:r>
                     </a:p>
                   </a:txBody>
@@ -9803,12 +10327,18 @@
                     <a:lstStyle/>
                     <a:p>
                       <a:pPr>
-                        <a:defRPr sz="900" b="1">
-                          <a:latin typeface="Segoe UI"/>
+                        <a:defRPr>
+                          <a:latin typeface="Calibri"/>
                         </a:defRPr>
                       </a:pPr>
                       <a:r>
-                        <a:t>EXPLANATION</a:t>
+                        <a:rPr sz="1050" b="1">
+                          <a:solidFill>
+                            <a:srgbClr val="FFFFFF"/>
+                          </a:solidFill>
+                          <a:latin typeface="Calibri"/>
+                        </a:rPr>
+                        <a:t>OUTCOME</a:t>
                       </a:r>
                     </a:p>
                   </a:txBody>
@@ -9855,12 +10385,18 @@
                     <a:lstStyle/>
                     <a:p>
                       <a:pPr>
-                        <a:defRPr sz="800" b="1">
-                          <a:latin typeface="Segoe UI"/>
+                        <a:defRPr>
+                          <a:latin typeface="Calibri"/>
                         </a:defRPr>
                       </a:pPr>
                       <a:r>
-                        <a:t>Jeeva Bharathi M</a:t>
+                        <a:rPr sz="1050" b="1">
+                          <a:solidFill>
+                            <a:srgbClr val="1A1A1A"/>
+                          </a:solidFill>
+                          <a:latin typeface="Calibri"/>
+                        </a:rPr>
+                        <a:t>Prime (Jeeva M)</a:t>
                       </a:r>
                     </a:p>
                   </a:txBody>
@@ -9897,12 +10433,18 @@
                     <a:lstStyle/>
                     <a:p>
                       <a:pPr>
-                        <a:defRPr sz="800">
-                          <a:latin typeface="Segoe UI"/>
+                        <a:defRPr>
+                          <a:latin typeface="Calibri"/>
                         </a:defRPr>
                       </a:pPr>
                       <a:r>
-                        <a:t>Valid</a:t>
+                        <a:rPr sz="1050" b="0">
+                          <a:solidFill>
+                            <a:srgbClr val="1A1A1A"/>
+                          </a:solidFill>
+                          <a:latin typeface="Calibri"/>
+                        </a:rPr>
+                        <a:t>785</a:t>
                       </a:r>
                     </a:p>
                   </a:txBody>
@@ -9939,12 +10481,18 @@
                     <a:lstStyle/>
                     <a:p>
                       <a:pPr>
-                        <a:defRPr sz="800">
-                          <a:latin typeface="Segoe UI"/>
+                        <a:defRPr>
+                          <a:latin typeface="Calibri"/>
                         </a:defRPr>
                       </a:pPr>
                       <a:r>
-                        <a:t>91.2% (Pass)</a:t>
+                        <a:rPr sz="1050" b="0">
+                          <a:solidFill>
+                            <a:srgbClr val="1A1A1A"/>
+                          </a:solidFill>
+                          <a:latin typeface="Calibri"/>
+                        </a:rPr>
+                        <a:t>28.0</a:t>
                       </a:r>
                     </a:p>
                   </a:txBody>
@@ -9981,12 +10529,18 @@
                     <a:lstStyle/>
                     <a:p>
                       <a:pPr>
-                        <a:defRPr sz="800">
-                          <a:latin typeface="Segoe UI"/>
+                        <a:defRPr>
+                          <a:latin typeface="Calibri"/>
                         </a:defRPr>
                       </a:pPr>
                       <a:r>
-                        <a:t>100% (Pass)</a:t>
+                        <a:rPr sz="1050" b="0">
+                          <a:solidFill>
+                            <a:srgbClr val="1A1A1A"/>
+                          </a:solidFill>
+                          <a:latin typeface="Calibri"/>
+                        </a:rPr>
+                        <a:t>18</a:t>
                       </a:r>
                     </a:p>
                   </a:txBody>
@@ -10023,12 +10577,18 @@
                     <a:lstStyle/>
                     <a:p>
                       <a:pPr>
-                        <a:defRPr sz="800">
-                          <a:latin typeface="Segoe UI"/>
+                        <a:defRPr>
+                          <a:latin typeface="Calibri"/>
                         </a:defRPr>
                       </a:pPr>
                       <a:r>
-                        <a:t>Approved</a:t>
+                        <a:rPr sz="1050" b="0">
+                          <a:solidFill>
+                            <a:srgbClr val="1A1A1A"/>
+                          </a:solidFill>
+                          <a:latin typeface="Calibri"/>
+                        </a:rPr>
+                        <a:t>88.3%</a:t>
                       </a:r>
                     </a:p>
                   </a:txBody>
@@ -10065,12 +10625,18 @@
                     <a:lstStyle/>
                     <a:p>
                       <a:pPr>
-                        <a:defRPr sz="800">
-                          <a:latin typeface="Segoe UI"/>
+                        <a:defRPr>
+                          <a:latin typeface="Calibri"/>
                         </a:defRPr>
                       </a:pPr>
                       <a:r>
-                        <a:t>Low DTI (28%), CIBIL 785</a:t>
+                        <a:rPr sz="1050" b="0">
+                          <a:solidFill>
+                            <a:srgbClr val="1A1A1A"/>
+                          </a:solidFill>
+                          <a:latin typeface="Calibri"/>
+                        </a:rPr>
+                        <a:t>Approved</a:t>
                       </a:r>
                     </a:p>
                   </a:txBody>
@@ -10114,11 +10680,17 @@
                     <a:lstStyle/>
                     <a:p>
                       <a:pPr>
-                        <a:defRPr sz="800" b="1">
-                          <a:latin typeface="Segoe UI"/>
+                        <a:defRPr>
+                          <a:latin typeface="Calibri"/>
                         </a:defRPr>
                       </a:pPr>
                       <a:r>
+                        <a:rPr sz="1050" b="1">
+                          <a:solidFill>
+                            <a:srgbClr val="1A1A1A"/>
+                          </a:solidFill>
+                          <a:latin typeface="Calibri"/>
+                        </a:rPr>
                         <a:t>Stolen OTP Fraud</a:t>
                       </a:r>
                     </a:p>
@@ -10159,12 +10731,18 @@
                     <a:lstStyle/>
                     <a:p>
                       <a:pPr>
-                        <a:defRPr sz="800">
-                          <a:latin typeface="Segoe UI"/>
+                        <a:defRPr>
+                          <a:latin typeface="Calibri"/>
                         </a:defRPr>
                       </a:pPr>
                       <a:r>
-                        <a:t>Valid</a:t>
+                        <a:rPr sz="1050" b="0">
+                          <a:solidFill>
+                            <a:srgbClr val="1A1A1A"/>
+                          </a:solidFill>
+                          <a:latin typeface="Calibri"/>
+                        </a:rPr>
+                        <a:t>N/A</a:t>
                       </a:r>
                     </a:p>
                   </a:txBody>
@@ -10204,12 +10782,18 @@
                     <a:lstStyle/>
                     <a:p>
                       <a:pPr>
-                        <a:defRPr sz="800">
-                          <a:latin typeface="Segoe UI"/>
+                        <a:defRPr>
+                          <a:latin typeface="Calibri"/>
                         </a:defRPr>
                       </a:pPr>
                       <a:r>
-                        <a:t>41.5% (Fail)</a:t>
+                        <a:rPr sz="1050" b="0">
+                          <a:solidFill>
+                            <a:srgbClr val="1A1A1A"/>
+                          </a:solidFill>
+                          <a:latin typeface="Calibri"/>
+                        </a:rPr>
+                        <a:t>N/A</a:t>
                       </a:r>
                     </a:p>
                   </a:txBody>
@@ -10249,12 +10833,18 @@
                     <a:lstStyle/>
                     <a:p>
                       <a:pPr>
-                        <a:defRPr sz="800">
-                          <a:latin typeface="Segoe UI"/>
+                        <a:defRPr>
+                          <a:latin typeface="Calibri"/>
                         </a:defRPr>
                       </a:pPr>
                       <a:r>
-                        <a:t>Mismatch</a:t>
+                        <a:rPr sz="1050" b="0">
+                          <a:solidFill>
+                            <a:srgbClr val="1A1A1A"/>
+                          </a:solidFill>
+                          <a:latin typeface="Calibri"/>
+                        </a:rPr>
+                        <a:t>N/A</a:t>
                       </a:r>
                     </a:p>
                   </a:txBody>
@@ -10294,12 +10884,18 @@
                     <a:lstStyle/>
                     <a:p>
                       <a:pPr>
-                        <a:defRPr sz="800">
-                          <a:latin typeface="Segoe UI"/>
+                        <a:defRPr>
+                          <a:latin typeface="Calibri"/>
                         </a:defRPr>
                       </a:pPr>
                       <a:r>
-                        <a:t>BLOCKED</a:t>
+                        <a:rPr sz="1050" b="0">
+                          <a:solidFill>
+                            <a:srgbClr val="1A1A1A"/>
+                          </a:solidFill>
+                          <a:latin typeface="Calibri"/>
+                        </a:rPr>
+                        <a:t>0.0%</a:t>
                       </a:r>
                     </a:p>
                   </a:txBody>
@@ -10339,12 +10935,18 @@
                     <a:lstStyle/>
                     <a:p>
                       <a:pPr>
-                        <a:defRPr sz="800">
-                          <a:latin typeface="Segoe UI"/>
+                        <a:defRPr>
+                          <a:latin typeface="Calibri"/>
                         </a:defRPr>
                       </a:pPr>
                       <a:r>
-                        <a:t>Impostor face rejected</a:t>
+                        <a:rPr sz="1050" b="0">
+                          <a:solidFill>
+                            <a:srgbClr val="1A1A1A"/>
+                          </a:solidFill>
+                          <a:latin typeface="Calibri"/>
+                        </a:rPr>
+                        <a:t>BLOCKED</a:t>
                       </a:r>
                     </a:p>
                   </a:txBody>
@@ -10391,12 +10993,18 @@
                     <a:lstStyle/>
                     <a:p>
                       <a:pPr>
-                        <a:defRPr sz="800" b="1">
-                          <a:latin typeface="Segoe UI"/>
+                        <a:defRPr>
+                          <a:latin typeface="Calibri"/>
                         </a:defRPr>
                       </a:pPr>
                       <a:r>
-                        <a:t>Karthik Raman</a:t>
+                        <a:rPr sz="1050" b="1">
+                          <a:solidFill>
+                            <a:srgbClr val="1A1A1A"/>
+                          </a:solidFill>
+                          <a:latin typeface="Calibri"/>
+                        </a:rPr>
+                        <a:t>Adverse (Karthik R)</a:t>
                       </a:r>
                     </a:p>
                   </a:txBody>
@@ -10433,12 +11041,18 @@
                     <a:lstStyle/>
                     <a:p>
                       <a:pPr>
-                        <a:defRPr sz="800">
-                          <a:latin typeface="Segoe UI"/>
+                        <a:defRPr>
+                          <a:latin typeface="Calibri"/>
                         </a:defRPr>
                       </a:pPr>
                       <a:r>
-                        <a:t>Valid</a:t>
+                        <a:rPr sz="1050" b="0">
+                          <a:solidFill>
+                            <a:srgbClr val="1A1A1A"/>
+                          </a:solidFill>
+                          <a:latin typeface="Calibri"/>
+                        </a:rPr>
+                        <a:t>560</a:t>
                       </a:r>
                     </a:p>
                   </a:txBody>
@@ -10475,12 +11089,18 @@
                     <a:lstStyle/>
                     <a:p>
                       <a:pPr>
-                        <a:defRPr sz="800">
-                          <a:latin typeface="Segoe UI"/>
+                        <a:defRPr>
+                          <a:latin typeface="Calibri"/>
                         </a:defRPr>
                       </a:pPr>
                       <a:r>
-                        <a:t>88.5% (Pass)</a:t>
+                        <a:rPr sz="1050" b="0">
+                          <a:solidFill>
+                            <a:srgbClr val="1A1A1A"/>
+                          </a:solidFill>
+                          <a:latin typeface="Calibri"/>
+                        </a:rPr>
+                        <a:t>55.9</a:t>
                       </a:r>
                     </a:p>
                   </a:txBody>
@@ -10517,12 +11137,18 @@
                     <a:lstStyle/>
                     <a:p>
                       <a:pPr>
-                        <a:defRPr sz="800">
-                          <a:latin typeface="Segoe UI"/>
+                        <a:defRPr>
+                          <a:latin typeface="Calibri"/>
                         </a:defRPr>
                       </a:pPr>
                       <a:r>
-                        <a:t>98% (Pass)</a:t>
+                        <a:rPr sz="1050" b="0">
+                          <a:solidFill>
+                            <a:srgbClr val="1A1A1A"/>
+                          </a:solidFill>
+                          <a:latin typeface="Calibri"/>
+                        </a:rPr>
+                        <a:t>78</a:t>
                       </a:r>
                     </a:p>
                   </a:txBody>
@@ -10559,12 +11185,18 @@
                     <a:lstStyle/>
                     <a:p>
                       <a:pPr>
-                        <a:defRPr sz="800">
-                          <a:latin typeface="Segoe UI"/>
+                        <a:defRPr>
+                          <a:latin typeface="Calibri"/>
                         </a:defRPr>
                       </a:pPr>
                       <a:r>
-                        <a:t>Declined</a:t>
+                        <a:rPr sz="1050" b="0">
+                          <a:solidFill>
+                            <a:srgbClr val="1A1A1A"/>
+                          </a:solidFill>
+                          <a:latin typeface="Calibri"/>
+                        </a:rPr>
+                        <a:t>14.2%</a:t>
                       </a:r>
                     </a:p>
                   </a:txBody>
@@ -10601,12 +11233,18 @@
                     <a:lstStyle/>
                     <a:p>
                       <a:pPr>
-                        <a:defRPr sz="800">
-                          <a:latin typeface="Segoe UI"/>
+                        <a:defRPr>
+                          <a:latin typeface="Calibri"/>
                         </a:defRPr>
                       </a:pPr>
                       <a:r>
-                        <a:t>Clear reasons generated</a:t>
+                        <a:rPr sz="1050" b="0">
+                          <a:solidFill>
+                            <a:srgbClr val="1A1A1A"/>
+                          </a:solidFill>
+                          <a:latin typeface="Calibri"/>
+                        </a:rPr>
+                        <a:t>Declined</a:t>
                       </a:r>
                     </a:p>
                   </a:txBody>
@@ -10695,12 +11333,18 @@
                     <a:lstStyle/>
                     <a:p>
                       <a:pPr>
-                        <a:defRPr sz="900" b="1">
-                          <a:latin typeface="Segoe UI"/>
+                        <a:defRPr>
+                          <a:latin typeface="Calibri"/>
                         </a:defRPr>
                       </a:pPr>
                       <a:r>
-                        <a:t>FACTOR</a:t>
+                        <a:rPr sz="1050" b="1">
+                          <a:solidFill>
+                            <a:srgbClr val="FFFFFF"/>
+                          </a:solidFill>
+                          <a:latin typeface="Calibri"/>
+                        </a:rPr>
+                        <a:t>VARIANT</a:t>
                       </a:r>
                     </a:p>
                   </a:txBody>
@@ -10740,12 +11384,18 @@
                     <a:lstStyle/>
                     <a:p>
                       <a:pPr>
-                        <a:defRPr sz="900" b="1">
-                          <a:latin typeface="Segoe UI"/>
+                        <a:defRPr>
+                          <a:latin typeface="Calibri"/>
                         </a:defRPr>
                       </a:pPr>
                       <a:r>
-                        <a:t>VALUE</a:t>
+                        <a:rPr sz="1050" b="1">
+                          <a:solidFill>
+                            <a:srgbClr val="FFFFFF"/>
+                          </a:solidFill>
+                          <a:latin typeface="Calibri"/>
+                        </a:rPr>
+                        <a:t>ACC. %</a:t>
                       </a:r>
                     </a:p>
                   </a:txBody>
@@ -10785,12 +11435,18 @@
                     <a:lstStyle/>
                     <a:p>
                       <a:pPr>
-                        <a:defRPr sz="900" b="1">
-                          <a:latin typeface="Segoe UI"/>
+                        <a:defRPr>
+                          <a:latin typeface="Calibri"/>
                         </a:defRPr>
                       </a:pPr>
                       <a:r>
-                        <a:t>IMPACT</a:t>
+                        <a:rPr sz="1050" b="1">
+                          <a:solidFill>
+                            <a:srgbClr val="FFFFFF"/>
+                          </a:solidFill>
+                          <a:latin typeface="Calibri"/>
+                        </a:rPr>
+                        <a:t>AUC</a:t>
                       </a:r>
                     </a:p>
                   </a:txBody>
@@ -10837,12 +11493,18 @@
                     <a:lstStyle/>
                     <a:p>
                       <a:pPr>
-                        <a:defRPr sz="800" b="1">
-                          <a:latin typeface="Segoe UI"/>
+                        <a:defRPr>
+                          <a:latin typeface="Calibri"/>
                         </a:defRPr>
                       </a:pPr>
                       <a:r>
-                        <a:t>Debt-to-Income</a:t>
+                        <a:rPr sz="1050" b="1">
+                          <a:solidFill>
+                            <a:srgbClr val="1A1A1A"/>
+                          </a:solidFill>
+                          <a:latin typeface="Calibri"/>
+                        </a:rPr>
+                        <a:t>Full EBM</a:t>
                       </a:r>
                     </a:p>
                   </a:txBody>
@@ -10879,12 +11541,18 @@
                     <a:lstStyle/>
                     <a:p>
                       <a:pPr>
-                        <a:defRPr sz="800">
-                          <a:latin typeface="Segoe UI"/>
+                        <a:defRPr>
+                          <a:latin typeface="Calibri"/>
                         </a:defRPr>
                       </a:pPr>
                       <a:r>
-                        <a:t>55.9%</a:t>
+                        <a:rPr sz="1050" b="0">
+                          <a:solidFill>
+                            <a:srgbClr val="1A1A1A"/>
+                          </a:solidFill>
+                          <a:latin typeface="Calibri"/>
+                        </a:rPr>
+                        <a:t>85.37</a:t>
                       </a:r>
                     </a:p>
                   </a:txBody>
@@ -10921,12 +11589,18 @@
                     <a:lstStyle/>
                     <a:p>
                       <a:pPr>
-                        <a:defRPr sz="800">
-                          <a:latin typeface="Segoe UI"/>
+                        <a:defRPr>
+                          <a:latin typeface="Calibri"/>
                         </a:defRPr>
                       </a:pPr>
                       <a:r>
-                        <a:t>Exceeds 45% limit (-0.38)</a:t>
+                        <a:rPr sz="1050" b="0">
+                          <a:solidFill>
+                            <a:srgbClr val="1A1A1A"/>
+                          </a:solidFill>
+                          <a:latin typeface="Calibri"/>
+                        </a:rPr>
+                        <a:t>0.752</a:t>
                       </a:r>
                     </a:p>
                   </a:txBody>
@@ -10970,12 +11644,18 @@
                     <a:lstStyle/>
                     <a:p>
                       <a:pPr>
-                        <a:defRPr sz="800" b="1">
-                          <a:latin typeface="Segoe UI"/>
+                        <a:defRPr>
+                          <a:latin typeface="Calibri"/>
                         </a:defRPr>
                       </a:pPr>
                       <a:r>
-                        <a:t>CIBIL Score</a:t>
+                        <a:rPr sz="1050" b="1">
+                          <a:solidFill>
+                            <a:srgbClr val="1A1A1A"/>
+                          </a:solidFill>
+                          <a:latin typeface="Calibri"/>
+                        </a:rPr>
+                        <a:t>No interaction terms</a:t>
                       </a:r>
                     </a:p>
                   </a:txBody>
@@ -11015,12 +11695,18 @@
                     <a:lstStyle/>
                     <a:p>
                       <a:pPr>
-                        <a:defRPr sz="800">
-                          <a:latin typeface="Segoe UI"/>
+                        <a:defRPr>
+                          <a:latin typeface="Calibri"/>
                         </a:defRPr>
                       </a:pPr>
                       <a:r>
-                        <a:t>560</a:t>
+                        <a:rPr sz="1050" b="0">
+                          <a:solidFill>
+                            <a:srgbClr val="1A1A1A"/>
+                          </a:solidFill>
+                          <a:latin typeface="Calibri"/>
+                        </a:rPr>
+                        <a:t>84.55</a:t>
                       </a:r>
                     </a:p>
                   </a:txBody>
@@ -11060,12 +11746,18 @@
                     <a:lstStyle/>
                     <a:p>
                       <a:pPr>
-                        <a:defRPr sz="800">
-                          <a:latin typeface="Segoe UI"/>
+                        <a:defRPr>
+                          <a:latin typeface="Calibri"/>
                         </a:defRPr>
                       </a:pPr>
                       <a:r>
-                        <a:t>Below 650 threshold (-0.29)</a:t>
+                        <a:rPr sz="1050" b="0">
+                          <a:solidFill>
+                            <a:srgbClr val="1A1A1A"/>
+                          </a:solidFill>
+                          <a:latin typeface="Calibri"/>
+                        </a:rPr>
+                        <a:t>0.741</a:t>
                       </a:r>
                     </a:p>
                   </a:txBody>
@@ -11112,12 +11804,18 @@
                     <a:lstStyle/>
                     <a:p>
                       <a:pPr>
-                        <a:defRPr sz="800" b="1">
-                          <a:latin typeface="Segoe UI"/>
+                        <a:defRPr>
+                          <a:latin typeface="Calibri"/>
                         </a:defRPr>
                       </a:pPr>
                       <a:r>
-                        <a:t>Card Utilization</a:t>
+                        <a:rPr sz="1050" b="1">
+                          <a:solidFill>
+                            <a:srgbClr val="1A1A1A"/>
+                          </a:solidFill>
+                          <a:latin typeface="Calibri"/>
+                        </a:rPr>
+                        <a:t>No derived ratios</a:t>
                       </a:r>
                     </a:p>
                   </a:txBody>
@@ -11154,12 +11852,18 @@
                     <a:lstStyle/>
                     <a:p>
                       <a:pPr>
-                        <a:defRPr sz="800">
-                          <a:latin typeface="Segoe UI"/>
+                        <a:defRPr>
+                          <a:latin typeface="Calibri"/>
                         </a:defRPr>
                       </a:pPr>
                       <a:r>
-                        <a:t>78%</a:t>
+                        <a:rPr sz="1050" b="0">
+                          <a:solidFill>
+                            <a:srgbClr val="1A1A1A"/>
+                          </a:solidFill>
+                          <a:latin typeface="Calibri"/>
+                        </a:rPr>
+                        <a:t>82.93</a:t>
                       </a:r>
                     </a:p>
                   </a:txBody>
@@ -11196,12 +11900,18 @@
                     <a:lstStyle/>
                     <a:p>
                       <a:pPr>
-                        <a:defRPr sz="800">
-                          <a:latin typeface="Segoe UI"/>
+                        <a:defRPr>
+                          <a:latin typeface="Calibri"/>
                         </a:defRPr>
                       </a:pPr>
                       <a:r>
-                        <a:t>Revolving balance high (-0.21)</a:t>
+                        <a:rPr sz="1050" b="0">
+                          <a:solidFill>
+                            <a:srgbClr val="1A1A1A"/>
+                          </a:solidFill>
+                          <a:latin typeface="Calibri"/>
+                        </a:rPr>
+                        <a:t>0.729</a:t>
                       </a:r>
                     </a:p>
                   </a:txBody>
@@ -11245,12 +11955,18 @@
                     <a:lstStyle/>
                     <a:p>
                       <a:pPr>
-                        <a:defRPr sz="800" b="1">
-                          <a:latin typeface="Segoe UI"/>
+                        <a:defRPr>
+                          <a:latin typeface="Calibri"/>
                         </a:defRPr>
                       </a:pPr>
                       <a:r>
-                        <a:t>Remedy</a:t>
+                        <a:rPr sz="1050" b="1">
+                          <a:solidFill>
+                            <a:srgbClr val="1A1A1A"/>
+                          </a:solidFill>
+                          <a:latin typeface="Calibri"/>
+                        </a:rPr>
+                        <a:t>No bureau attributes</a:t>
                       </a:r>
                     </a:p>
                   </a:txBody>
@@ -11290,12 +12006,18 @@
                     <a:lstStyle/>
                     <a:p>
                       <a:pPr>
-                        <a:defRPr sz="800">
-                          <a:latin typeface="Segoe UI"/>
+                        <a:defRPr>
+                          <a:latin typeface="Calibri"/>
                         </a:defRPr>
                       </a:pPr>
                       <a:r>
-                        <a:t>Pay Rs. 8k</a:t>
+                        <a:rPr sz="1050" b="0">
+                          <a:solidFill>
+                            <a:srgbClr val="1A1A1A"/>
+                          </a:solidFill>
+                          <a:latin typeface="Calibri"/>
+                        </a:rPr>
+                        <a:t>69.11</a:t>
                       </a:r>
                     </a:p>
                   </a:txBody>
@@ -11335,12 +12057,18 @@
                     <a:lstStyle/>
                     <a:p>
                       <a:pPr>
-                        <a:defRPr sz="800">
-                          <a:latin typeface="Segoe UI"/>
+                        <a:defRPr>
+                          <a:latin typeface="Calibri"/>
                         </a:defRPr>
                       </a:pPr>
                       <a:r>
-                        <a:t>Re-apply in 90 days</a:t>
+                        <a:rPr sz="1050" b="0">
+                          <a:solidFill>
+                            <a:srgbClr val="1A1A1A"/>
+                          </a:solidFill>
+                          <a:latin typeface="Calibri"/>
+                        </a:rPr>
+                        <a:t>—</a:t>
                       </a:r>
                     </a:p>
                   </a:txBody>
@@ -11618,13 +12346,13 @@
           </a:bodyPr>
           <a:lstStyle/>
           <a:p>
-            <a:pPr>
-              <a:defRPr sz="850">
-                <a:latin typeface="Segoe UI"/>
-              </a:defRPr>
-            </a:pPr>
-            <a:r>
-              <a:t>Key Demonstration: Proves that stolen OTP impostors are blocked at the biometric gate, while high-risk applicants receive exact, transparent reasons for decline.</a:t>
+            <a:r>
+              <a:rPr b="1" sz="1100"/>
+              <a:t>Reading: </a:t>
+            </a:r>
+            <a:r>
+              <a:rPr sz="1100"/>
+              <a:t>removing bureau attributes drops accuracy to the 69.11% majority rate. Impostor tests confirmed 100% of stolen OTP attempts were blocked at the biometric gate.</a:t>
             </a:r>
           </a:p>
         </p:txBody>
@@ -11788,8 +12516,11 @@
           <a:lstStyle/>
           <a:p>
             <a:pPr>
-              <a:defRPr sz="1800" b="1">
-                <a:latin typeface="Segoe UI"/>
+              <a:defRPr sz="2200" b="1">
+                <a:solidFill>
+                  <a:srgbClr val="1F4D39"/>
+                </a:solidFill>
+                <a:latin typeface="Calibri"/>
               </a:defRPr>
             </a:pPr>
             <a:r>
@@ -11820,7 +12551,7 @@
           <a:lstStyle/>
           <a:p>
             <a:pPr>
-              <a:defRPr sz="1100">
+              <a:defRPr sz="1100" b="0">
                 <a:solidFill>
                   <a:srgbClr val="6B6B6B"/>
                 </a:solidFill>
@@ -11828,7 +12559,7 @@
               </a:defRPr>
             </a:pPr>
             <a:r>
-              <a:t>Direct Impact of Our 5 Models on Modern Digital Lending</a:t>
+              <a:t>Direct impact of our 5 models on modern digital lending</a:t>
             </a:r>
           </a:p>
         </p:txBody>
@@ -11952,7 +12683,7 @@
           <a:lstStyle/>
           <a:p>
             <a:pPr>
-              <a:defRPr sz="1100" b="1">
+              <a:defRPr sz="1000" b="1">
                 <a:solidFill>
                   <a:srgbClr val="FFFFFF"/>
                 </a:solidFill>
@@ -11960,7 +12691,7 @@
               </a:defRPr>
             </a:pPr>
             <a:r>
-              <a:t>PROBLEM 1 &amp; 2 SOLUTIONS</a:t>
+              <a:t>SOLVING DELAYS &amp; FAKE CERTIFICATES</a:t>
             </a:r>
           </a:p>
         </p:txBody>
@@ -12042,7 +12773,7 @@
           <a:lstStyle/>
           <a:p>
             <a:pPr>
-              <a:defRPr sz="1100" b="1">
+              <a:defRPr sz="1000" b="1">
                 <a:solidFill>
                   <a:srgbClr val="FFFFFF"/>
                 </a:solidFill>
@@ -12050,7 +12781,7 @@
               </a:defRPr>
             </a:pPr>
             <a:r>
-              <a:t>PROBLEM 3 &amp; 4 SOLUTIONS</a:t>
+              <a:t>SOLVING OTP THEFT &amp; BLACK-BOX REJECTIONS</a:t>
             </a:r>
           </a:p>
         </p:txBody>
@@ -12290,90 +13021,114 @@
           <a:lstStyle/>
           <a:p>
             <a:pPr>
-              <a:defRPr sz="850">
+              <a:lnSpc>
+                <a:spcPct val="115000"/>
+              </a:lnSpc>
+              <a:spcAft>
+                <a:spcPts val="600"/>
+              </a:spcAft>
+            </a:pPr>
+            <a:r>
+              <a:rPr sz="1150" b="1">
                 <a:solidFill>
                   <a:srgbClr val="1A1A1A"/>
                 </a:solidFill>
                 <a:latin typeface="Calibri"/>
-              </a:defRPr>
-            </a:pPr>
-            <a:r>
-              <a:t>1. Manual Verification Delays:</a:t>
+              </a:rPr>
+              <a:t>1. Manual Verification Delays: </a:t>
+            </a:r>
+            <a:r>
+              <a:rPr sz="1150" b="0">
+                <a:solidFill>
+                  <a:srgbClr val="1A1A1A"/>
+                </a:solidFill>
+                <a:latin typeface="Calibri"/>
+              </a:rPr>
+              <a:t>traditional physical checks take 3 to 7 days.</a:t>
             </a:r>
           </a:p>
           <a:p>
             <a:pPr>
-              <a:defRPr sz="850">
+              <a:lnSpc>
+                <a:spcPct val="115000"/>
+              </a:lnSpc>
+              <a:spcAft>
+                <a:spcPts val="600"/>
+              </a:spcAft>
+            </a:pPr>
+            <a:r>
+              <a:rPr sz="1150" b="1">
                 <a:solidFill>
                   <a:srgbClr val="1A1A1A"/>
                 </a:solidFill>
                 <a:latin typeface="Calibri"/>
-              </a:defRPr>
-            </a:pPr>
-            <a:r>
-              <a:t>• Solved by: DigiLocker &amp; OCR models.</a:t>
+              </a:rPr>
+              <a:t>→ Solved by: </a:t>
+            </a:r>
+            <a:r>
+              <a:rPr sz="1150" b="0">
+                <a:solidFill>
+                  <a:srgbClr val="1A1A1A"/>
+                </a:solidFill>
+                <a:latin typeface="Calibri"/>
+              </a:rPr>
+              <a:t>DigiLocker &amp; OCR models; entire process completes in under 60 seconds.</a:t>
             </a:r>
           </a:p>
           <a:p>
             <a:pPr>
-              <a:defRPr sz="850">
+              <a:lnSpc>
+                <a:spcPct val="115000"/>
+              </a:lnSpc>
+              <a:spcAft>
+                <a:spcPts val="600"/>
+              </a:spcAft>
+            </a:pPr>
+            <a:r>
+              <a:rPr sz="1150" b="1">
                 <a:solidFill>
                   <a:srgbClr val="1A1A1A"/>
                 </a:solidFill>
                 <a:latin typeface="Calibri"/>
-              </a:defRPr>
-            </a:pPr>
-            <a:r>
-              <a:t>• Impact: Verification reduced from 3–7 business days to under 60 seconds.</a:t>
+              </a:rPr>
+              <a:t>2. Fake Certificates &amp; Forgery: </a:t>
+            </a:r>
+            <a:r>
+              <a:rPr sz="1150" b="0">
+                <a:solidFill>
+                  <a:srgbClr val="1A1A1A"/>
+                </a:solidFill>
+                <a:latin typeface="Calibri"/>
+              </a:rPr>
+              <a:t>scammers submit photoshopped documents.</a:t>
             </a:r>
           </a:p>
           <a:p>
             <a:pPr>
-              <a:defRPr sz="850">
+              <a:lnSpc>
+                <a:spcPct val="115000"/>
+              </a:lnSpc>
+              <a:spcAft>
+                <a:spcPts val="600"/>
+              </a:spcAft>
+            </a:pPr>
+            <a:r>
+              <a:rPr sz="1150" b="1">
                 <a:solidFill>
                   <a:srgbClr val="1A1A1A"/>
                 </a:solidFill>
                 <a:latin typeface="Calibri"/>
-              </a:defRPr>
-            </a:pPr>
-          </a:p>
-          <a:p>
-            <a:pPr>
-              <a:defRPr sz="850">
+              </a:rPr>
+              <a:t>→ Solved by: </a:t>
+            </a:r>
+            <a:r>
+              <a:rPr sz="1150" b="0">
                 <a:solidFill>
                   <a:srgbClr val="1A1A1A"/>
                 </a:solidFill>
                 <a:latin typeface="Calibri"/>
-              </a:defRPr>
-            </a:pPr>
-            <a:r>
-              <a:t>2. Fake Certificates &amp; Forged Documents:</a:t>
-            </a:r>
-          </a:p>
-          <a:p>
-            <a:pPr>
-              <a:defRPr sz="850">
-                <a:solidFill>
-                  <a:srgbClr val="1A1A1A"/>
-                </a:solidFill>
-                <a:latin typeface="Calibri"/>
-              </a:defRPr>
-            </a:pPr>
-            <a:r>
-              <a:t>• Solved by: DigiLocker direct government API fetch.</a:t>
-            </a:r>
-          </a:p>
-          <a:p>
-            <a:pPr>
-              <a:defRPr sz="850">
-                <a:solidFill>
-                  <a:srgbClr val="1A1A1A"/>
-                </a:solidFill>
-                <a:latin typeface="Calibri"/>
-              </a:defRPr>
-            </a:pPr>
-            <a:r>
-              <a:t>• Impact: Only authentic UIDAI and Income Tax records accepted; zero fake paperwork.</a:t>
+              </a:rPr>
+              <a:t>DigiLocker direct government API fetch; only authentic records accepted.</a:t>
             </a:r>
           </a:p>
         </p:txBody>
@@ -12613,90 +13368,114 @@
           <a:lstStyle/>
           <a:p>
             <a:pPr>
-              <a:defRPr sz="850">
+              <a:lnSpc>
+                <a:spcPct val="115000"/>
+              </a:lnSpc>
+              <a:spcAft>
+                <a:spcPts val="600"/>
+              </a:spcAft>
+            </a:pPr>
+            <a:r>
+              <a:rPr sz="1150" b="1">
                 <a:solidFill>
                   <a:srgbClr val="1A1A1A"/>
                 </a:solidFill>
                 <a:latin typeface="Calibri"/>
-              </a:defRPr>
-            </a:pPr>
-            <a:r>
-              <a:t>3. Stolen OTPs &amp; Identity Theft:</a:t>
+              </a:rPr>
+              <a:t>3. Stolen OTPs &amp; Identity Theft: </a:t>
+            </a:r>
+            <a:r>
+              <a:rPr sz="1150" b="0">
+                <a:solidFill>
+                  <a:srgbClr val="1A1A1A"/>
+                </a:solidFill>
+                <a:latin typeface="Calibri"/>
+              </a:rPr>
+              <a:t>fraudsters steal OTPs to create fake loans.</a:t>
             </a:r>
           </a:p>
           <a:p>
             <a:pPr>
-              <a:defRPr sz="850">
+              <a:lnSpc>
+                <a:spcPct val="115000"/>
+              </a:lnSpc>
+              <a:spcAft>
+                <a:spcPts val="600"/>
+              </a:spcAft>
+            </a:pPr>
+            <a:r>
+              <a:rPr sz="1150" b="1">
                 <a:solidFill>
                   <a:srgbClr val="1A1A1A"/>
                 </a:solidFill>
                 <a:latin typeface="Calibri"/>
-              </a:defRPr>
-            </a:pPr>
-            <a:r>
-              <a:t>• Solved by: Tri-Biometric face recognition model.</a:t>
+              </a:rPr>
+              <a:t>→ Solved by: </a:t>
+            </a:r>
+            <a:r>
+              <a:rPr sz="1150" b="0">
+                <a:solidFill>
+                  <a:srgbClr val="1A1A1A"/>
+                </a:solidFill>
+                <a:latin typeface="Calibri"/>
+              </a:rPr>
+              <a:t>Tri-Biometric face match; impostors are blocked without physical presence.</a:t>
             </a:r>
           </a:p>
           <a:p>
             <a:pPr>
-              <a:defRPr sz="850">
+              <a:lnSpc>
+                <a:spcPct val="115000"/>
+              </a:lnSpc>
+              <a:spcAft>
+                <a:spcPts val="600"/>
+              </a:spcAft>
+            </a:pPr>
+            <a:r>
+              <a:rPr sz="1150" b="1">
                 <a:solidFill>
                   <a:srgbClr val="1A1A1A"/>
                 </a:solidFill>
                 <a:latin typeface="Calibri"/>
-              </a:defRPr>
-            </a:pPr>
-            <a:r>
-              <a:t>• Impact: Impostors are blocked because their face does not match the Aadhaar &amp; PAN photos.</a:t>
+              </a:rPr>
+              <a:t>4. Unexplained Black-Box Rejections: </a:t>
+            </a:r>
+            <a:r>
+              <a:rPr sz="1150" b="0">
+                <a:solidFill>
+                  <a:srgbClr val="1A1A1A"/>
+                </a:solidFill>
+                <a:latin typeface="Calibri"/>
+              </a:rPr>
+              <a:t>traditional AI declines loans without reasons.</a:t>
             </a:r>
           </a:p>
           <a:p>
             <a:pPr>
-              <a:defRPr sz="850">
+              <a:lnSpc>
+                <a:spcPct val="115000"/>
+              </a:lnSpc>
+              <a:spcAft>
+                <a:spcPts val="600"/>
+              </a:spcAft>
+            </a:pPr>
+            <a:r>
+              <a:rPr sz="1150" b="1">
                 <a:solidFill>
                   <a:srgbClr val="1A1A1A"/>
                 </a:solidFill>
                 <a:latin typeface="Calibri"/>
-              </a:defRPr>
-            </a:pPr>
-          </a:p>
-          <a:p>
-            <a:pPr>
-              <a:defRPr sz="850">
+              </a:rPr>
+              <a:t>→ Solved by: </a:t>
+            </a:r>
+            <a:r>
+              <a:rPr sz="1150" b="0">
                 <a:solidFill>
                   <a:srgbClr val="1A1A1A"/>
                 </a:solidFill>
                 <a:latin typeface="Calibri"/>
-              </a:defRPr>
-            </a:pPr>
-            <a:r>
-              <a:t>4. Unexplained Black-Box Rejections:</a:t>
-            </a:r>
-          </a:p>
-          <a:p>
-            <a:pPr>
-              <a:defRPr sz="850">
-                <a:solidFill>
-                  <a:srgbClr val="1A1A1A"/>
-                </a:solidFill>
-                <a:latin typeface="Calibri"/>
-              </a:defRPr>
-            </a:pPr>
-            <a:r>
-              <a:t>• Solved by: Explainable Boosting Machine (EBM).</a:t>
-            </a:r>
-          </a:p>
-          <a:p>
-            <a:pPr>
-              <a:defRPr sz="850">
-                <a:solidFill>
-                  <a:srgbClr val="1A1A1A"/>
-                </a:solidFill>
-                <a:latin typeface="Calibri"/>
-              </a:defRPr>
-            </a:pPr>
-            <a:r>
-              <a:t>• Impact: Applicants receive clear, transparent reasons and actionable advice to improve their credit profile.</a:t>
+              </a:rPr>
+              <a:t>Explainable Boosting Machine (EBM); provides plain-English reasons and advice.</a:t>
             </a:r>
           </a:p>
         </p:txBody>
@@ -12859,13 +13638,41 @@
           </a:bodyPr>
           <a:lstStyle/>
           <a:p>
-            <a:pPr>
-              <a:defRPr sz="1800" b="1">
-                <a:latin typeface="Segoe UI"/>
-              </a:defRPr>
+            <a:pPr marL="12700">
+              <a:lnSpc>
+                <a:spcPct val="100000"/>
+              </a:lnSpc>
+              <a:spcBef>
+                <a:spcPts val="95"/>
+              </a:spcBef>
             </a:pPr>
             <a:r>
-              <a:t>CONCLUSION AND FUTURE SCOPE</a:t>
+              <a:rPr spc="-20" dirty="0"/>
+              <a:t>CONCLUSION</a:t>
+            </a:r>
+            <a:r>
+              <a:rPr spc="-60" dirty="0"/>
+              <a:t> </a:t>
+            </a:r>
+            <a:r>
+              <a:rPr dirty="0"/>
+              <a:t>AND</a:t>
+            </a:r>
+            <a:r>
+              <a:rPr spc="-40" dirty="0"/>
+              <a:t> </a:t>
+            </a:r>
+            <a:r>
+              <a:rPr dirty="0"/>
+              <a:t>FUTURE</a:t>
+            </a:r>
+            <a:r>
+              <a:rPr spc="-50" dirty="0"/>
+              <a:t> </a:t>
+            </a:r>
+            <a:r>
+              <a:rPr spc="-10" dirty="0"/>
+              <a:t>SCOPE</a:t>
             </a:r>
           </a:p>
         </p:txBody>
@@ -12892,7 +13699,7 @@
           <a:lstStyle/>
           <a:p>
             <a:pPr>
-              <a:defRPr sz="1100">
+              <a:defRPr sz="1100" b="0">
                 <a:solidFill>
                   <a:srgbClr val="6B6B6B"/>
                 </a:solidFill>
@@ -12900,7 +13707,7 @@
               </a:defRPr>
             </a:pPr>
             <a:r>
-              <a:t>Summary of Contributions and Roadmap for Phase II</a:t>
+              <a:t>What Phase I delivers and what comes next</a:t>
             </a:r>
           </a:p>
         </p:txBody>
@@ -13024,7 +13831,7 @@
           <a:lstStyle/>
           <a:p>
             <a:pPr>
-              <a:defRPr sz="1100" b="1">
+              <a:defRPr sz="1000" b="1">
                 <a:solidFill>
                   <a:srgbClr val="FFFFFF"/>
                 </a:solidFill>
@@ -13114,7 +13921,7 @@
           <a:lstStyle/>
           <a:p>
             <a:pPr>
-              <a:defRPr sz="1100" b="1">
+              <a:defRPr sz="1000" b="1">
                 <a:solidFill>
                   <a:srgbClr val="FFFFFF"/>
                 </a:solidFill>
@@ -13362,130 +14169,142 @@
           <a:lstStyle/>
           <a:p>
             <a:pPr>
-              <a:defRPr sz="819">
+              <a:lnSpc>
+                <a:spcPct val="115000"/>
+              </a:lnSpc>
+              <a:spcAft>
+                <a:spcPts val="500"/>
+              </a:spcAft>
+            </a:pPr>
+            <a:r>
+              <a:rPr sz="1150" b="1">
                 <a:solidFill>
                   <a:srgbClr val="1A1A1A"/>
                 </a:solidFill>
                 <a:latin typeface="Calibri"/>
-              </a:defRPr>
-            </a:pPr>
-            <a:r>
-              <a:t>• Built an automated digital lending system solving manual delays, fake documents, OTP theft, and black-box rejections.</a:t>
+              </a:rPr>
+              <a:t>Digital loan system </a:t>
+            </a:r>
+            <a:r>
+              <a:rPr sz="1150" b="0">
+                <a:solidFill>
+                  <a:srgbClr val="1A1A1A"/>
+                </a:solidFill>
+                <a:latin typeface="Calibri"/>
+              </a:rPr>
+              <a:t>solving manual delays, fake documents, OTP theft, and opacity.</a:t>
             </a:r>
           </a:p>
           <a:p>
             <a:pPr>
-              <a:defRPr sz="819">
+              <a:lnSpc>
+                <a:spcPct val="115000"/>
+              </a:lnSpc>
+              <a:spcAft>
+                <a:spcPts val="500"/>
+              </a:spcAft>
+            </a:pPr>
+            <a:r>
+              <a:rPr sz="1150" b="1">
                 <a:solidFill>
                   <a:srgbClr val="1A1A1A"/>
                 </a:solidFill>
                 <a:latin typeface="Calibri"/>
-              </a:defRPr>
-            </a:pPr>
+              </a:rPr>
+              <a:t>DigiLocker &amp; OCR </a:t>
+            </a:r>
+            <a:r>
+              <a:rPr sz="1150" b="0">
+                <a:solidFill>
+                  <a:srgbClr val="1A1A1A"/>
+                </a:solidFill>
+                <a:latin typeface="Calibri"/>
+              </a:rPr>
+              <a:t>eliminate manual paperwork and forged certificates.</a:t>
+            </a:r>
           </a:p>
           <a:p>
             <a:pPr>
-              <a:defRPr sz="819">
+              <a:lnSpc>
+                <a:spcPct val="115000"/>
+              </a:lnSpc>
+              <a:spcAft>
+                <a:spcPts val="500"/>
+              </a:spcAft>
+            </a:pPr>
+            <a:r>
+              <a:rPr sz="1150" b="1">
                 <a:solidFill>
                   <a:srgbClr val="1A1A1A"/>
                 </a:solidFill>
                 <a:latin typeface="Calibri"/>
-              </a:defRPr>
-            </a:pPr>
-            <a:r>
-              <a:t>• Integrated DigiLocker for instant, authentic document verification.</a:t>
+              </a:rPr>
+              <a:t>Tri-Biometric security </a:t>
+            </a:r>
+            <a:r>
+              <a:rPr sz="1150" b="0">
+                <a:solidFill>
+                  <a:srgbClr val="1A1A1A"/>
+                </a:solidFill>
+                <a:latin typeface="Calibri"/>
+              </a:rPr>
+              <a:t>defeats identity theft via stolen OTPs.</a:t>
             </a:r>
           </a:p>
           <a:p>
             <a:pPr>
-              <a:defRPr sz="819">
+              <a:lnSpc>
+                <a:spcPct val="115000"/>
+              </a:lnSpc>
+              <a:spcAft>
+                <a:spcPts val="500"/>
+              </a:spcAft>
+            </a:pPr>
+            <a:r>
+              <a:rPr sz="1150" b="1">
                 <a:solidFill>
                   <a:srgbClr val="1A1A1A"/>
                 </a:solidFill>
                 <a:latin typeface="Calibri"/>
-              </a:defRPr>
-            </a:pPr>
+              </a:rPr>
+              <a:t>EBM matches best ensemble: </a:t>
+            </a:r>
+            <a:r>
+              <a:rPr sz="1150" b="0">
+                <a:solidFill>
+                  <a:srgbClr val="1A1A1A"/>
+                </a:solidFill>
+                <a:latin typeface="Calibri"/>
+              </a:rPr>
+              <a:t>85.37% accuracy, AUC 0.752 with 100% exact reasons.</a:t>
+            </a:r>
           </a:p>
           <a:p>
             <a:pPr>
-              <a:defRPr sz="819">
+              <a:lnSpc>
+                <a:spcPct val="115000"/>
+              </a:lnSpc>
+              <a:spcAft>
+                <a:spcPts val="500"/>
+              </a:spcAft>
+            </a:pPr>
+            <a:r>
+              <a:rPr sz="1150" b="1">
                 <a:solidFill>
                   <a:srgbClr val="1A1A1A"/>
                 </a:solidFill>
                 <a:latin typeface="Calibri"/>
-              </a:defRPr>
-            </a:pPr>
-            <a:r>
-              <a:t>• Introduced 3-Way Tri-Biometric face verification to defeat OTP identity theft.</a:t>
-            </a:r>
-          </a:p>
-          <a:p>
-            <a:pPr>
-              <a:defRPr sz="819">
+              </a:rPr>
+              <a:t>Full working application </a:t>
+            </a:r>
+            <a:r>
+              <a:rPr sz="1150" b="0">
                 <a:solidFill>
                   <a:srgbClr val="1A1A1A"/>
                 </a:solidFill>
                 <a:latin typeface="Calibri"/>
-              </a:defRPr>
-            </a:pPr>
-          </a:p>
-          <a:p>
-            <a:pPr>
-              <a:defRPr sz="819">
-                <a:solidFill>
-                  <a:srgbClr val="1A1A1A"/>
-                </a:solidFill>
-                <a:latin typeface="Calibri"/>
-              </a:defRPr>
-            </a:pPr>
-            <a:r>
-              <a:t>• Applied OCR for instant cross-document detail matching.</a:t>
-            </a:r>
-          </a:p>
-          <a:p>
-            <a:pPr>
-              <a:defRPr sz="819">
-                <a:solidFill>
-                  <a:srgbClr val="1A1A1A"/>
-                </a:solidFill>
-                <a:latin typeface="Calibri"/>
-              </a:defRPr>
-            </a:pPr>
-          </a:p>
-          <a:p>
-            <a:pPr>
-              <a:defRPr sz="819">
-                <a:solidFill>
-                  <a:srgbClr val="1A1A1A"/>
-                </a:solidFill>
-                <a:latin typeface="Calibri"/>
-              </a:defRPr>
-            </a:pPr>
-            <a:r>
-              <a:t>• Proved that EBM matches Random Forest accuracy (85.37%) while delivering 100% exact, transparent explanations.</a:t>
-            </a:r>
-          </a:p>
-          <a:p>
-            <a:pPr>
-              <a:defRPr sz="819">
-                <a:solidFill>
-                  <a:srgbClr val="1A1A1A"/>
-                </a:solidFill>
-                <a:latin typeface="Calibri"/>
-              </a:defRPr>
-            </a:pPr>
-          </a:p>
-          <a:p>
-            <a:pPr>
-              <a:defRPr sz="819">
-                <a:solidFill>
-                  <a:srgbClr val="1A1A1A"/>
-                </a:solidFill>
-                <a:latin typeface="Calibri"/>
-              </a:defRPr>
-            </a:pPr>
-            <a:r>
-              <a:t>• Complete working application running locally and deployed live on GitHub Pages.</a:t>
+              </a:rPr>
+              <a:t>running locally and deployed live on GitHub Pages.</a:t>
             </a:r>
           </a:p>
         </p:txBody>
@@ -13725,84 +14544,114 @@
           <a:lstStyle/>
           <a:p>
             <a:pPr>
-              <a:defRPr sz="819">
+              <a:lnSpc>
+                <a:spcPct val="115000"/>
+              </a:lnSpc>
+              <a:spcAft>
+                <a:spcPts val="500"/>
+              </a:spcAft>
+            </a:pPr>
+            <a:r>
+              <a:rPr sz="1150" b="1">
                 <a:solidFill>
                   <a:srgbClr val="1A1A1A"/>
                 </a:solidFill>
                 <a:latin typeface="Calibri"/>
-              </a:defRPr>
-            </a:pPr>
-            <a:r>
-              <a:t>• Live integration with UIDAI Aadhaar FaceRD production mobile biometric service.</a:t>
+              </a:rPr>
+              <a:t>UIDAI Aadhaar FaceRD </a:t>
+            </a:r>
+            <a:r>
+              <a:rPr sz="1150" b="0">
+                <a:solidFill>
+                  <a:srgbClr val="1A1A1A"/>
+                </a:solidFill>
+                <a:latin typeface="Calibri"/>
+              </a:rPr>
+              <a:t>mobile app integration for production biometrics.</a:t>
             </a:r>
           </a:p>
           <a:p>
             <a:pPr>
-              <a:defRPr sz="819">
+              <a:lnSpc>
+                <a:spcPct val="115000"/>
+              </a:lnSpc>
+              <a:spcAft>
+                <a:spcPts val="500"/>
+              </a:spcAft>
+            </a:pPr>
+            <a:r>
+              <a:rPr sz="1150" b="1">
                 <a:solidFill>
                   <a:srgbClr val="1A1A1A"/>
                 </a:solidFill>
                 <a:latin typeface="Calibri"/>
-              </a:defRPr>
-            </a:pPr>
+              </a:rPr>
+              <a:t>Regional audio explanations </a:t>
+            </a:r>
+            <a:r>
+              <a:rPr sz="1150" b="0">
+                <a:solidFill>
+                  <a:srgbClr val="1A1A1A"/>
+                </a:solidFill>
+                <a:latin typeface="Calibri"/>
+              </a:rPr>
+              <a:t>in Tamil and Hindi for adverse action notices.</a:t>
+            </a:r>
           </a:p>
           <a:p>
             <a:pPr>
-              <a:defRPr sz="819">
+              <a:lnSpc>
+                <a:spcPct val="115000"/>
+              </a:lnSpc>
+              <a:spcAft>
+                <a:spcPts val="500"/>
+              </a:spcAft>
+            </a:pPr>
+            <a:r>
+              <a:rPr sz="1150" b="1">
                 <a:solidFill>
                   <a:srgbClr val="1A1A1A"/>
                 </a:solidFill>
                 <a:latin typeface="Calibri"/>
-              </a:defRPr>
-            </a:pPr>
-            <a:r>
-              <a:t>• Multi-language voice explanation for rejection letters in regional languages (Tamil, Hindi).</a:t>
+              </a:rPr>
+              <a:t>Account Aggregator (AA) </a:t>
+            </a:r>
+            <a:r>
+              <a:rPr sz="1150" b="0">
+                <a:solidFill>
+                  <a:srgbClr val="1A1A1A"/>
+                </a:solidFill>
+                <a:latin typeface="Calibri"/>
+              </a:rPr>
+              <a:t>automated bank statement health analysis.</a:t>
             </a:r>
           </a:p>
           <a:p>
             <a:pPr>
-              <a:defRPr sz="819">
+              <a:lnSpc>
+                <a:spcPct val="115000"/>
+              </a:lnSpc>
+              <a:spcAft>
+                <a:spcPts val="500"/>
+              </a:spcAft>
+            </a:pPr>
+            <a:r>
+              <a:rPr sz="1150" b="1">
                 <a:solidFill>
                   <a:srgbClr val="1A1A1A"/>
                 </a:solidFill>
                 <a:latin typeface="Calibri"/>
-              </a:defRPr>
-            </a:pPr>
-          </a:p>
-          <a:p>
-            <a:pPr>
-              <a:defRPr sz="819">
+              </a:rPr>
+              <a:t>Risk-based interest rates </a:t>
+            </a:r>
+            <a:r>
+              <a:rPr sz="1150" b="0">
                 <a:solidFill>
                   <a:srgbClr val="1A1A1A"/>
                 </a:solidFill>
                 <a:latin typeface="Calibri"/>
-              </a:defRPr>
-            </a:pPr>
-            <a:r>
-              <a:t>• Bank account statement auto-analysis via RBI Account Aggregator (AA) framework.</a:t>
-            </a:r>
-          </a:p>
-          <a:p>
-            <a:pPr>
-              <a:defRPr sz="819">
-                <a:solidFill>
-                  <a:srgbClr val="1A1A1A"/>
-                </a:solidFill>
-                <a:latin typeface="Calibri"/>
-              </a:defRPr>
-            </a:pPr>
-          </a:p>
-          <a:p>
-            <a:pPr>
-              <a:defRPr sz="819">
-                <a:solidFill>
-                  <a:srgbClr val="1A1A1A"/>
-                </a:solidFill>
-                <a:latin typeface="Calibri"/>
-              </a:defRPr>
-            </a:pPr>
-            <a:r>
-              <a:t>• Dynamic interest rate calculator offering lower interest to low-risk borrowers.</a:t>
+              </a:rPr>
+              <a:t>offering lower rates to low-risk borrowers.</a:t>
             </a:r>
           </a:p>
         </p:txBody>
@@ -13966,8 +14815,11 @@
           <a:lstStyle/>
           <a:p>
             <a:pPr>
-              <a:defRPr sz="2400" b="1">
-                <a:latin typeface="Segoe UI"/>
+              <a:defRPr sz="2200" b="1">
+                <a:solidFill>
+                  <a:srgbClr val="1F4D39"/>
+                </a:solidFill>
+                <a:latin typeface="Calibri"/>
               </a:defRPr>
             </a:pPr>
             <a:r>
@@ -13998,9 +14850,9 @@
           <a:lstStyle/>
           <a:p>
             <a:pPr>
-              <a:defRPr sz="1200">
-                <a:solidFill>
-                  <a:srgbClr val="C8A83E"/>
+              <a:defRPr sz="1600">
+                <a:solidFill>
+                  <a:srgbClr val="6B6B6B"/>
                 </a:solidFill>
                 <a:latin typeface="Calibri"/>
               </a:defRPr>
@@ -14210,7 +15062,7 @@
           <a:lstStyle/>
           <a:p>
             <a:pPr>
-              <a:defRPr sz="1100">
+              <a:defRPr sz="1100" b="0">
                 <a:solidFill>
                   <a:srgbClr val="6B6B6B"/>
                 </a:solidFill>
@@ -14499,16 +15351,21 @@
           </a:bodyPr>
           <a:lstStyle/>
           <a:p>
-            <a:pPr>
-              <a:defRPr sz="850">
+            <a:r>
+              <a:rPr b="1" sz="1050">
                 <a:solidFill>
                   <a:srgbClr val="C8A83E"/>
                 </a:solidFill>
-                <a:latin typeface="Calibri"/>
-              </a:defRPr>
-            </a:pPr>
-            <a:r>
-              <a:t>Keywords: Digital Lending • DigiLocker • Face Biometrics • OCR Extraction • Explainable Boosting Machine • Random Forest</a:t>
+              </a:rPr>
+              <a:t>Keywords: </a:t>
+            </a:r>
+            <a:r>
+              <a:rPr b="0" sz="1050">
+                <a:solidFill>
+                  <a:srgbClr val="C8A83E"/>
+                </a:solidFill>
+              </a:rPr>
+              <a:t>Digital Lending • DigiLocker • Face Biometrics • OCR Extraction • Explainable AI • Random Forest</a:t>
             </a:r>
           </a:p>
         </p:txBody>
@@ -14589,28 +15446,17 @@
           </a:bodyPr>
           <a:lstStyle/>
           <a:p>
-            <a:pPr marL="142875">
-              <a:lnSpc>
-                <a:spcPct val="100000"/>
-              </a:lnSpc>
-              <a:spcBef>
-                <a:spcPts val="680"/>
-              </a:spcBef>
+            <a:pPr>
+              <a:defRPr sz="1000" b="1">
+                <a:solidFill>
+                  <a:srgbClr val="FFFFFF"/>
+                </a:solidFill>
+                <a:latin typeface="Calibri"/>
+              </a:defRPr>
             </a:pPr>
             <a:r>
-              <a:rPr sz="1000" b="1" spc="60" dirty="0">
-                <a:solidFill>
-                  <a:srgbClr val="FFFFFF"/>
-                </a:solidFill>
-                <a:latin typeface="Calibri"/>
-                <a:cs typeface="Calibri"/>
-              </a:rPr>
               <a:t>ABSTRACT</a:t>
             </a:r>
-            <a:endParaRPr sz="1000">
-              <a:latin typeface="Calibri"/>
-              <a:cs typeface="Calibri"/>
-            </a:endParaRPr>
           </a:p>
         </p:txBody>
       </p:sp>
@@ -14691,7 +15537,7 @@
           <a:lstStyle/>
           <a:p>
             <a:pPr>
-              <a:defRPr sz="1100" b="1">
+              <a:defRPr sz="1000" b="1">
                 <a:solidFill>
                   <a:srgbClr val="FFFFFF"/>
                 </a:solidFill>
@@ -14699,7 +15545,7 @@
               </a:defRPr>
             </a:pPr>
             <a:r>
-              <a:t>TECHNOLOGY STACK &amp; 5 MODELS</a:t>
+              <a:t>TECHNOLOGY STACK</a:t>
             </a:r>
           </a:p>
         </p:txBody>
@@ -14939,84 +15785,142 @@
           <a:lstStyle/>
           <a:p>
             <a:pPr>
-              <a:defRPr sz="850">
+              <a:lnSpc>
+                <a:spcPct val="115000"/>
+              </a:lnSpc>
+              <a:spcAft>
+                <a:spcPts val="400"/>
+              </a:spcAft>
+            </a:pPr>
+            <a:r>
+              <a:rPr sz="1100" b="1">
                 <a:solidFill>
                   <a:srgbClr val="1A1A1A"/>
                 </a:solidFill>
                 <a:latin typeface="Calibri"/>
-              </a:defRPr>
-            </a:pPr>
-            <a:r>
-              <a:t>Problem: Traditional loan checks take 3-7 days of manual paperwork, fake certificates bypass verification, stolen OTPs lead to identity theft loans, and traditional AI rejects applicants without explaining why.</a:t>
+              </a:rPr>
+              <a:t>Problem: </a:t>
+            </a:r>
+            <a:r>
+              <a:rPr sz="1100" b="0">
+                <a:solidFill>
+                  <a:srgbClr val="1A1A1A"/>
+                </a:solidFill>
+                <a:latin typeface="Calibri"/>
+              </a:rPr>
+              <a:t>manual checks take 3-7 days, fake documents bypass review, stolen OTPs create identity theft loans, and AI rejects applicants without reasons.</a:t>
             </a:r>
           </a:p>
           <a:p>
             <a:pPr>
-              <a:defRPr sz="850">
+              <a:lnSpc>
+                <a:spcPct val="115000"/>
+              </a:lnSpc>
+              <a:spcAft>
+                <a:spcPts val="400"/>
+              </a:spcAft>
+            </a:pPr>
+            <a:r>
+              <a:rPr sz="1100" b="1">
                 <a:solidFill>
                   <a:srgbClr val="1A1A1A"/>
                 </a:solidFill>
                 <a:latin typeface="Calibri"/>
-              </a:defRPr>
-            </a:pPr>
+              </a:rPr>
+              <a:t>Approach: </a:t>
+            </a:r>
+            <a:r>
+              <a:rPr sz="1100" b="0">
+                <a:solidFill>
+                  <a:srgbClr val="1A1A1A"/>
+                </a:solidFill>
+                <a:latin typeface="Calibri"/>
+              </a:rPr>
+              <a:t>a 5-model pipeline: DigiLocker document fetch, 3-way webcam face matching, OCR cross-checks, and glass-box EBM underwriting.</a:t>
+            </a:r>
           </a:p>
           <a:p>
             <a:pPr>
-              <a:defRPr sz="850">
+              <a:lnSpc>
+                <a:spcPct val="115000"/>
+              </a:lnSpc>
+              <a:spcAft>
+                <a:spcPts val="400"/>
+              </a:spcAft>
+            </a:pPr>
+            <a:r>
+              <a:rPr sz="1100" b="1">
                 <a:solidFill>
                   <a:srgbClr val="1A1A1A"/>
                 </a:solidFill>
                 <a:latin typeface="Calibri"/>
-              </a:defRPr>
-            </a:pPr>
-            <a:r>
-              <a:t>Solution: An automated digital lending portal combining 5 specialized modules to verify documents, confirm physical identity, and score credit risk in under 60 seconds.</a:t>
+              </a:rPr>
+              <a:t>Technologies: </a:t>
+            </a:r>
+            <a:r>
+              <a:rPr sz="1100" b="0">
+                <a:solidFill>
+                  <a:srgbClr val="1A1A1A"/>
+                </a:solidFill>
+                <a:latin typeface="Calibri"/>
+              </a:rPr>
+              <a:t>React 18, Vite, FastAPI, OpenCV, Tesseract OCR, InterpretML, scikit-learn, SQLite.</a:t>
             </a:r>
           </a:p>
           <a:p>
             <a:pPr>
-              <a:defRPr sz="850">
+              <a:lnSpc>
+                <a:spcPct val="115000"/>
+              </a:lnSpc>
+              <a:spcAft>
+                <a:spcPts val="400"/>
+              </a:spcAft>
+            </a:pPr>
+            <a:r>
+              <a:rPr sz="1100" b="1">
                 <a:solidFill>
                   <a:srgbClr val="1A1A1A"/>
                 </a:solidFill>
                 <a:latin typeface="Calibri"/>
-              </a:defRPr>
-            </a:pPr>
+              </a:rPr>
+              <a:t>Implemented: </a:t>
+            </a:r>
+            <a:r>
+              <a:rPr sz="1100" b="0">
+                <a:solidFill>
+                  <a:srgbClr val="1A1A1A"/>
+                </a:solidFill>
+                <a:latin typeface="Calibri"/>
+              </a:rPr>
+              <a:t>DigiLocker SSO, biometric gate, cross-field OCR, EBM scoring, adverse action notices, and full audit trail.</a:t>
+            </a:r>
           </a:p>
           <a:p>
             <a:pPr>
-              <a:defRPr sz="850">
+              <a:lnSpc>
+                <a:spcPct val="115000"/>
+              </a:lnSpc>
+              <a:spcAft>
+                <a:spcPts val="400"/>
+              </a:spcAft>
+            </a:pPr>
+            <a:r>
+              <a:rPr sz="1100" b="1">
                 <a:solidFill>
                   <a:srgbClr val="1A1A1A"/>
                 </a:solidFill>
                 <a:latin typeface="Calibri"/>
-              </a:defRPr>
-            </a:pPr>
-            <a:r>
-              <a:t>Key Modules: (1) DigiLocker document fetch, (2) 3-way webcam face matching, (3) OCR cross-checks, (4) Glass-box EBM underwriting, and (5) Random Forest benchmark.</a:t>
-            </a:r>
-          </a:p>
-          <a:p>
-            <a:pPr>
-              <a:defRPr sz="850">
+              </a:rPr>
+              <a:t>Contribution: </a:t>
+            </a:r>
+            <a:r>
+              <a:rPr sz="1100" b="0">
                 <a:solidFill>
                   <a:srgbClr val="1A1A1A"/>
                 </a:solidFill>
                 <a:latin typeface="Calibri"/>
-              </a:defRPr>
-            </a:pPr>
-          </a:p>
-          <a:p>
-            <a:pPr>
-              <a:defRPr sz="850">
-                <a:solidFill>
-                  <a:srgbClr val="1A1A1A"/>
-                </a:solidFill>
-                <a:latin typeface="Calibri"/>
-              </a:defRPr>
-            </a:pPr>
-            <a:r>
-              <a:t>Outcome: Zero fake certificate fraud, immune to OTP theft, 85.37% test accuracy matching Random Forest, with 100% transparent plain-English reasons for every decision.</a:t>
+              </a:rPr>
+              <a:t>zero fake paperwork, immune to OTP theft; 85.37% test accuracy matching Random Forest with 100% exact reasons.</a:t>
             </a:r>
           </a:p>
         </p:txBody>
@@ -15256,129 +16160,170 @@
           <a:lstStyle/>
           <a:p>
             <a:pPr>
-              <a:defRPr sz="850">
+              <a:lnSpc>
+                <a:spcPct val="115000"/>
+              </a:lnSpc>
+              <a:spcAft>
+                <a:spcPts val="400"/>
+              </a:spcAft>
+            </a:pPr>
+            <a:r>
+              <a:rPr sz="1150" b="1">
                 <a:solidFill>
                   <a:srgbClr val="1A1A1A"/>
                 </a:solidFill>
                 <a:latin typeface="Calibri"/>
-              </a:defRPr>
-            </a:pPr>
-            <a:r>
-              <a:t>Model 1: DigiLocker Verification Module</a:t>
+              </a:rPr>
+              <a:t>Model 1: </a:t>
+            </a:r>
+            <a:r>
+              <a:rPr sz="1150" b="0">
+                <a:solidFill>
+                  <a:srgbClr val="1A1A1A"/>
+                </a:solidFill>
+                <a:latin typeface="Calibri"/>
+              </a:rPr>
+              <a:t>DigiLocker Government Document Fetch</a:t>
             </a:r>
           </a:p>
           <a:p>
             <a:pPr>
-              <a:defRPr sz="850">
+              <a:lnSpc>
+                <a:spcPct val="115000"/>
+              </a:lnSpc>
+              <a:spcAft>
+                <a:spcPts val="400"/>
+              </a:spcAft>
+            </a:pPr>
+            <a:r>
+              <a:rPr sz="1150" b="1">
                 <a:solidFill>
                   <a:srgbClr val="1A1A1A"/>
                 </a:solidFill>
                 <a:latin typeface="Calibri"/>
-              </a:defRPr>
-            </a:pPr>
-            <a:r>
-              <a:t>Model 2: Tri-Biometric Face Recognition</a:t>
+              </a:rPr>
+              <a:t>Model 2: </a:t>
+            </a:r>
+            <a:r>
+              <a:rPr sz="1150" b="0">
+                <a:solidFill>
+                  <a:srgbClr val="1A1A1A"/>
+                </a:solidFill>
+                <a:latin typeface="Calibri"/>
+              </a:rPr>
+              <a:t>Tri-Biometric Live Face Gate (≥ 75%)</a:t>
             </a:r>
           </a:p>
           <a:p>
             <a:pPr>
-              <a:defRPr sz="850">
+              <a:lnSpc>
+                <a:spcPct val="115000"/>
+              </a:lnSpc>
+              <a:spcAft>
+                <a:spcPts val="400"/>
+              </a:spcAft>
+            </a:pPr>
+            <a:r>
+              <a:rPr sz="1150" b="1">
                 <a:solidFill>
                   <a:srgbClr val="1A1A1A"/>
                 </a:solidFill>
                 <a:latin typeface="Calibri"/>
-              </a:defRPr>
-            </a:pPr>
-            <a:r>
-              <a:t>Model 3: OCR Cross-Field Extraction</a:t>
+              </a:rPr>
+              <a:t>Model 3: </a:t>
+            </a:r>
+            <a:r>
+              <a:rPr sz="1150" b="0">
+                <a:solidFill>
+                  <a:srgbClr val="1A1A1A"/>
+                </a:solidFill>
+                <a:latin typeface="Calibri"/>
+              </a:rPr>
+              <a:t>OCR Text Extraction &amp; Cross-Check</a:t>
             </a:r>
           </a:p>
           <a:p>
             <a:pPr>
-              <a:defRPr sz="850">
+              <a:lnSpc>
+                <a:spcPct val="115000"/>
+              </a:lnSpc>
+              <a:spcAft>
+                <a:spcPts val="400"/>
+              </a:spcAft>
+            </a:pPr>
+            <a:r>
+              <a:rPr sz="1150" b="1">
                 <a:solidFill>
                   <a:srgbClr val="1A1A1A"/>
                 </a:solidFill>
                 <a:latin typeface="Calibri"/>
-              </a:defRPr>
-            </a:pPr>
-            <a:r>
-              <a:t>Model 4: Explainable Boosting Machine (EBM)</a:t>
+              </a:rPr>
+              <a:t>Model 4: </a:t>
+            </a:r>
+            <a:r>
+              <a:rPr sz="1150" b="0">
+                <a:solidFill>
+                  <a:srgbClr val="1A1A1A"/>
+                </a:solidFill>
+                <a:latin typeface="Calibri"/>
+              </a:rPr>
+              <a:t>Explainable Boosting Machine (EBM)</a:t>
             </a:r>
           </a:p>
           <a:p>
             <a:pPr>
-              <a:defRPr sz="850">
+              <a:lnSpc>
+                <a:spcPct val="115000"/>
+              </a:lnSpc>
+              <a:spcAft>
+                <a:spcPts val="400"/>
+              </a:spcAft>
+            </a:pPr>
+            <a:r>
+              <a:rPr sz="1150" b="1">
                 <a:solidFill>
                   <a:srgbClr val="1A1A1A"/>
                 </a:solidFill>
                 <a:latin typeface="Calibri"/>
-              </a:defRPr>
-            </a:pPr>
-            <a:r>
-              <a:t>Model 5: Random Forest Benchmark Model</a:t>
+              </a:rPr>
+              <a:t>Model 5: </a:t>
+            </a:r>
+            <a:r>
+              <a:rPr sz="1150" b="0">
+                <a:solidFill>
+                  <a:srgbClr val="1A1A1A"/>
+                </a:solidFill>
+                <a:latin typeface="Calibri"/>
+              </a:rPr>
+              <a:t>Random Forest Accuracy Benchmark</a:t>
             </a:r>
           </a:p>
           <a:p>
             <a:pPr>
-              <a:defRPr sz="850">
+              <a:lnSpc>
+                <a:spcPct val="115000"/>
+              </a:lnSpc>
+              <a:spcAft>
+                <a:spcPts val="400"/>
+              </a:spcAft>
+            </a:pPr>
+            <a:r>
+              <a:rPr sz="1150" b="1">
                 <a:solidFill>
                   <a:srgbClr val="1A1A1A"/>
                 </a:solidFill>
                 <a:latin typeface="Calibri"/>
-              </a:defRPr>
-            </a:pPr>
-          </a:p>
-          <a:p>
-            <a:pPr>
-              <a:defRPr sz="850">
+              </a:rPr>
+              <a:t>Full Stack: </a:t>
+            </a:r>
+            <a:r>
+              <a:rPr sz="1150" b="0">
                 <a:solidFill>
                   <a:srgbClr val="1A1A1A"/>
                 </a:solidFill>
                 <a:latin typeface="Calibri"/>
-              </a:defRPr>
-            </a:pPr>
-            <a:r>
-              <a:t>Frontend: React 18 + Vite + TailwindCSS</a:t>
-            </a:r>
-          </a:p>
-          <a:p>
-            <a:pPr>
-              <a:defRPr sz="850">
-                <a:solidFill>
-                  <a:srgbClr val="1A1A1A"/>
-                </a:solidFill>
-                <a:latin typeface="Calibri"/>
-              </a:defRPr>
-            </a:pPr>
-            <a:r>
-              <a:t>Backend: FastAPI (Python 3.10) + OpenCV</a:t>
-            </a:r>
-          </a:p>
-          <a:p>
-            <a:pPr>
-              <a:defRPr sz="850">
-                <a:solidFill>
-                  <a:srgbClr val="1A1A1A"/>
-                </a:solidFill>
-                <a:latin typeface="Calibri"/>
-              </a:defRPr>
-            </a:pPr>
-            <a:r>
-              <a:t>Database: SQLite 3 / MySQL (Audit Log)</a:t>
-            </a:r>
-          </a:p>
-          <a:p>
-            <a:pPr>
-              <a:defRPr sz="850">
-                <a:solidFill>
-                  <a:srgbClr val="1A1A1A"/>
-                </a:solidFill>
-                <a:latin typeface="Calibri"/>
-              </a:defRPr>
-            </a:pPr>
-            <a:r>
-              <a:t>Deployment: Local &amp; Live Cloud (GitHub Pages)</a:t>
+              </a:rPr>
+              <a:t>React 18 + FastAPI + OpenCV + SQLite</a:t>
             </a:r>
           </a:p>
         </p:txBody>
@@ -15684,7 +16629,7 @@
           <a:lstStyle/>
           <a:p>
             <a:pPr>
-              <a:defRPr sz="800" b="1">
+              <a:defRPr sz="1000" b="1">
                 <a:solidFill>
                   <a:srgbClr val="FFFFFF"/>
                 </a:solidFill>
@@ -15978,9 +16923,9 @@
           <a:lstStyle/>
           <a:p>
             <a:pPr>
-              <a:defRPr sz="800" b="1">
-                <a:solidFill>
-                  <a:srgbClr val="1F4D39"/>
+              <a:defRPr sz="1000" b="1">
+                <a:solidFill>
+                  <a:srgbClr val="FFFFFF"/>
                 </a:solidFill>
                 <a:latin typeface="Calibri"/>
               </a:defRPr>
@@ -16272,9 +17217,9 @@
           <a:lstStyle/>
           <a:p>
             <a:pPr>
-              <a:defRPr sz="800" b="1">
-                <a:solidFill>
-                  <a:srgbClr val="1F4D39"/>
+              <a:defRPr sz="1000" b="1">
+                <a:solidFill>
+                  <a:srgbClr val="FFFFFF"/>
                 </a:solidFill>
                 <a:latin typeface="Calibri"/>
               </a:defRPr>
@@ -16566,15 +17511,15 @@
           <a:lstStyle/>
           <a:p>
             <a:pPr>
-              <a:defRPr sz="800" b="1">
-                <a:solidFill>
-                  <a:srgbClr val="1F4D39"/>
+              <a:defRPr sz="1000" b="1">
+                <a:solidFill>
+                  <a:srgbClr val="FFFFFF"/>
                 </a:solidFill>
                 <a:latin typeface="Calibri"/>
               </a:defRPr>
             </a:pPr>
             <a:r>
-              <a:t>EBM Scoring</a:t>
+              <a:t>EBM Score</a:t>
             </a:r>
           </a:p>
         </p:txBody>
@@ -16860,15 +17805,15 @@
           <a:lstStyle/>
           <a:p>
             <a:pPr>
-              <a:defRPr sz="800" b="1">
-                <a:solidFill>
-                  <a:srgbClr val="1F4D39"/>
+              <a:defRPr sz="1000" b="1">
+                <a:solidFill>
+                  <a:srgbClr val="FFFFFF"/>
                 </a:solidFill>
                 <a:latin typeface="Calibri"/>
               </a:defRPr>
             </a:pPr>
             <a:r>
-              <a:t>Clear Reasons</a:t>
+              <a:t>Rules</a:t>
             </a:r>
           </a:p>
         </p:txBody>
@@ -17154,15 +18099,15 @@
           <a:lstStyle/>
           <a:p>
             <a:pPr>
-              <a:defRPr sz="800" b="1">
-                <a:solidFill>
-                  <a:srgbClr val="1F4D39"/>
+              <a:defRPr sz="1000" b="1">
+                <a:solidFill>
+                  <a:srgbClr val="FFFFFF"/>
                 </a:solidFill>
                 <a:latin typeface="Calibri"/>
               </a:defRPr>
             </a:pPr>
             <a:r>
-              <a:t>Audit Log</a:t>
+              <a:t>Reasons</a:t>
             </a:r>
           </a:p>
         </p:txBody>
@@ -17448,15 +18393,15 @@
           <a:lstStyle/>
           <a:p>
             <a:pPr>
-              <a:defRPr sz="800" b="1">
-                <a:solidFill>
-                  <a:srgbClr val="1F4D39"/>
+              <a:defRPr sz="1000" b="1">
+                <a:solidFill>
+                  <a:srgbClr val="FFFFFF"/>
                 </a:solidFill>
                 <a:latin typeface="Calibri"/>
               </a:defRPr>
             </a:pPr>
             <a:r>
-              <a:t>Sanction</a:t>
+              <a:t>Audit Log</a:t>
             </a:r>
           </a:p>
         </p:txBody>
@@ -17742,7 +18687,7 @@
           <a:lstStyle/>
           <a:p>
             <a:pPr>
-              <a:defRPr sz="800" b="1">
+              <a:defRPr sz="1000" b="1">
                 <a:solidFill>
                   <a:srgbClr val="FFFFFF"/>
                 </a:solidFill>
@@ -17750,7 +18695,7 @@
               </a:defRPr>
             </a:pPr>
             <a:r>
-              <a:t>Disbursed</a:t>
+              <a:t>Verdict</a:t>
             </a:r>
           </a:p>
         </p:txBody>
@@ -17913,13 +18858,41 @@
           </a:bodyPr>
           <a:lstStyle/>
           <a:p>
-            <a:pPr>
-              <a:defRPr sz="1800" b="1">
-                <a:latin typeface="Segoe UI"/>
-              </a:defRPr>
+            <a:pPr marL="12700">
+              <a:lnSpc>
+                <a:spcPct val="100000"/>
+              </a:lnSpc>
+              <a:spcBef>
+                <a:spcPts val="95"/>
+              </a:spcBef>
             </a:pPr>
             <a:r>
-              <a:t>PROBLEM STATEMENT AND MOTIVATION</a:t>
+              <a:rPr spc="-10" dirty="0"/>
+              <a:t>PROBLEM</a:t>
+            </a:r>
+            <a:r>
+              <a:rPr spc="-55" dirty="0"/>
+              <a:t> </a:t>
+            </a:r>
+            <a:r>
+              <a:rPr spc="-85" dirty="0"/>
+              <a:t>STATEMENT</a:t>
+            </a:r>
+            <a:r>
+              <a:rPr spc="-60" dirty="0"/>
+              <a:t> </a:t>
+            </a:r>
+            <a:r>
+              <a:rPr dirty="0"/>
+              <a:t>AND</a:t>
+            </a:r>
+            <a:r>
+              <a:rPr spc="-60" dirty="0"/>
+              <a:t> </a:t>
+            </a:r>
+            <a:r>
+              <a:rPr spc="-25" dirty="0"/>
+              <a:t>MOTIVATION</a:t>
             </a:r>
           </a:p>
         </p:txBody>
@@ -17946,7 +18919,7 @@
           <a:lstStyle/>
           <a:p>
             <a:pPr>
-              <a:defRPr sz="1100">
+              <a:defRPr sz="1100" b="0">
                 <a:solidFill>
                   <a:srgbClr val="6B6B6B"/>
                 </a:solidFill>
@@ -18078,7 +19051,7 @@
           <a:lstStyle/>
           <a:p>
             <a:pPr>
-              <a:defRPr sz="1100" b="1">
+              <a:defRPr sz="1000" b="1">
                 <a:solidFill>
                   <a:srgbClr val="FFFFFF"/>
                 </a:solidFill>
@@ -18086,7 +19059,7 @@
               </a:defRPr>
             </a:pPr>
             <a:r>
-              <a:t>THE 4 MAJOR PROBLEMS IN LENDING</a:t>
+              <a:t>LIMITATIONS OF EXISTING METHODS (4 PROBLEMS)</a:t>
             </a:r>
           </a:p>
         </p:txBody>
@@ -18168,7 +19141,7 @@
           <a:lstStyle/>
           <a:p>
             <a:pPr>
-              <a:defRPr sz="1100" b="1">
+              <a:defRPr sz="1000" b="1">
                 <a:solidFill>
                   <a:srgbClr val="FFFFFF"/>
                 </a:solidFill>
@@ -18176,7 +19149,7 @@
               </a:defRPr>
             </a:pPr>
             <a:r>
-              <a:t>OUR NEED &amp; SOLUTION</a:t>
+              <a:t>NEED &amp; SOLUTION</a:t>
             </a:r>
           </a:p>
         </p:txBody>
@@ -18416,84 +19389,114 @@
           <a:lstStyle/>
           <a:p>
             <a:pPr>
-              <a:defRPr sz="850">
+              <a:lnSpc>
+                <a:spcPct val="115000"/>
+              </a:lnSpc>
+              <a:spcAft>
+                <a:spcPts val="600"/>
+              </a:spcAft>
+            </a:pPr>
+            <a:r>
+              <a:rPr sz="1150" b="1">
                 <a:solidFill>
                   <a:srgbClr val="1A1A1A"/>
                 </a:solidFill>
                 <a:latin typeface="Calibri"/>
-              </a:defRPr>
-            </a:pPr>
-            <a:r>
-              <a:t>1. Manual Document Delays: Verifying physical paperwork takes 3 to 7 days, delaying urgent loan access for legitimate borrowers.</a:t>
+              </a:rPr>
+              <a:t>Manual Review Delays: </a:t>
+            </a:r>
+            <a:r>
+              <a:rPr sz="1150" b="0">
+                <a:solidFill>
+                  <a:srgbClr val="1A1A1A"/>
+                </a:solidFill>
+                <a:latin typeface="Calibri"/>
+              </a:rPr>
+              <a:t>checking physical paperwork takes 3 to 7 days, delaying urgent funds for borrowers.</a:t>
             </a:r>
           </a:p>
           <a:p>
             <a:pPr>
-              <a:defRPr sz="850">
+              <a:lnSpc>
+                <a:spcPct val="115000"/>
+              </a:lnSpc>
+              <a:spcAft>
+                <a:spcPts val="600"/>
+              </a:spcAft>
+            </a:pPr>
+            <a:r>
+              <a:rPr sz="1150" b="1">
                 <a:solidFill>
                   <a:srgbClr val="1A1A1A"/>
                 </a:solidFill>
                 <a:latin typeface="Calibri"/>
-              </a:defRPr>
-            </a:pPr>
+              </a:rPr>
+              <a:t>Fake Certificate Fraud: </a:t>
+            </a:r>
+            <a:r>
+              <a:rPr sz="1150" b="0">
+                <a:solidFill>
+                  <a:srgbClr val="1A1A1A"/>
+                </a:solidFill>
+                <a:latin typeface="Calibri"/>
+              </a:rPr>
+              <a:t>applicants produce forged income slips and edited ID cards that human reviewers miss.</a:t>
+            </a:r>
           </a:p>
           <a:p>
             <a:pPr>
-              <a:defRPr sz="850">
+              <a:lnSpc>
+                <a:spcPct val="115000"/>
+              </a:lnSpc>
+              <a:spcAft>
+                <a:spcPts val="600"/>
+              </a:spcAft>
+            </a:pPr>
+            <a:r>
+              <a:rPr sz="1150" b="1">
                 <a:solidFill>
                   <a:srgbClr val="1A1A1A"/>
                 </a:solidFill>
                 <a:latin typeface="Calibri"/>
-              </a:defRPr>
-            </a:pPr>
-            <a:r>
-              <a:t>2. Fake Certificate Fraud: Applicants submit forged income certificates or edited ID cards that human reviewers often fail to detect.</a:t>
+              </a:rPr>
+              <a:t>Stolen OTP Identity Theft: </a:t>
+            </a:r>
+            <a:r>
+              <a:rPr sz="1150" b="0">
+                <a:solidFill>
+                  <a:srgbClr val="1A1A1A"/>
+                </a:solidFill>
+                <a:latin typeface="Calibri"/>
+              </a:rPr>
+              <a:t>scammers steal Aadhaar or PAN OTPs to create fake loans in innocent people's names.</a:t>
             </a:r>
           </a:p>
           <a:p>
             <a:pPr>
-              <a:defRPr sz="850">
+              <a:lnSpc>
+                <a:spcPct val="115000"/>
+              </a:lnSpc>
+              <a:spcAft>
+                <a:spcPts val="600"/>
+              </a:spcAft>
+            </a:pPr>
+            <a:r>
+              <a:rPr sz="1150" b="1">
                 <a:solidFill>
                   <a:srgbClr val="1A1A1A"/>
                 </a:solidFill>
                 <a:latin typeface="Calibri"/>
-              </a:defRPr>
-            </a:pPr>
-          </a:p>
-          <a:p>
-            <a:pPr>
-              <a:defRPr sz="850">
+              </a:rPr>
+              <a:t>Unexplained Black-Box Rejections: </a:t>
+            </a:r>
+            <a:r>
+              <a:rPr sz="1150" b="0">
                 <a:solidFill>
                   <a:srgbClr val="1A1A1A"/>
                 </a:solidFill>
                 <a:latin typeface="Calibri"/>
-              </a:defRPr>
-            </a:pPr>
-            <a:r>
-              <a:t>3. Stolen OTPs &amp; Identity Theft: Scammers trick people into sharing Aadhaar or PAN OTPs via phishing or SIM swap, creating fake loans in innocent people's names.</a:t>
-            </a:r>
-          </a:p>
-          <a:p>
-            <a:pPr>
-              <a:defRPr sz="850">
-                <a:solidFill>
-                  <a:srgbClr val="1A1A1A"/>
-                </a:solidFill>
-                <a:latin typeface="Calibri"/>
-              </a:defRPr>
-            </a:pPr>
-          </a:p>
-          <a:p>
-            <a:pPr>
-              <a:defRPr sz="850">
-                <a:solidFill>
-                  <a:srgbClr val="1A1A1A"/>
-                </a:solidFill>
-                <a:latin typeface="Calibri"/>
-              </a:defRPr>
-            </a:pPr>
-            <a:r>
-              <a:t>4. Unexplained Black-Box Rejections: Existing AI tools reject applicants without clear reasons, leaving borrowers confused and violating RBI rules.</a:t>
+              </a:rPr>
+              <a:t>traditional AI declines loans without explaining why, leaving applicants helpless.</a:t>
             </a:r>
           </a:p>
         </p:txBody>
@@ -18733,67 +19736,30 @@
           <a:lstStyle/>
           <a:p>
             <a:pPr>
-              <a:defRPr sz="850">
+              <a:lnSpc>
+                <a:spcPct val="115000"/>
+              </a:lnSpc>
+              <a:spcAft>
+                <a:spcPts val="400"/>
+              </a:spcAft>
+            </a:pPr>
+            <a:r>
+              <a:rPr sz="1150" b="1">
                 <a:solidFill>
                   <a:srgbClr val="1A1A1A"/>
                 </a:solidFill>
                 <a:latin typeface="Calibri"/>
-              </a:defRPr>
-            </a:pPr>
-            <a:r>
-              <a:t>A modern, automated digital lending system that:</a:t>
-            </a:r>
-          </a:p>
-          <a:p>
-            <a:pPr>
-              <a:defRPr sz="850">
+              </a:rPr>
+              <a:t>A smart digital lending system </a:t>
+            </a:r>
+            <a:r>
+              <a:rPr sz="1150" b="0">
                 <a:solidFill>
                   <a:srgbClr val="1A1A1A"/>
                 </a:solidFill>
                 <a:latin typeface="Calibri"/>
-              </a:defRPr>
-            </a:pPr>
-            <a:r>
-              <a:t>• Connects directly to government sources (DigiLocker) to stop fake certificates.</a:t>
-            </a:r>
-          </a:p>
-          <a:p>
-            <a:pPr>
-              <a:defRPr sz="850">
-                <a:solidFill>
-                  <a:srgbClr val="1A1A1A"/>
-                </a:solidFill>
-                <a:latin typeface="Calibri"/>
-              </a:defRPr>
-            </a:pPr>
-            <a:r>
-              <a:t>• Verifies the applicant's live physical face to make stolen OTPs useless.</a:t>
-            </a:r>
-          </a:p>
-          <a:p>
-            <a:pPr>
-              <a:defRPr sz="850">
-                <a:solidFill>
-                  <a:srgbClr val="1A1A1A"/>
-                </a:solidFill>
-                <a:latin typeface="Calibri"/>
-              </a:defRPr>
-            </a:pPr>
-            <a:r>
-              <a:t>• Uses OCR to cross-check name spellings and details across documents.</a:t>
-            </a:r>
-          </a:p>
-          <a:p>
-            <a:pPr>
-              <a:defRPr sz="850">
-                <a:solidFill>
-                  <a:srgbClr val="1A1A1A"/>
-                </a:solidFill>
-                <a:latin typeface="Calibri"/>
-              </a:defRPr>
-            </a:pPr>
-            <a:r>
-              <a:t>• Uses Explainable AI (EBM) to give simple, plain-English reasons for every decision.</a:t>
+              </a:rPr>
+              <a:t>that gives a decision in under 60 seconds, fetches authentic DigiLocker certificates, verifies live face biometrics to defeat OTP theft, and explains every decision with glass-box EBM.</a:t>
             </a:r>
           </a:p>
         </p:txBody>
@@ -19032,13 +19998,21 @@
           </a:bodyPr>
           <a:lstStyle/>
           <a:p>
-            <a:pPr>
-              <a:defRPr sz="850">
-                <a:latin typeface="Segoe UI"/>
-              </a:defRPr>
-            </a:pPr>
-            <a:r>
-              <a:t>Motivation: Comply with RBI Digital Lending Guidelines (DLG-2022/23) demanding speed, fraud prevention, and complete transparency in credit decisions.</a:t>
+            <a:r>
+              <a:rPr b="1" sz="1050">
+                <a:solidFill>
+                  <a:srgbClr val="1A1A1A"/>
+                </a:solidFill>
+              </a:rPr>
+              <a:t>Motivation: </a:t>
+            </a:r>
+            <a:r>
+              <a:rPr b="0" sz="1050">
+                <a:solidFill>
+                  <a:srgbClr val="1A1A1A"/>
+                </a:solidFill>
+              </a:rPr>
+              <a:t>RBI digital lending guidelines expect clear reasons for credit decisions; a bare approved/declined answer falls short.</a:t>
             </a:r>
           </a:p>
         </p:txBody>
@@ -19238,7 +20212,7 @@
           <a:lstStyle/>
           <a:p>
             <a:pPr>
-              <a:defRPr sz="1100">
+              <a:defRPr sz="1100" b="0">
                 <a:solidFill>
                   <a:srgbClr val="6B6B6B"/>
                 </a:solidFill>
@@ -19246,7 +20220,7 @@
               </a:defRPr>
             </a:pPr>
             <a:r>
-              <a:t>Five Concrete Project Goals Mapped to Implemented Modules</a:t>
+              <a:t>Each objective mapped to an implemented module and verified result</a:t>
             </a:r>
           </a:p>
         </p:txBody>
@@ -19341,11 +20315,17 @@
                     <a:lstStyle/>
                     <a:p>
                       <a:pPr>
-                        <a:defRPr sz="950" b="1">
-                          <a:latin typeface="Segoe UI"/>
+                        <a:defRPr>
+                          <a:latin typeface="Calibri"/>
                         </a:defRPr>
                       </a:pPr>
                       <a:r>
+                        <a:rPr sz="1100" b="1">
+                          <a:solidFill>
+                            <a:srgbClr val="FFFFFF"/>
+                          </a:solidFill>
+                          <a:latin typeface="Calibri"/>
+                        </a:rPr>
                         <a:t>#</a:t>
                       </a:r>
                     </a:p>
@@ -19386,11 +20366,17 @@
                     <a:lstStyle/>
                     <a:p>
                       <a:pPr>
-                        <a:defRPr sz="950" b="1">
-                          <a:latin typeface="Segoe UI"/>
+                        <a:defRPr>
+                          <a:latin typeface="Calibri"/>
                         </a:defRPr>
                       </a:pPr>
                       <a:r>
+                        <a:rPr sz="1100" b="1">
+                          <a:solidFill>
+                            <a:srgbClr val="FFFFFF"/>
+                          </a:solidFill>
+                          <a:latin typeface="Calibri"/>
+                        </a:rPr>
                         <a:t>OBJECTIVE</a:t>
                       </a:r>
                     </a:p>
@@ -19431,11 +20417,17 @@
                     <a:lstStyle/>
                     <a:p>
                       <a:pPr>
-                        <a:defRPr sz="950" b="1">
-                          <a:latin typeface="Segoe UI"/>
+                        <a:defRPr>
+                          <a:latin typeface="Calibri"/>
                         </a:defRPr>
                       </a:pPr>
                       <a:r>
+                        <a:rPr sz="1100" b="1">
+                          <a:solidFill>
+                            <a:srgbClr val="FFFFFF"/>
+                          </a:solidFill>
+                          <a:latin typeface="Calibri"/>
+                        </a:rPr>
                         <a:t>STATUS</a:t>
                       </a:r>
                     </a:p>
@@ -19483,11 +20475,17 @@
                     <a:lstStyle/>
                     <a:p>
                       <a:pPr>
-                        <a:defRPr sz="819" b="1">
-                          <a:latin typeface="Segoe UI"/>
+                        <a:defRPr>
+                          <a:latin typeface="Calibri"/>
                         </a:defRPr>
                       </a:pPr>
                       <a:r>
+                        <a:rPr sz="1100" b="1">
+                          <a:solidFill>
+                            <a:srgbClr val="1A1A1A"/>
+                          </a:solidFill>
+                          <a:latin typeface="Calibri"/>
+                        </a:rPr>
                         <a:t>1</a:t>
                       </a:r>
                     </a:p>
@@ -19525,12 +20523,18 @@
                     <a:lstStyle/>
                     <a:p>
                       <a:pPr>
-                        <a:defRPr sz="819">
-                          <a:latin typeface="Segoe UI"/>
+                        <a:defRPr>
+                          <a:latin typeface="Calibri"/>
                         </a:defRPr>
                       </a:pPr>
                       <a:r>
-                        <a:t>Automated Document Fetch: Connect to DigiLocker to fetch authentic Aadhaar &amp; PAN directly, eliminating fake certificates</a:t>
+                        <a:rPr sz="1100" b="0">
+                          <a:solidFill>
+                            <a:srgbClr val="1A1A1A"/>
+                          </a:solidFill>
+                          <a:latin typeface="Calibri"/>
+                        </a:rPr>
+                        <a:t>DigiLocker Integration: auto-fetch verified e-Aadhaar and PAN to stop fake certificates</a:t>
                       </a:r>
                     </a:p>
                   </a:txBody>
@@ -19567,11 +20571,17 @@
                     <a:lstStyle/>
                     <a:p>
                       <a:pPr>
-                        <a:defRPr sz="819">
-                          <a:latin typeface="Segoe UI"/>
+                        <a:defRPr>
+                          <a:latin typeface="Calibri"/>
                         </a:defRPr>
                       </a:pPr>
                       <a:r>
+                        <a:rPr sz="1100" b="0">
+                          <a:solidFill>
+                            <a:srgbClr val="1A1A1A"/>
+                          </a:solidFill>
+                          <a:latin typeface="Calibri"/>
+                        </a:rPr>
                         <a:t>✓ Implemented</a:t>
                       </a:r>
                     </a:p>
@@ -19616,11 +20626,17 @@
                     <a:lstStyle/>
                     <a:p>
                       <a:pPr>
-                        <a:defRPr sz="819" b="1">
-                          <a:latin typeface="Segoe UI"/>
+                        <a:defRPr>
+                          <a:latin typeface="Calibri"/>
                         </a:defRPr>
                       </a:pPr>
                       <a:r>
+                        <a:rPr sz="1100" b="1">
+                          <a:solidFill>
+                            <a:srgbClr val="1A1A1A"/>
+                          </a:solidFill>
+                          <a:latin typeface="Calibri"/>
+                        </a:rPr>
                         <a:t>2</a:t>
                       </a:r>
                     </a:p>
@@ -19661,12 +20677,18 @@
                     <a:lstStyle/>
                     <a:p>
                       <a:pPr>
-                        <a:defRPr sz="819">
-                          <a:latin typeface="Segoe UI"/>
+                        <a:defRPr>
+                          <a:latin typeface="Calibri"/>
                         </a:defRPr>
                       </a:pPr>
                       <a:r>
-                        <a:t>Live Biometric Face Matching: Compare applicant's live webcam face with Aadhaar &amp; PAN photos to prevent OTP theft</a:t>
+                        <a:rPr sz="1100" b="0">
+                          <a:solidFill>
+                            <a:srgbClr val="1A1A1A"/>
+                          </a:solidFill>
+                          <a:latin typeface="Calibri"/>
+                        </a:rPr>
+                        <a:t>Tri-Biometric Security: match live webcam face with Aadhaar &amp; PAN photos to defeat OTP theft</a:t>
                       </a:r>
                     </a:p>
                   </a:txBody>
@@ -19706,11 +20728,17 @@
                     <a:lstStyle/>
                     <a:p>
                       <a:pPr>
-                        <a:defRPr sz="819">
-                          <a:latin typeface="Segoe UI"/>
+                        <a:defRPr>
+                          <a:latin typeface="Calibri"/>
                         </a:defRPr>
                       </a:pPr>
                       <a:r>
+                        <a:rPr sz="1100" b="0">
+                          <a:solidFill>
+                            <a:srgbClr val="1A1A1A"/>
+                          </a:solidFill>
+                          <a:latin typeface="Calibri"/>
+                        </a:rPr>
                         <a:t>✓ Implemented</a:t>
                       </a:r>
                     </a:p>
@@ -19758,11 +20786,17 @@
                     <a:lstStyle/>
                     <a:p>
                       <a:pPr>
-                        <a:defRPr sz="819" b="1">
-                          <a:latin typeface="Segoe UI"/>
+                        <a:defRPr>
+                          <a:latin typeface="Calibri"/>
                         </a:defRPr>
                       </a:pPr>
                       <a:r>
+                        <a:rPr sz="1100" b="1">
+                          <a:solidFill>
+                            <a:srgbClr val="1A1A1A"/>
+                          </a:solidFill>
+                          <a:latin typeface="Calibri"/>
+                        </a:rPr>
                         <a:t>3</a:t>
                       </a:r>
                     </a:p>
@@ -19800,12 +20834,18 @@
                     <a:lstStyle/>
                     <a:p>
                       <a:pPr>
-                        <a:defRPr sz="819">
-                          <a:latin typeface="Segoe UI"/>
+                        <a:defRPr>
+                          <a:latin typeface="Calibri"/>
                         </a:defRPr>
                       </a:pPr>
                       <a:r>
-                        <a:t>OCR Text Extraction &amp; Cross-Check: Automatically read document details and cross-verify name spelling across IDs</a:t>
+                        <a:rPr sz="1100" b="0">
+                          <a:solidFill>
+                            <a:srgbClr val="1A1A1A"/>
+                          </a:solidFill>
+                          <a:latin typeface="Calibri"/>
+                        </a:rPr>
+                        <a:t>OCR Cross-Verification: extract text and cross-check name spelling across identity cards</a:t>
                       </a:r>
                     </a:p>
                   </a:txBody>
@@ -19842,11 +20882,17 @@
                     <a:lstStyle/>
                     <a:p>
                       <a:pPr>
-                        <a:defRPr sz="819">
-                          <a:latin typeface="Segoe UI"/>
+                        <a:defRPr>
+                          <a:latin typeface="Calibri"/>
                         </a:defRPr>
                       </a:pPr>
                       <a:r>
+                        <a:rPr sz="1100" b="0">
+                          <a:solidFill>
+                            <a:srgbClr val="1A1A1A"/>
+                          </a:solidFill>
+                          <a:latin typeface="Calibri"/>
+                        </a:rPr>
                         <a:t>✓ Implemented</a:t>
                       </a:r>
                     </a:p>
@@ -19891,11 +20937,17 @@
                     <a:lstStyle/>
                     <a:p>
                       <a:pPr>
-                        <a:defRPr sz="819" b="1">
-                          <a:latin typeface="Segoe UI"/>
+                        <a:defRPr>
+                          <a:latin typeface="Calibri"/>
                         </a:defRPr>
                       </a:pPr>
                       <a:r>
+                        <a:rPr sz="1100" b="1">
+                          <a:solidFill>
+                            <a:srgbClr val="1A1A1A"/>
+                          </a:solidFill>
+                          <a:latin typeface="Calibri"/>
+                        </a:rPr>
                         <a:t>4</a:t>
                       </a:r>
                     </a:p>
@@ -19936,12 +20988,18 @@
                     <a:lstStyle/>
                     <a:p>
                       <a:pPr>
-                        <a:defRPr sz="819">
-                          <a:latin typeface="Segoe UI"/>
+                        <a:defRPr>
+                          <a:latin typeface="Calibri"/>
                         </a:defRPr>
                       </a:pPr>
                       <a:r>
-                        <a:t>Explainable Credit Assessment: Use Explainable Boosting Machine (EBM) to score risk and show plain-English reasons</a:t>
+                        <a:rPr sz="1100" b="0">
+                          <a:solidFill>
+                            <a:srgbClr val="1A1A1A"/>
+                          </a:solidFill>
+                          <a:latin typeface="Calibri"/>
+                        </a:rPr>
+                        <a:t>Explainable EBM Underwriting: score credit risk and output plain-English decision reasons</a:t>
                       </a:r>
                     </a:p>
                   </a:txBody>
@@ -19981,11 +21039,17 @@
                     <a:lstStyle/>
                     <a:p>
                       <a:pPr>
-                        <a:defRPr sz="819">
-                          <a:latin typeface="Segoe UI"/>
+                        <a:defRPr>
+                          <a:latin typeface="Calibri"/>
                         </a:defRPr>
                       </a:pPr>
                       <a:r>
+                        <a:rPr sz="1100" b="0">
+                          <a:solidFill>
+                            <a:srgbClr val="1A1A1A"/>
+                          </a:solidFill>
+                          <a:latin typeface="Calibri"/>
+                        </a:rPr>
                         <a:t>✓ Implemented</a:t>
                       </a:r>
                     </a:p>
@@ -20033,11 +21097,17 @@
                     <a:lstStyle/>
                     <a:p>
                       <a:pPr>
-                        <a:defRPr sz="819" b="1">
-                          <a:latin typeface="Segoe UI"/>
+                        <a:defRPr>
+                          <a:latin typeface="Calibri"/>
                         </a:defRPr>
                       </a:pPr>
                       <a:r>
+                        <a:rPr sz="1100" b="1">
+                          <a:solidFill>
+                            <a:srgbClr val="1A1A1A"/>
+                          </a:solidFill>
+                          <a:latin typeface="Calibri"/>
+                        </a:rPr>
                         <a:t>5</a:t>
                       </a:r>
                     </a:p>
@@ -20075,12 +21145,18 @@
                     <a:lstStyle/>
                     <a:p>
                       <a:pPr>
-                        <a:defRPr sz="819">
-                          <a:latin typeface="Segoe UI"/>
+                        <a:defRPr>
+                          <a:latin typeface="Calibri"/>
                         </a:defRPr>
                       </a:pPr>
                       <a:r>
-                        <a:t>Machine Learning Benchmarking: Compare EBM against Random Forest to ensure high accuracy without losing transparency</a:t>
+                        <a:rPr sz="1100" b="0">
+                          <a:solidFill>
+                            <a:srgbClr val="1A1A1A"/>
+                          </a:solidFill>
+                          <a:latin typeface="Calibri"/>
+                        </a:rPr>
+                        <a:t>Random Forest Benchmark: validate that EBM matches state-of-the-art ensemble accuracy</a:t>
                       </a:r>
                     </a:p>
                   </a:txBody>
@@ -20117,11 +21193,17 @@
                     <a:lstStyle/>
                     <a:p>
                       <a:pPr>
-                        <a:defRPr sz="819">
-                          <a:latin typeface="Segoe UI"/>
+                        <a:defRPr>
+                          <a:latin typeface="Calibri"/>
                         </a:defRPr>
                       </a:pPr>
                       <a:r>
+                        <a:rPr sz="1100" b="0">
+                          <a:solidFill>
+                            <a:srgbClr val="1A1A1A"/>
+                          </a:solidFill>
+                          <a:latin typeface="Calibri"/>
+                        </a:rPr>
                         <a:t>✓ Implemented</a:t>
                       </a:r>
                     </a:p>
@@ -20390,7 +21472,7 @@
           <a:lstStyle/>
           <a:p>
             <a:pPr>
-              <a:defRPr sz="1100">
+              <a:defRPr sz="1100" b="0">
                 <a:solidFill>
                   <a:srgbClr val="6B6B6B"/>
                 </a:solidFill>
@@ -20398,7 +21480,7 @@
               </a:defRPr>
             </a:pPr>
             <a:r>
-              <a:t>Comparing Current Lending Approaches to Our Unified Smart System</a:t>
+              <a:t>Comparing current lending approaches to our unified smart system</a:t>
             </a:r>
           </a:p>
         </p:txBody>
@@ -20493,11 +21575,17 @@
                     <a:lstStyle/>
                     <a:p>
                       <a:pPr>
-                        <a:defRPr sz="950" b="1">
-                          <a:latin typeface="Segoe UI"/>
+                        <a:defRPr>
+                          <a:latin typeface="Calibri"/>
                         </a:defRPr>
                       </a:pPr>
                       <a:r>
+                        <a:rPr sz="1100" b="1">
+                          <a:solidFill>
+                            <a:srgbClr val="FFFFFF"/>
+                          </a:solidFill>
+                          <a:latin typeface="Calibri"/>
+                        </a:rPr>
                         <a:t>STUDY / APPROACH</a:t>
                       </a:r>
                     </a:p>
@@ -20538,11 +21626,17 @@
                     <a:lstStyle/>
                     <a:p>
                       <a:pPr>
-                        <a:defRPr sz="950" b="1">
-                          <a:latin typeface="Segoe UI"/>
+                        <a:defRPr>
+                          <a:latin typeface="Calibri"/>
                         </a:defRPr>
                       </a:pPr>
                       <a:r>
+                        <a:rPr sz="1100" b="1">
+                          <a:solidFill>
+                            <a:srgbClr val="FFFFFF"/>
+                          </a:solidFill>
+                          <a:latin typeface="Calibri"/>
+                        </a:rPr>
                         <a:t>CONTRIBUTION</a:t>
                       </a:r>
                     </a:p>
@@ -20583,11 +21677,17 @@
                     <a:lstStyle/>
                     <a:p>
                       <a:pPr>
-                        <a:defRPr sz="950" b="1">
-                          <a:latin typeface="Segoe UI"/>
+                        <a:defRPr>
+                          <a:latin typeface="Calibri"/>
                         </a:defRPr>
                       </a:pPr>
                       <a:r>
+                        <a:rPr sz="1100" b="1">
+                          <a:solidFill>
+                            <a:srgbClr val="FFFFFF"/>
+                          </a:solidFill>
+                          <a:latin typeface="Calibri"/>
+                        </a:rPr>
                         <a:t>GAP FOR THIS PROJECT</a:t>
                       </a:r>
                     </a:p>
@@ -20635,12 +21735,18 @@
                     <a:lstStyle/>
                     <a:p>
                       <a:pPr>
-                        <a:defRPr sz="819" b="1">
-                          <a:latin typeface="Segoe UI"/>
+                        <a:defRPr>
+                          <a:latin typeface="Calibri"/>
                         </a:defRPr>
                       </a:pPr>
                       <a:r>
-                        <a:t>Traditional Manual Lending</a:t>
+                        <a:rPr sz="1050" b="1">
+                          <a:solidFill>
+                            <a:srgbClr val="1A1A1A"/>
+                          </a:solidFill>
+                          <a:latin typeface="Calibri"/>
+                        </a:rPr>
+                        <a:t>Manual Review &amp; Scorecards</a:t>
                       </a:r>
                     </a:p>
                   </a:txBody>
@@ -20677,12 +21783,18 @@
                     <a:lstStyle/>
                     <a:p>
                       <a:pPr>
-                        <a:defRPr sz="819">
-                          <a:latin typeface="Segoe UI"/>
+                        <a:defRPr>
+                          <a:latin typeface="Calibri"/>
                         </a:defRPr>
                       </a:pPr>
                       <a:r>
-                        <a:t>Manual xerox review &amp; credit scorecards</a:t>
+                        <a:rPr sz="1050" b="0">
+                          <a:solidFill>
+                            <a:srgbClr val="1A1A1A"/>
+                          </a:solidFill>
+                          <a:latin typeface="Calibri"/>
+                        </a:rPr>
+                        <a:t>Readable points per variable</a:t>
                       </a:r>
                     </a:p>
                   </a:txBody>
@@ -20719,12 +21831,18 @@
                     <a:lstStyle/>
                     <a:p>
                       <a:pPr>
-                        <a:defRPr sz="819">
-                          <a:latin typeface="Segoe UI"/>
+                        <a:defRPr>
+                          <a:latin typeface="Calibri"/>
                         </a:defRPr>
                       </a:pPr>
                       <a:r>
-                        <a:t>Very slow (3-7 days); high fraud risk from fake documents</a:t>
+                        <a:rPr sz="1050" b="0">
+                          <a:solidFill>
+                            <a:srgbClr val="1A1A1A"/>
+                          </a:solidFill>
+                          <a:latin typeface="Calibri"/>
+                        </a:rPr>
+                        <a:t>Slow (3-7 days); high fake certificate risk</a:t>
                       </a:r>
                     </a:p>
                   </a:txBody>
@@ -20768,12 +21886,18 @@
                     <a:lstStyle/>
                     <a:p>
                       <a:pPr>
-                        <a:defRPr sz="819" b="1">
-                          <a:latin typeface="Segoe UI"/>
+                        <a:defRPr>
+                          <a:latin typeface="Calibri"/>
                         </a:defRPr>
                       </a:pPr>
                       <a:r>
-                        <a:t>OTP-Only Digital Lending</a:t>
+                        <a:rPr sz="1050" b="1">
+                          <a:solidFill>
+                            <a:srgbClr val="1A1A1A"/>
+                          </a:solidFill>
+                          <a:latin typeface="Calibri"/>
+                        </a:rPr>
+                        <a:t>OTP-Based Digital Lending</a:t>
                       </a:r>
                     </a:p>
                   </a:txBody>
@@ -20813,12 +21937,18 @@
                     <a:lstStyle/>
                     <a:p>
                       <a:pPr>
-                        <a:defRPr sz="819">
-                          <a:latin typeface="Segoe UI"/>
+                        <a:defRPr>
+                          <a:latin typeface="Calibri"/>
                         </a:defRPr>
                       </a:pPr>
                       <a:r>
-                        <a:t>Instant verification using mobile OTPs</a:t>
+                        <a:rPr sz="1050" b="0">
+                          <a:solidFill>
+                            <a:srgbClr val="1A1A1A"/>
+                          </a:solidFill>
+                          <a:latin typeface="Calibri"/>
+                        </a:rPr>
+                        <a:t>Instant mobile authentication</a:t>
                       </a:r>
                     </a:p>
                   </a:txBody>
@@ -20858,12 +21988,18 @@
                     <a:lstStyle/>
                     <a:p>
                       <a:pPr>
-                        <a:defRPr sz="819">
-                          <a:latin typeface="Segoe UI"/>
+                        <a:defRPr>
+                          <a:latin typeface="Calibri"/>
                         </a:defRPr>
                       </a:pPr>
                       <a:r>
-                        <a:t>Vulnerable to stolen OTPs, phishing, and identity theft</a:t>
+                        <a:rPr sz="1050" b="0">
+                          <a:solidFill>
+                            <a:srgbClr val="1A1A1A"/>
+                          </a:solidFill>
+                          <a:latin typeface="Calibri"/>
+                        </a:rPr>
+                        <a:t>Vulnerable to stolen OTPs &amp; identity theft</a:t>
                       </a:r>
                     </a:p>
                   </a:txBody>
@@ -20910,11 +22046,17 @@
                     <a:lstStyle/>
                     <a:p>
                       <a:pPr>
-                        <a:defRPr sz="819" b="1">
-                          <a:latin typeface="Segoe UI"/>
+                        <a:defRPr>
+                          <a:latin typeface="Calibri"/>
                         </a:defRPr>
                       </a:pPr>
                       <a:r>
+                        <a:rPr sz="1050" b="1">
+                          <a:solidFill>
+                            <a:srgbClr val="1A1A1A"/>
+                          </a:solidFill>
+                          <a:latin typeface="Calibri"/>
+                        </a:rPr>
                         <a:t>Deep Learning &amp; Ensembles</a:t>
                       </a:r>
                     </a:p>
@@ -20952,12 +22094,18 @@
                     <a:lstStyle/>
                     <a:p>
                       <a:pPr>
-                        <a:defRPr sz="819">
-                          <a:latin typeface="Segoe UI"/>
+                        <a:defRPr>
+                          <a:latin typeface="Calibri"/>
                         </a:defRPr>
                       </a:pPr>
                       <a:r>
-                        <a:t>High accuracy credit prediction (Random Forest / XGBoost)</a:t>
+                        <a:rPr sz="1050" b="0">
+                          <a:solidFill>
+                            <a:srgbClr val="1A1A1A"/>
+                          </a:solidFill>
+                          <a:latin typeface="Calibri"/>
+                        </a:rPr>
+                        <a:t>High accuracy credit prediction</a:t>
                       </a:r>
                     </a:p>
                   </a:txBody>
@@ -20994,12 +22142,18 @@
                     <a:lstStyle/>
                     <a:p>
                       <a:pPr>
-                        <a:defRPr sz="819">
-                          <a:latin typeface="Segoe UI"/>
+                        <a:defRPr>
+                          <a:latin typeface="Calibri"/>
                         </a:defRPr>
                       </a:pPr>
                       <a:r>
-                        <a:t>"Black Box" opacity; cannot explain why a loan was rejected</a:t>
+                        <a:rPr sz="1050" b="0">
+                          <a:solidFill>
+                            <a:srgbClr val="1A1A1A"/>
+                          </a:solidFill>
+                          <a:latin typeface="Calibri"/>
+                        </a:rPr>
+                        <a:t>Black-box opacity; cannot explain rejections</a:t>
                       </a:r>
                     </a:p>
                   </a:txBody>
@@ -21043,12 +22197,18 @@
                     <a:lstStyle/>
                     <a:p>
                       <a:pPr>
-                        <a:defRPr sz="819" b="1">
-                          <a:latin typeface="Segoe UI"/>
+                        <a:defRPr>
+                          <a:latin typeface="Calibri"/>
                         </a:defRPr>
                       </a:pPr>
                       <a:r>
-                        <a:t>Post-Hoc Explanations (SHAP)</a:t>
+                        <a:rPr sz="1050" b="1">
+                          <a:solidFill>
+                            <a:srgbClr val="1A1A1A"/>
+                          </a:solidFill>
+                          <a:latin typeface="Calibri"/>
+                        </a:rPr>
+                        <a:t>Post-Hoc SHAP / LIME</a:t>
                       </a:r>
                     </a:p>
                   </a:txBody>
@@ -21088,12 +22248,18 @@
                     <a:lstStyle/>
                     <a:p>
                       <a:pPr>
-                        <a:defRPr sz="819">
-                          <a:latin typeface="Segoe UI"/>
+                        <a:defRPr>
+                          <a:latin typeface="Calibri"/>
                         </a:defRPr>
                       </a:pPr>
                       <a:r>
-                        <a:t>Explains black-box models after prediction</a:t>
+                        <a:rPr sz="1050" b="0">
+                          <a:solidFill>
+                            <a:srgbClr val="1A1A1A"/>
+                          </a:solidFill>
+                          <a:latin typeface="Calibri"/>
+                        </a:rPr>
+                        <a:t>Approximate factor explanations</a:t>
                       </a:r>
                     </a:p>
                   </a:txBody>
@@ -21133,12 +22299,18 @@
                     <a:lstStyle/>
                     <a:p>
                       <a:pPr>
-                        <a:defRPr sz="819">
-                          <a:latin typeface="Segoe UI"/>
+                        <a:defRPr>
+                          <a:latin typeface="Calibri"/>
                         </a:defRPr>
                       </a:pPr>
                       <a:r>
-                        <a:t>Approximations can be misleading and unstable on correlated data</a:t>
+                        <a:rPr sz="1050" b="0">
+                          <a:solidFill>
+                            <a:srgbClr val="1A1A1A"/>
+                          </a:solidFill>
+                          <a:latin typeface="Calibri"/>
+                        </a:rPr>
+                        <a:t>Approximations; unstable with correlated inputs</a:t>
                       </a:r>
                     </a:p>
                   </a:txBody>
@@ -21185,12 +22357,18 @@
                     <a:lstStyle/>
                     <a:p>
                       <a:pPr>
-                        <a:defRPr sz="819" b="1">
-                          <a:latin typeface="Segoe UI"/>
+                        <a:defRPr>
+                          <a:latin typeface="Calibri"/>
                         </a:defRPr>
                       </a:pPr>
                       <a:r>
-                        <a:t>Our Proposed System</a:t>
+                        <a:rPr sz="1050" b="1">
+                          <a:solidFill>
+                            <a:srgbClr val="1A1A1A"/>
+                          </a:solidFill>
+                          <a:latin typeface="Calibri"/>
+                        </a:rPr>
+                        <a:t>Our Proposed 5-Model System</a:t>
                       </a:r>
                     </a:p>
                   </a:txBody>
@@ -21227,12 +22405,18 @@
                     <a:lstStyle/>
                     <a:p>
                       <a:pPr>
-                        <a:defRPr sz="819">
-                          <a:latin typeface="Segoe UI"/>
+                        <a:defRPr>
+                          <a:latin typeface="Calibri"/>
                         </a:defRPr>
                       </a:pPr>
                       <a:r>
-                        <a:t>DigiLocker + Face Match + OCR + EBM + Random Forest</a:t>
+                        <a:rPr sz="1050" b="0">
+                          <a:solidFill>
+                            <a:srgbClr val="1A1A1A"/>
+                          </a:solidFill>
+                          <a:latin typeface="Calibri"/>
+                        </a:rPr>
+                        <a:t>DigiLocker + Biometrics + OCR + EBM</a:t>
                       </a:r>
                     </a:p>
                   </a:txBody>
@@ -21269,12 +22453,18 @@
                     <a:lstStyle/>
                     <a:p>
                       <a:pPr>
-                        <a:defRPr sz="819">
-                          <a:latin typeface="Segoe UI"/>
+                        <a:defRPr>
+                          <a:latin typeface="Calibri"/>
                         </a:defRPr>
                       </a:pPr>
                       <a:r>
-                        <a:t>Fast, fraud-proof, physically verified, and 100% transparent</a:t>
+                        <a:rPr sz="1050" b="0">
+                          <a:solidFill>
+                            <a:srgbClr val="1A1A1A"/>
+                          </a:solidFill>
+                          <a:latin typeface="Calibri"/>
+                        </a:rPr>
+                        <a:t>Fast, fraud-proof, physically verified &amp; transparent</a:t>
                       </a:r>
                     </a:p>
                   </a:txBody>
@@ -21549,13 +22739,13 @@
           </a:bodyPr>
           <a:lstStyle/>
           <a:p>
-            <a:pPr>
-              <a:defRPr sz="850">
-                <a:latin typeface="Segoe UI"/>
-              </a:defRPr>
-            </a:pPr>
-            <a:r>
-              <a:t>Research Gap: Existing platforms only address one aspect (either fast credit scoring OR face match). None combine government DigiLocker verification, 3-way biometrics, and glass-box explainable AI in a unified workflow.</a:t>
+            <a:r>
+              <a:rPr b="1" sz="1050"/>
+              <a:t>Research gap: </a:t>
+            </a:r>
+            <a:r>
+              <a:rPr b="0" sz="1050"/>
+              <a:t>prediction and explanation are studied separately; few works give a full workflow combining government document fetch, 3-way biometrics, and glass-box AI in one platform.</a:t>
             </a:r>
           </a:p>
         </p:txBody>
@@ -21805,7 +22995,7 @@
           <a:lstStyle/>
           <a:p>
             <a:pPr>
-              <a:defRPr sz="1050">
+              <a:defRPr sz="1100">
                 <a:solidFill>
                   <a:srgbClr val="6B6B6B"/>
                 </a:solidFill>
@@ -21813,30 +23003,7 @@
               </a:defRPr>
             </a:pPr>
             <a:r>
-              <a:t>Five-Stage Simple Pipeline from Document Fetch to Audited Decision</a:t>
-            </a:r>
-          </a:p>
-          <a:p>
-            <a:pPr>
-              <a:defRPr sz="1050">
-                <a:solidFill>
-                  <a:srgbClr val="6B6B6B"/>
-                </a:solidFill>
-                <a:latin typeface="Calibri"/>
-              </a:defRPr>
-            </a:pPr>
-          </a:p>
-          <a:p>
-            <a:pPr>
-              <a:defRPr sz="1050">
-                <a:solidFill>
-                  <a:srgbClr val="6B6B6B"/>
-                </a:solidFill>
-                <a:latin typeface="Calibri"/>
-              </a:defRPr>
-            </a:pPr>
-            <a:r>
-              <a:t>END-TO-END WORKFLOW</a:t>
+              <a:t>Five-stage pipeline from document fetch to audited verdict</a:t>
             </a:r>
           </a:p>
         </p:txBody>
@@ -22076,7 +23243,7 @@
           <a:lstStyle/>
           <a:p>
             <a:pPr>
-              <a:defRPr sz="800" b="1">
+              <a:defRPr sz="950" b="1">
                 <a:solidFill>
                   <a:srgbClr val="FFFFFF"/>
                 </a:solidFill>
@@ -22086,16 +23253,7 @@
             <a:r>
               <a:t>DigiLocker</a:t>
             </a:r>
-          </a:p>
-          <a:p>
-            <a:pPr>
-              <a:defRPr sz="800" b="1">
-                <a:solidFill>
-                  <a:srgbClr val="FFFFFF"/>
-                </a:solidFill>
-                <a:latin typeface="Calibri"/>
-              </a:defRPr>
-            </a:pPr>
+            <a:br/>
             <a:r>
               <a:t>SSO</a:t>
             </a:r>
@@ -22383,9 +23541,9 @@
           <a:lstStyle/>
           <a:p>
             <a:pPr>
-              <a:defRPr sz="800" b="1">
-                <a:solidFill>
-                  <a:srgbClr val="1F4D39"/>
+              <a:defRPr sz="950" b="1">
+                <a:solidFill>
+                  <a:srgbClr val="FFFFFF"/>
                 </a:solidFill>
                 <a:latin typeface="Calibri"/>
               </a:defRPr>
@@ -22393,16 +23551,7 @@
             <a:r>
               <a:t>Live Face</a:t>
             </a:r>
-          </a:p>
-          <a:p>
-            <a:pPr>
-              <a:defRPr sz="800" b="1">
-                <a:solidFill>
-                  <a:srgbClr val="1F4D39"/>
-                </a:solidFill>
-                <a:latin typeface="Calibri"/>
-              </a:defRPr>
-            </a:pPr>
+            <a:br/>
             <a:r>
               <a:t>Match</a:t>
             </a:r>
@@ -22690,9 +23839,9 @@
           <a:lstStyle/>
           <a:p>
             <a:pPr>
-              <a:defRPr sz="800" b="1">
-                <a:solidFill>
-                  <a:srgbClr val="1F4D39"/>
+              <a:defRPr sz="950" b="1">
+                <a:solidFill>
+                  <a:srgbClr val="FFFFFF"/>
                 </a:solidFill>
                 <a:latin typeface="Calibri"/>
               </a:defRPr>
@@ -22700,16 +23849,7 @@
             <a:r>
               <a:t>OCR Cross</a:t>
             </a:r>
-          </a:p>
-          <a:p>
-            <a:pPr>
-              <a:defRPr sz="800" b="1">
-                <a:solidFill>
-                  <a:srgbClr val="1F4D39"/>
-                </a:solidFill>
-                <a:latin typeface="Calibri"/>
-              </a:defRPr>
-            </a:pPr>
+            <a:br/>
             <a:r>
               <a:t>Check</a:t>
             </a:r>
@@ -22997,9 +24137,9 @@
           <a:lstStyle/>
           <a:p>
             <a:pPr>
-              <a:defRPr sz="800" b="1">
-                <a:solidFill>
-                  <a:srgbClr val="1F4D39"/>
+              <a:defRPr sz="950" b="1">
+                <a:solidFill>
+                  <a:srgbClr val="FFFFFF"/>
                 </a:solidFill>
                 <a:latin typeface="Calibri"/>
               </a:defRPr>
@@ -23007,16 +24147,7 @@
             <a:r>
               <a:t>EBM</a:t>
             </a:r>
-          </a:p>
-          <a:p>
-            <a:pPr>
-              <a:defRPr sz="800" b="1">
-                <a:solidFill>
-                  <a:srgbClr val="1F4D39"/>
-                </a:solidFill>
-                <a:latin typeface="Calibri"/>
-              </a:defRPr>
-            </a:pPr>
+            <a:br/>
             <a:r>
               <a:t>Scoring</a:t>
             </a:r>
@@ -23304,26 +24435,17 @@
           <a:lstStyle/>
           <a:p>
             <a:pPr>
-              <a:defRPr sz="800" b="1">
-                <a:solidFill>
-                  <a:srgbClr val="1F4D39"/>
+              <a:defRPr sz="950" b="1">
+                <a:solidFill>
+                  <a:srgbClr val="FFFFFF"/>
                 </a:solidFill>
                 <a:latin typeface="Calibri"/>
               </a:defRPr>
             </a:pPr>
             <a:r>
-              <a:t>Clear</a:t>
-            </a:r>
-          </a:p>
-          <a:p>
-            <a:pPr>
-              <a:defRPr sz="800" b="1">
-                <a:solidFill>
-                  <a:srgbClr val="1F4D39"/>
-                </a:solidFill>
-                <a:latin typeface="Calibri"/>
-              </a:defRPr>
-            </a:pPr>
+              <a:t>Ranked</a:t>
+            </a:r>
+            <a:br/>
             <a:r>
               <a:t>Reasons</a:t>
             </a:r>
@@ -23611,7 +24733,7 @@
           <a:lstStyle/>
           <a:p>
             <a:pPr>
-              <a:defRPr sz="800" b="1">
+              <a:defRPr sz="950" b="1">
                 <a:solidFill>
                   <a:srgbClr val="FFFFFF"/>
                 </a:solidFill>
@@ -23619,20 +24741,11 @@
               </a:defRPr>
             </a:pPr>
             <a:r>
-              <a:t>Sanction</a:t>
-            </a:r>
-          </a:p>
-          <a:p>
-            <a:pPr>
-              <a:defRPr sz="800" b="1">
-                <a:solidFill>
-                  <a:srgbClr val="FFFFFF"/>
-                </a:solidFill>
-                <a:latin typeface="Calibri"/>
-              </a:defRPr>
-            </a:pPr>
-            <a:r>
-              <a:t>Letter</a:t>
+              <a:t>Verdict +</a:t>
+            </a:r>
+            <a:br/>
+            <a:r>
+              <a:t>Audit</a:t>
             </a:r>
           </a:p>
         </p:txBody>
@@ -23714,7 +24827,7 @@
           <a:lstStyle/>
           <a:p>
             <a:pPr>
-              <a:defRPr sz="1100" b="1">
+              <a:defRPr sz="1000" b="1">
                 <a:solidFill>
                   <a:srgbClr val="FFFFFF"/>
                 </a:solidFill>
@@ -23804,7 +24917,7 @@
           <a:lstStyle/>
           <a:p>
             <a:pPr>
-              <a:defRPr sz="1100" b="1">
+              <a:defRPr sz="1000" b="1">
                 <a:solidFill>
                   <a:srgbClr val="FFFFFF"/>
                 </a:solidFill>
@@ -23812,7 +24925,7 @@
               </a:defRPr>
             </a:pPr>
             <a:r>
-              <a:t>KEY BENEFITS</a:t>
+              <a:t>KEY FEATURES</a:t>
             </a:r>
           </a:p>
         </p:txBody>
@@ -24052,107 +25165,142 @@
           <a:lstStyle/>
           <a:p>
             <a:pPr>
-              <a:defRPr sz="819">
+              <a:lnSpc>
+                <a:spcPct val="115000"/>
+              </a:lnSpc>
+              <a:spcAft>
+                <a:spcPts val="400"/>
+              </a:spcAft>
+            </a:pPr>
+            <a:r>
+              <a:rPr sz="1100" b="1">
                 <a:solidFill>
                   <a:srgbClr val="1A1A1A"/>
                 </a:solidFill>
                 <a:latin typeface="Calibri"/>
-              </a:defRPr>
-            </a:pPr>
-            <a:r>
-              <a:t>Step 1: DigiLocker Login — Direct fetch of verified Aadhaar &amp; PAN documents.</a:t>
+              </a:rPr>
+              <a:t>DigiLocker SSO: </a:t>
+            </a:r>
+            <a:r>
+              <a:rPr sz="1100" b="0">
+                <a:solidFill>
+                  <a:srgbClr val="1A1A1A"/>
+                </a:solidFill>
+                <a:latin typeface="Calibri"/>
+              </a:rPr>
+              <a:t>pulls authentic e-Aadhaar and PAN from government databases.</a:t>
             </a:r>
           </a:p>
           <a:p>
             <a:pPr>
-              <a:defRPr sz="819">
+              <a:lnSpc>
+                <a:spcPct val="115000"/>
+              </a:lnSpc>
+              <a:spcAft>
+                <a:spcPts val="400"/>
+              </a:spcAft>
+            </a:pPr>
+            <a:r>
+              <a:rPr sz="1100" b="1">
                 <a:solidFill>
                   <a:srgbClr val="1A1A1A"/>
                 </a:solidFill>
                 <a:latin typeface="Calibri"/>
-              </a:defRPr>
-            </a:pPr>
+              </a:rPr>
+              <a:t>Tri-Biometric Match: </a:t>
+            </a:r>
+            <a:r>
+              <a:rPr sz="1100" b="0">
+                <a:solidFill>
+                  <a:srgbClr val="1A1A1A"/>
+                </a:solidFill>
+                <a:latin typeface="Calibri"/>
+              </a:rPr>
+              <a:t>compares live webcam selfie with both document photos (≥ 75%).</a:t>
+            </a:r>
           </a:p>
           <a:p>
             <a:pPr>
-              <a:defRPr sz="819">
+              <a:lnSpc>
+                <a:spcPct val="115000"/>
+              </a:lnSpc>
+              <a:spcAft>
+                <a:spcPts val="400"/>
+              </a:spcAft>
+            </a:pPr>
+            <a:r>
+              <a:rPr sz="1100" b="1">
                 <a:solidFill>
                   <a:srgbClr val="1A1A1A"/>
                 </a:solidFill>
                 <a:latin typeface="Calibri"/>
-              </a:defRPr>
-            </a:pPr>
-            <a:r>
-              <a:t>Step 2: Tri-Biometric Match — Live webcam selfie compared with Aadhaar &amp; PAN photos.</a:t>
+              </a:rPr>
+              <a:t>OCR Cross-Check: </a:t>
+            </a:r>
+            <a:r>
+              <a:rPr sz="1100" b="0">
+                <a:solidFill>
+                  <a:srgbClr val="1A1A1A"/>
+                </a:solidFill>
+                <a:latin typeface="Calibri"/>
+              </a:rPr>
+              <a:t>extracts text and validates name and DOB consistency across IDs.</a:t>
             </a:r>
           </a:p>
           <a:p>
             <a:pPr>
-              <a:defRPr sz="819">
+              <a:lnSpc>
+                <a:spcPct val="115000"/>
+              </a:lnSpc>
+              <a:spcAft>
+                <a:spcPts val="400"/>
+              </a:spcAft>
+            </a:pPr>
+            <a:r>
+              <a:rPr sz="1100" b="1">
                 <a:solidFill>
                   <a:srgbClr val="1A1A1A"/>
                 </a:solidFill>
                 <a:latin typeface="Calibri"/>
-              </a:defRPr>
-            </a:pPr>
+              </a:rPr>
+              <a:t>EBM Scoring: </a:t>
+            </a:r>
+            <a:r>
+              <a:rPr sz="1100" b="0">
+                <a:solidFill>
+                  <a:srgbClr val="1A1A1A"/>
+                </a:solidFill>
+                <a:latin typeface="Calibri"/>
+              </a:rPr>
+              <a:t>calculates risk probability from income, debts, and bureau score.</a:t>
+            </a:r>
           </a:p>
           <a:p>
             <a:pPr>
-              <a:defRPr sz="819">
+              <a:lnSpc>
+                <a:spcPct val="115000"/>
+              </a:lnSpc>
+              <a:spcAft>
+                <a:spcPts val="400"/>
+              </a:spcAft>
+            </a:pPr>
+            <a:r>
+              <a:rPr sz="1100" b="1">
                 <a:solidFill>
                   <a:srgbClr val="1A1A1A"/>
                 </a:solidFill>
                 <a:latin typeface="Calibri"/>
-              </a:defRPr>
-            </a:pPr>
-            <a:r>
-              <a:t>Step 3: OCR Cross-Check — Scans text and matches names/DOB across IDs.</a:t>
-            </a:r>
-          </a:p>
-          <a:p>
-            <a:pPr>
-              <a:defRPr sz="819">
+              </a:rPr>
+              <a:t>Explainable Verdict: </a:t>
+            </a:r>
+            <a:r>
+              <a:rPr sz="1100" b="0">
                 <a:solidFill>
                   <a:srgbClr val="1A1A1A"/>
                 </a:solidFill>
                 <a:latin typeface="Calibri"/>
-              </a:defRPr>
-            </a:pPr>
-          </a:p>
-          <a:p>
-            <a:pPr>
-              <a:defRPr sz="819">
-                <a:solidFill>
-                  <a:srgbClr val="1A1A1A"/>
-                </a:solidFill>
-                <a:latin typeface="Calibri"/>
-              </a:defRPr>
-            </a:pPr>
-            <a:r>
-              <a:t>Step 4: EBM Underwriting — Evaluates income, debts, EMI, and credit score.</a:t>
-            </a:r>
-          </a:p>
-          <a:p>
-            <a:pPr>
-              <a:defRPr sz="819">
-                <a:solidFill>
-                  <a:srgbClr val="1A1A1A"/>
-                </a:solidFill>
-                <a:latin typeface="Calibri"/>
-              </a:defRPr>
-            </a:pPr>
-          </a:p>
-          <a:p>
-            <a:pPr>
-              <a:defRPr sz="819">
-                <a:solidFill>
-                  <a:srgbClr val="1A1A1A"/>
-                </a:solidFill>
-                <a:latin typeface="Calibri"/>
-              </a:defRPr>
-            </a:pPr>
-            <a:r>
-              <a:t>Step 5: Decision &amp; Explanation — Instant approval or ranked rejection reasons.</a:t>
+              </a:rPr>
+              <a:t>ranks top reasons and outputs instant sanction or decline notice.</a:t>
             </a:r>
           </a:p>
         </p:txBody>
@@ -24392,107 +25540,142 @@
           <a:lstStyle/>
           <a:p>
             <a:pPr>
-              <a:defRPr sz="819">
+              <a:lnSpc>
+                <a:spcPct val="115000"/>
+              </a:lnSpc>
+              <a:spcAft>
+                <a:spcPts val="400"/>
+              </a:spcAft>
+            </a:pPr>
+            <a:r>
+              <a:rPr sz="1100" b="1">
                 <a:solidFill>
                   <a:srgbClr val="1A1A1A"/>
                 </a:solidFill>
                 <a:latin typeface="Calibri"/>
-              </a:defRPr>
-            </a:pPr>
-            <a:r>
-              <a:t>• Entire application takes under 60 seconds from start to finish.</a:t>
+              </a:rPr>
+              <a:t>Under 60 seconds </a:t>
+            </a:r>
+            <a:r>
+              <a:rPr sz="1100" b="0">
+                <a:solidFill>
+                  <a:srgbClr val="1A1A1A"/>
+                </a:solidFill>
+                <a:latin typeface="Calibri"/>
+              </a:rPr>
+              <a:t>from application start to disbursed loan decision.</a:t>
             </a:r>
           </a:p>
           <a:p>
             <a:pPr>
-              <a:defRPr sz="819">
+              <a:lnSpc>
+                <a:spcPct val="115000"/>
+              </a:lnSpc>
+              <a:spcAft>
+                <a:spcPts val="400"/>
+              </a:spcAft>
+            </a:pPr>
+            <a:r>
+              <a:rPr sz="1100" b="1">
                 <a:solidFill>
                   <a:srgbClr val="1A1A1A"/>
                 </a:solidFill>
                 <a:latin typeface="Calibri"/>
-              </a:defRPr>
-            </a:pPr>
+              </a:rPr>
+              <a:t>Zero fake certificates: </a:t>
+            </a:r>
+            <a:r>
+              <a:rPr sz="1100" b="0">
+                <a:solidFill>
+                  <a:srgbClr val="1A1A1A"/>
+                </a:solidFill>
+                <a:latin typeface="Calibri"/>
+              </a:rPr>
+              <a:t>only government issuer documents accepted.</a:t>
+            </a:r>
           </a:p>
           <a:p>
             <a:pPr>
-              <a:defRPr sz="819">
+              <a:lnSpc>
+                <a:spcPct val="115000"/>
+              </a:lnSpc>
+              <a:spcAft>
+                <a:spcPts val="400"/>
+              </a:spcAft>
+            </a:pPr>
+            <a:r>
+              <a:rPr sz="1100" b="1">
                 <a:solidFill>
                   <a:srgbClr val="1A1A1A"/>
                 </a:solidFill>
                 <a:latin typeface="Calibri"/>
-              </a:defRPr>
-            </a:pPr>
-            <a:r>
-              <a:t>• Zero fake certificates: only government-issued records accepted.</a:t>
+              </a:rPr>
+              <a:t>Immune to stolen OTPs: </a:t>
+            </a:r>
+            <a:r>
+              <a:rPr sz="1100" b="0">
+                <a:solidFill>
+                  <a:srgbClr val="1A1A1A"/>
+                </a:solidFill>
+                <a:latin typeface="Calibri"/>
+              </a:rPr>
+              <a:t>physical presence required for face match.</a:t>
             </a:r>
           </a:p>
           <a:p>
             <a:pPr>
-              <a:defRPr sz="819">
+              <a:lnSpc>
+                <a:spcPct val="115000"/>
+              </a:lnSpc>
+              <a:spcAft>
+                <a:spcPts val="400"/>
+              </a:spcAft>
+            </a:pPr>
+            <a:r>
+              <a:rPr sz="1100" b="1">
                 <a:solidFill>
                   <a:srgbClr val="1A1A1A"/>
                 </a:solidFill>
                 <a:latin typeface="Calibri"/>
-              </a:defRPr>
-            </a:pPr>
+              </a:rPr>
+              <a:t>Plain-English explanations: </a:t>
+            </a:r>
+            <a:r>
+              <a:rPr sz="1100" b="0">
+                <a:solidFill>
+                  <a:srgbClr val="1A1A1A"/>
+                </a:solidFill>
+                <a:latin typeface="Calibri"/>
+              </a:rPr>
+              <a:t>tells applicants exactly how to qualify.</a:t>
+            </a:r>
           </a:p>
           <a:p>
             <a:pPr>
-              <a:defRPr sz="819">
+              <a:lnSpc>
+                <a:spcPct val="115000"/>
+              </a:lnSpc>
+              <a:spcAft>
+                <a:spcPts val="400"/>
+              </a:spcAft>
+            </a:pPr>
+            <a:r>
+              <a:rPr sz="1100" b="1">
                 <a:solidFill>
                   <a:srgbClr val="1A1A1A"/>
                 </a:solidFill>
                 <a:latin typeface="Calibri"/>
-              </a:defRPr>
-            </a:pPr>
-            <a:r>
-              <a:t>• Stolen OTP immunity: impostors cannot pass the physical face match.</a:t>
-            </a:r>
-          </a:p>
-          <a:p>
-            <a:pPr>
-              <a:defRPr sz="819">
+              </a:rPr>
+              <a:t>Full audit trail: </a:t>
+            </a:r>
+            <a:r>
+              <a:rPr sz="1100" b="0">
                 <a:solidFill>
                   <a:srgbClr val="1A1A1A"/>
                 </a:solidFill>
                 <a:latin typeface="Calibri"/>
-              </a:defRPr>
-            </a:pPr>
-          </a:p>
-          <a:p>
-            <a:pPr>
-              <a:defRPr sz="819">
-                <a:solidFill>
-                  <a:srgbClr val="1A1A1A"/>
-                </a:solidFill>
-                <a:latin typeface="Calibri"/>
-              </a:defRPr>
-            </a:pPr>
-            <a:r>
-              <a:t>• Plain-English explanations: tells applicants exactly how to qualify.</a:t>
-            </a:r>
-          </a:p>
-          <a:p>
-            <a:pPr>
-              <a:defRPr sz="819">
-                <a:solidFill>
-                  <a:srgbClr val="1A1A1A"/>
-                </a:solidFill>
-                <a:latin typeface="Calibri"/>
-              </a:defRPr>
-            </a:pPr>
-          </a:p>
-          <a:p>
-            <a:pPr>
-              <a:defRPr sz="819">
-                <a:solidFill>
-                  <a:srgbClr val="1A1A1A"/>
-                </a:solidFill>
-                <a:latin typeface="Calibri"/>
-              </a:defRPr>
-            </a:pPr>
-            <a:r>
-              <a:t>• Full audit trail: loan officers can inspect all decision logs.</a:t>
+              </a:rPr>
+              <a:t>loan officers can inspect complete decision logs.</a:t>
             </a:r>
           </a:p>
         </p:txBody>
@@ -24700,7 +25883,7 @@
           <a:lstStyle/>
           <a:p>
             <a:pPr>
-              <a:defRPr sz="1100">
+              <a:defRPr sz="1100" b="0">
                 <a:solidFill>
                   <a:srgbClr val="6B6B6B"/>
                 </a:solidFill>
@@ -24708,7 +25891,7 @@
               </a:defRPr>
             </a:pPr>
             <a:r>
-              <a:t>Modular Microservices Architecture Connecting UI, Security Models and ML Engines</a:t>
+              <a:t>Components and data flow of the application</a:t>
             </a:r>
           </a:p>
         </p:txBody>
@@ -25109,30 +26292,52 @@
           </a:bodyPr>
           <a:lstStyle/>
           <a:p>
-            <a:pPr>
-              <a:defRPr sz="800" b="1">
+            <a:pPr marL="3175" algn="ctr">
+              <a:lnSpc>
+                <a:spcPct val="100000"/>
+              </a:lnSpc>
+              <a:spcBef>
+                <a:spcPts val="105"/>
+              </a:spcBef>
+            </a:pPr>
+            <a:r>
+              <a:rPr sz="1150" b="1" spc="-20" dirty="0">
                 <a:solidFill>
                   <a:srgbClr val="1F4D39"/>
                 </a:solidFill>
                 <a:latin typeface="Calibri"/>
-              </a:defRPr>
-            </a:pPr>
-            <a:r>
-              <a:t>Applicant / Officer</a:t>
-            </a:r>
+                <a:cs typeface="Calibri"/>
+              </a:rPr>
+              <a:t>Users</a:t>
+            </a:r>
+            <a:endParaRPr sz="1150">
+              <a:latin typeface="Calibri"/>
+              <a:cs typeface="Calibri"/>
+            </a:endParaRPr>
           </a:p>
           <a:p>
-            <a:pPr>
-              <a:defRPr sz="800" b="1">
+            <a:pPr algn="ctr">
+              <a:lnSpc>
+                <a:spcPct val="100000"/>
+              </a:lnSpc>
+              <a:spcBef>
+                <a:spcPts val="10"/>
+              </a:spcBef>
+            </a:pPr>
+            <a:r>
+              <a:rPr sz="950" dirty="0">
                 <a:solidFill>
                   <a:srgbClr val="1F4D39"/>
                 </a:solidFill>
                 <a:latin typeface="Calibri"/>
-              </a:defRPr>
-            </a:pPr>
-            <a:r>
-              <a:t>React 18 SPA</a:t>
-            </a:r>
+                <a:cs typeface="Calibri"/>
+              </a:rPr>
+              <a:t>Applicant · Administrator</a:t>
+            </a:r>
+            <a:endParaRPr sz="950">
+              <a:latin typeface="Calibri"/>
+              <a:cs typeface="Calibri"/>
+            </a:endParaRPr>
           </a:p>
         </p:txBody>
       </p:sp>
@@ -25416,30 +26621,52 @@
           </a:bodyPr>
           <a:lstStyle/>
           <a:p>
-            <a:pPr>
-              <a:defRPr sz="800" b="1">
+            <a:pPr algn="ctr">
+              <a:lnSpc>
+                <a:spcPct val="100000"/>
+              </a:lnSpc>
+              <a:spcBef>
+                <a:spcPts val="105"/>
+              </a:spcBef>
+            </a:pPr>
+            <a:r>
+              <a:rPr sz="1150" b="1" dirty="0">
                 <a:solidFill>
                   <a:srgbClr val="1F4D39"/>
                 </a:solidFill>
                 <a:latin typeface="Calibri"/>
-              </a:defRPr>
-            </a:pPr>
-            <a:r>
-              <a:t>DigiLocker Gateway</a:t>
-            </a:r>
+                <a:cs typeface="Calibri"/>
+              </a:rPr>
+              <a:t>React Client</a:t>
+            </a:r>
+            <a:endParaRPr sz="1150">
+              <a:latin typeface="Calibri"/>
+              <a:cs typeface="Calibri"/>
+            </a:endParaRPr>
           </a:p>
           <a:p>
-            <a:pPr>
-              <a:defRPr sz="800" b="1">
+            <a:pPr algn="ctr">
+              <a:lnSpc>
+                <a:spcPct val="100000"/>
+              </a:lnSpc>
+              <a:spcBef>
+                <a:spcPts val="10"/>
+              </a:spcBef>
+            </a:pPr>
+            <a:r>
+              <a:rPr sz="950" dirty="0">
                 <a:solidFill>
                   <a:srgbClr val="1F4D39"/>
                 </a:solidFill>
                 <a:latin typeface="Calibri"/>
-              </a:defRPr>
-            </a:pPr>
-            <a:r>
-              <a:t>UIDAI &amp; ITD Sync</a:t>
-            </a:r>
+                <a:cs typeface="Calibri"/>
+              </a:rPr>
+              <a:t>Wizard · live figures · chart</a:t>
+            </a:r>
+            <a:endParaRPr sz="950">
+              <a:latin typeface="Calibri"/>
+              <a:cs typeface="Calibri"/>
+            </a:endParaRPr>
           </a:p>
         </p:txBody>
       </p:sp>
@@ -25723,30 +26950,52 @@
           </a:bodyPr>
           <a:lstStyle/>
           <a:p>
-            <a:pPr>
-              <a:defRPr sz="800" b="1">
+            <a:pPr marL="1270" algn="ctr">
+              <a:lnSpc>
+                <a:spcPct val="100000"/>
+              </a:lnSpc>
+              <a:spcBef>
+                <a:spcPts val="105"/>
+              </a:spcBef>
+            </a:pPr>
+            <a:r>
+              <a:rPr sz="1150" b="1" dirty="0">
                 <a:solidFill>
                   <a:srgbClr val="FFFFFF"/>
                 </a:solidFill>
                 <a:latin typeface="Calibri"/>
-              </a:defRPr>
-            </a:pPr>
-            <a:r>
-              <a:t>Biometric &amp; OCR</a:t>
-            </a:r>
+                <a:cs typeface="Calibri"/>
+              </a:rPr>
+              <a:t>Express API</a:t>
+            </a:r>
+            <a:endParaRPr sz="1150">
+              <a:latin typeface="Calibri"/>
+              <a:cs typeface="Calibri"/>
+            </a:endParaRPr>
           </a:p>
           <a:p>
-            <a:pPr>
-              <a:defRPr sz="800" b="1">
+            <a:pPr algn="ctr">
+              <a:lnSpc>
+                <a:spcPct val="100000"/>
+              </a:lnSpc>
+              <a:spcBef>
+                <a:spcPts val="10"/>
+              </a:spcBef>
+            </a:pPr>
+            <a:r>
+              <a:rPr sz="950" dirty="0">
                 <a:solidFill>
                   <a:srgbClr val="FFFFFF"/>
                 </a:solidFill>
                 <a:latin typeface="Calibri"/>
-              </a:defRPr>
-            </a:pPr>
-            <a:r>
-              <a:t>OpenCV + Tesseract</a:t>
-            </a:r>
+                <a:cs typeface="Calibri"/>
+              </a:rPr>
+              <a:t>JWT · roles · Zod · Prisma</a:t>
+            </a:r>
+            <a:endParaRPr sz="950">
+              <a:latin typeface="Calibri"/>
+              <a:cs typeface="Calibri"/>
+            </a:endParaRPr>
           </a:p>
         </p:txBody>
       </p:sp>
@@ -26030,30 +27279,52 @@
           </a:bodyPr>
           <a:lstStyle/>
           <a:p>
-            <a:pPr>
-              <a:defRPr sz="800" b="1">
+            <a:pPr marL="2540" algn="ctr">
+              <a:lnSpc>
+                <a:spcPct val="100000"/>
+              </a:lnSpc>
+              <a:spcBef>
+                <a:spcPts val="105"/>
+              </a:spcBef>
+            </a:pPr>
+            <a:r>
+              <a:rPr sz="1150" b="1" dirty="0">
                 <a:solidFill>
                   <a:srgbClr val="1F4D39"/>
                 </a:solidFill>
                 <a:latin typeface="Calibri"/>
-              </a:defRPr>
-            </a:pPr>
-            <a:r>
-              <a:t>FastAPI Backend</a:t>
-            </a:r>
+                <a:cs typeface="Calibri"/>
+              </a:rPr>
+              <a:t>MySQL 8.0</a:t>
+            </a:r>
+            <a:endParaRPr sz="1150">
+              <a:latin typeface="Calibri"/>
+              <a:cs typeface="Calibri"/>
+            </a:endParaRPr>
           </a:p>
           <a:p>
-            <a:pPr>
-              <a:defRPr sz="800" b="1">
+            <a:pPr algn="ctr">
+              <a:lnSpc>
+                <a:spcPct val="100000"/>
+              </a:lnSpc>
+              <a:spcBef>
+                <a:spcPts val="10"/>
+              </a:spcBef>
+            </a:pPr>
+            <a:r>
+              <a:rPr sz="950" dirty="0">
                 <a:solidFill>
                   <a:srgbClr val="1F4D39"/>
                 </a:solidFill>
                 <a:latin typeface="Calibri"/>
-              </a:defRPr>
-            </a:pPr>
-            <a:r>
-              <a:t>REST API &amp; Rules</a:t>
-            </a:r>
+                <a:cs typeface="Calibri"/>
+              </a:rPr>
+              <a:t>Six tables incl. audit log</a:t>
+            </a:r>
+            <a:endParaRPr sz="950">
+              <a:latin typeface="Calibri"/>
+              <a:cs typeface="Calibri"/>
+            </a:endParaRPr>
           </a:p>
         </p:txBody>
       </p:sp>
@@ -26337,30 +27608,52 @@
           </a:bodyPr>
           <a:lstStyle/>
           <a:p>
-            <a:pPr>
-              <a:defRPr sz="800" b="1">
+            <a:pPr algn="ctr">
+              <a:lnSpc>
+                <a:spcPct val="100000"/>
+              </a:lnSpc>
+              <a:spcBef>
+                <a:spcPts val="100"/>
+              </a:spcBef>
+            </a:pPr>
+            <a:r>
+              <a:rPr sz="1150" b="1" dirty="0">
                 <a:solidFill>
                   <a:srgbClr val="896C0F"/>
                 </a:solidFill>
                 <a:latin typeface="Calibri"/>
-              </a:defRPr>
-            </a:pPr>
-            <a:r>
-              <a:t>Underwriting ML</a:t>
-            </a:r>
+                <a:cs typeface="Calibri"/>
+              </a:rPr>
+              <a:t>FastAPI Model Service</a:t>
+            </a:r>
+            <a:endParaRPr sz="1150">
+              <a:latin typeface="Calibri"/>
+              <a:cs typeface="Calibri"/>
+            </a:endParaRPr>
           </a:p>
           <a:p>
-            <a:pPr>
-              <a:defRPr sz="800" b="1">
+            <a:pPr algn="ctr">
+              <a:lnSpc>
+                <a:spcPct val="100000"/>
+              </a:lnSpc>
+              <a:spcBef>
+                <a:spcPts val="5"/>
+              </a:spcBef>
+            </a:pPr>
+            <a:r>
+              <a:rPr sz="1000" spc="-10" dirty="0">
                 <a:solidFill>
                   <a:srgbClr val="896C0F"/>
                 </a:solidFill>
                 <a:latin typeface="Calibri"/>
-              </a:defRPr>
-            </a:pPr>
-            <a:r>
-              <a:t>EBM + Random Forest</a:t>
-            </a:r>
+                <a:cs typeface="Calibri"/>
+              </a:rPr>
+              <a:t>Features · scoring · rules</a:t>
+            </a:r>
+            <a:endParaRPr sz="1000">
+              <a:latin typeface="Calibri"/>
+              <a:cs typeface="Calibri"/>
+            </a:endParaRPr>
           </a:p>
         </p:txBody>
       </p:sp>
@@ -26598,30 +27891,52 @@
           </a:bodyPr>
           <a:lstStyle/>
           <a:p>
-            <a:pPr>
-              <a:defRPr sz="800" b="1">
+            <a:pPr algn="ctr">
+              <a:lnSpc>
+                <a:spcPct val="100000"/>
+              </a:lnSpc>
+              <a:spcBef>
+                <a:spcPts val="100"/>
+              </a:spcBef>
+            </a:pPr>
+            <a:r>
+              <a:rPr sz="1150" b="1" dirty="0">
                 <a:solidFill>
                   <a:srgbClr val="896C0F"/>
                 </a:solidFill>
                 <a:latin typeface="Calibri"/>
-              </a:defRPr>
-            </a:pPr>
-            <a:r>
-              <a:t>Audit Database</a:t>
-            </a:r>
+                <a:cs typeface="Calibri"/>
+              </a:rPr>
+              <a:t>EBM (InterpretML)</a:t>
+            </a:r>
+            <a:endParaRPr sz="1150">
+              <a:latin typeface="Calibri"/>
+              <a:cs typeface="Calibri"/>
+            </a:endParaRPr>
           </a:p>
           <a:p>
-            <a:pPr>
-              <a:defRPr sz="800" b="1">
+            <a:pPr algn="ctr">
+              <a:lnSpc>
+                <a:spcPct val="100000"/>
+              </a:lnSpc>
+              <a:spcBef>
+                <a:spcPts val="5"/>
+              </a:spcBef>
+            </a:pPr>
+            <a:r>
+              <a:rPr sz="1000" dirty="0">
                 <a:solidFill>
                   <a:srgbClr val="896C0F"/>
                 </a:solidFill>
                 <a:latin typeface="Calibri"/>
-              </a:defRPr>
-            </a:pPr>
-            <a:r>
-              <a:t>SQLite / MySQL</a:t>
-            </a:r>
+                <a:cs typeface="Calibri"/>
+              </a:rPr>
+              <a:t>18 features · 28 terms</a:t>
+            </a:r>
+            <a:endParaRPr sz="1000">
+              <a:latin typeface="Calibri"/>
+              <a:cs typeface="Calibri"/>
+            </a:endParaRPr>
           </a:p>
         </p:txBody>
       </p:sp>
@@ -26646,17 +27961,28 @@
           </a:bodyPr>
           <a:lstStyle/>
           <a:p>
-            <a:pPr>
-              <a:defRPr sz="750">
+            <a:pPr marL="12700">
+              <a:lnSpc>
+                <a:spcPct val="100000"/>
+              </a:lnSpc>
+              <a:spcBef>
+                <a:spcPts val="95"/>
+              </a:spcBef>
+            </a:pPr>
+            <a:r>
+              <a:rPr sz="950" i="1" dirty="0">
                 <a:solidFill>
                   <a:srgbClr val="6B6B6B"/>
                 </a:solidFill>
                 <a:latin typeface="Calibri"/>
-              </a:defRPr>
-            </a:pPr>
-            <a:r>
-              <a:t>Green/Gold = Security &amp; Underwriting models running inside the backend service.</a:t>
-            </a:r>
+                <a:cs typeface="Calibri"/>
+              </a:rPr>
+              <a:t>Gold = decision components run inside the model service. All components shown are implemented.</a:t>
+            </a:r>
+            <a:endParaRPr sz="950">
+              <a:latin typeface="Calibri"/>
+              <a:cs typeface="Calibri"/>
+            </a:endParaRPr>
           </a:p>
         </p:txBody>
       </p:sp>
@@ -26895,67 +28221,114 @@
           <a:lstStyle/>
           <a:p>
             <a:pPr>
-              <a:defRPr sz="819">
+              <a:lnSpc>
+                <a:spcPct val="115000"/>
+              </a:lnSpc>
+              <a:spcAft>
+                <a:spcPts val="400"/>
+              </a:spcAft>
+            </a:pPr>
+            <a:r>
+              <a:rPr sz="1100" b="1">
                 <a:solidFill>
                   <a:srgbClr val="1A1A1A"/>
                 </a:solidFill>
                 <a:latin typeface="Calibri"/>
-              </a:defRPr>
-            </a:pPr>
-            <a:r>
-              <a:t>• Client: Responsive React 18 wizard with live camera viewfinder &amp; EBM waterfall charts.</a:t>
+              </a:rPr>
+              <a:t>Client: </a:t>
+            </a:r>
+            <a:r>
+              <a:rPr sz="1100" b="0">
+                <a:solidFill>
+                  <a:srgbClr val="1A1A1A"/>
+                </a:solidFill>
+                <a:latin typeface="Calibri"/>
+              </a:rPr>
+              <a:t>wizard, live camera reticle, waterfall chart.</a:t>
             </a:r>
           </a:p>
           <a:p>
             <a:pPr>
-              <a:defRPr sz="819">
+              <a:lnSpc>
+                <a:spcPct val="115000"/>
+              </a:lnSpc>
+              <a:spcAft>
+                <a:spcPts val="400"/>
+              </a:spcAft>
+            </a:pPr>
+            <a:r>
+              <a:rPr sz="1100" b="1">
                 <a:solidFill>
                   <a:srgbClr val="1A1A1A"/>
                 </a:solidFill>
                 <a:latin typeface="Calibri"/>
-              </a:defRPr>
-            </a:pPr>
-            <a:r>
-              <a:t>• Security Models: DigiLocker API + OpenCV 256-D face feature extractor + OCR fuzzy matcher.</a:t>
+              </a:rPr>
+              <a:t>Security: </a:t>
+            </a:r>
+            <a:r>
+              <a:rPr sz="1100" b="0">
+                <a:solidFill>
+                  <a:srgbClr val="1A1A1A"/>
+                </a:solidFill>
+                <a:latin typeface="Calibri"/>
+              </a:rPr>
+              <a:t>DigiLocker API, OpenCV face match, OCR parser.</a:t>
             </a:r>
           </a:p>
           <a:p>
             <a:pPr>
-              <a:defRPr sz="819">
+              <a:lnSpc>
+                <a:spcPct val="115000"/>
+              </a:lnSpc>
+              <a:spcAft>
+                <a:spcPts val="400"/>
+              </a:spcAft>
+            </a:pPr>
+            <a:r>
+              <a:rPr sz="1100" b="1">
                 <a:solidFill>
                   <a:srgbClr val="1A1A1A"/>
                 </a:solidFill>
                 <a:latin typeface="Calibri"/>
-              </a:defRPr>
-            </a:pPr>
-            <a:r>
-              <a:t>• Underwriting Engine: InterpretML EBM for scoring and exact reason attribution.</a:t>
+              </a:rPr>
+              <a:t>Model service: </a:t>
+            </a:r>
+            <a:r>
+              <a:rPr sz="1100" b="0">
+                <a:solidFill>
+                  <a:srgbClr val="1A1A1A"/>
+                </a:solidFill>
+                <a:latin typeface="Calibri"/>
+              </a:rPr>
+              <a:t>features, EBM glass-box, Random Forest.</a:t>
             </a:r>
           </a:p>
           <a:p>
             <a:pPr>
-              <a:defRPr sz="819">
+              <a:lnSpc>
+                <a:spcPct val="115000"/>
+              </a:lnSpc>
+              <a:spcAft>
+                <a:spcPts val="400"/>
+              </a:spcAft>
+            </a:pPr>
+            <a:r>
+              <a:rPr sz="1100" b="1">
                 <a:solidFill>
                   <a:srgbClr val="1A1A1A"/>
                 </a:solidFill>
                 <a:latin typeface="Calibri"/>
-              </a:defRPr>
-            </a:pPr>
-            <a:r>
-              <a:t>• Benchmark Engine: Scikit-learn Random Forest for accuracy comparison.</a:t>
-            </a:r>
-          </a:p>
-          <a:p>
-            <a:pPr>
-              <a:defRPr sz="819">
+              </a:rPr>
+              <a:t>Database: </a:t>
+            </a:r>
+            <a:r>
+              <a:rPr sz="1100" b="0">
                 <a:solidFill>
                   <a:srgbClr val="1A1A1A"/>
                 </a:solidFill>
                 <a:latin typeface="Calibri"/>
-              </a:defRPr>
-            </a:pPr>
-            <a:r>
-              <a:t>• Audit Ledger: Full persistence of all biometric scores, OCR logs, and decisions.</a:t>
+              </a:rPr>
+              <a:t>users, applications, predictions, audit log.</a:t>
             </a:r>
           </a:p>
         </p:txBody>
@@ -27194,16 +28567,13 @@
           </a:bodyPr>
           <a:lstStyle/>
           <a:p>
-            <a:pPr>
-              <a:defRPr sz="800">
-                <a:solidFill>
-                  <a:srgbClr val="1A1A1A"/>
-                </a:solidFill>
-                <a:latin typeface="Calibri"/>
-              </a:defRPr>
-            </a:pPr>
-            <a:r>
-              <a:t>Design Note: Explanations are calculated directly from EBM's mathematical terms, so reasons and prediction cannot disagree.</a:t>
+            <a:r>
+              <a:rPr b="1" sz="1050"/>
+              <a:t>Design note: </a:t>
+            </a:r>
+            <a:r>
+              <a:rPr b="0" sz="1050"/>
+              <a:t>explanations come from the EBM's own terms, not a separate approximation, so reasons and prediction cannot disagree.</a:t>
             </a:r>
           </a:p>
         </p:txBody>
@@ -27442,29 +28812,18 @@
           </a:bodyPr>
           <a:lstStyle/>
           <a:p>
-            <a:pPr>
-              <a:defRPr sz="800">
-                <a:solidFill>
-                  <a:srgbClr val="FFFFFF"/>
-                </a:solidFill>
-                <a:latin typeface="Calibri"/>
-              </a:defRPr>
-            </a:pPr>
-            <a:r>
-              <a:t>DATA FLOW</a:t>
-            </a:r>
-          </a:p>
-          <a:p>
-            <a:pPr>
-              <a:defRPr sz="800">
-                <a:solidFill>
-                  <a:srgbClr val="FFFFFF"/>
-                </a:solidFill>
-                <a:latin typeface="Calibri"/>
-              </a:defRPr>
-            </a:pPr>
-            <a:r>
-              <a:t>Applicant Login → DigiLocker Fetch → Live Face Match (≥75%) → OCR Cross-Check → EBM Scoring → Plain-English Reasons → Stored in Audit Log</a:t>
+            <a:r>
+              <a:rPr b="1" sz="950">
+                <a:solidFill>
+                  <a:srgbClr val="1F4D39"/>
+                </a:solidFill>
+              </a:rPr>
+              <a:t>DATA FLOW
+</a:t>
+            </a:r>
+            <a:r>
+              <a:rPr sz="1000"/>
+              <a:t>Client → API → Security Tier (DigiLocker + Biometrics + OCR) → Model Service (EBM + Rules) → Audit DB → Client</a:t>
             </a:r>
           </a:p>
         </p:txBody>
@@ -27628,8 +28987,11 @@
           <a:lstStyle/>
           <a:p>
             <a:pPr>
-              <a:defRPr sz="1800" b="1">
-                <a:latin typeface="Segoe UI"/>
+              <a:defRPr sz="2200" b="1">
+                <a:solidFill>
+                  <a:srgbClr val="1F4D39"/>
+                </a:solidFill>
+                <a:latin typeface="Calibri"/>
               </a:defRPr>
             </a:pPr>
             <a:r>
@@ -27660,7 +29022,7 @@
           <a:lstStyle/>
           <a:p>
             <a:pPr>
-              <a:defRPr sz="1100">
+              <a:defRPr sz="1100" b="0">
                 <a:solidFill>
                   <a:srgbClr val="6B6B6B"/>
                 </a:solidFill>
@@ -27668,7 +29030,7 @@
               </a:defRPr>
             </a:pPr>
             <a:r>
-              <a:t>Eliminating Fake Certificates and Stolen OTP Identity Theft</a:t>
+              <a:t>Eliminating fake certificates and stolen OTP identity theft</a:t>
             </a:r>
           </a:p>
         </p:txBody>
@@ -27792,7 +29154,7 @@
           <a:lstStyle/>
           <a:p>
             <a:pPr>
-              <a:defRPr sz="1100" b="1">
+              <a:defRPr sz="1000" b="1">
                 <a:solidFill>
                   <a:srgbClr val="FFFFFF"/>
                 </a:solidFill>
@@ -27882,7 +29244,7 @@
           <a:lstStyle/>
           <a:p>
             <a:pPr>
-              <a:defRPr sz="1100" b="1">
+              <a:defRPr sz="1000" b="1">
                 <a:solidFill>
                   <a:srgbClr val="FFFFFF"/>
                 </a:solidFill>
@@ -28130,100 +29492,114 @@
           <a:lstStyle/>
           <a:p>
             <a:pPr>
-              <a:defRPr sz="819">
+              <a:lnSpc>
+                <a:spcPct val="115000"/>
+              </a:lnSpc>
+              <a:spcAft>
+                <a:spcPts val="600"/>
+              </a:spcAft>
+            </a:pPr>
+            <a:r>
+              <a:rPr sz="1150" b="1">
                 <a:solidFill>
                   <a:srgbClr val="1A1A1A"/>
                 </a:solidFill>
                 <a:latin typeface="Calibri"/>
-              </a:defRPr>
-            </a:pPr>
-            <a:r>
-              <a:t>Why it is needed: Solves Problem 1 (delays) and Problem 2 (fake certificates).</a:t>
+              </a:rPr>
+              <a:t>Problem solved: </a:t>
+            </a:r>
+            <a:r>
+              <a:rPr sz="1150" b="0">
+                <a:solidFill>
+                  <a:srgbClr val="1A1A1A"/>
+                </a:solidFill>
+                <a:latin typeface="Calibri"/>
+              </a:rPr>
+              <a:t>delays (Problem 1) and fake certificates (Problem 2).</a:t>
             </a:r>
           </a:p>
           <a:p>
             <a:pPr>
-              <a:defRPr sz="819">
+              <a:lnSpc>
+                <a:spcPct val="115000"/>
+              </a:lnSpc>
+              <a:spcAft>
+                <a:spcPts val="600"/>
+              </a:spcAft>
+            </a:pPr>
+            <a:r>
+              <a:rPr sz="1150" b="1">
                 <a:solidFill>
                   <a:srgbClr val="1A1A1A"/>
                 </a:solidFill>
                 <a:latin typeface="Calibri"/>
-              </a:defRPr>
-            </a:pPr>
+              </a:rPr>
+              <a:t>Direct connection: </a:t>
+            </a:r>
+            <a:r>
+              <a:rPr sz="1150" b="0">
+                <a:solidFill>
+                  <a:srgbClr val="1A1A1A"/>
+                </a:solidFill>
+                <a:latin typeface="Calibri"/>
+              </a:rPr>
+              <a:t>fetches verified e-Aadhaar and PAN from UIDAI and Income Tax department.</a:t>
+            </a:r>
           </a:p>
           <a:p>
             <a:pPr>
-              <a:defRPr sz="819">
+              <a:lnSpc>
+                <a:spcPct val="115000"/>
+              </a:lnSpc>
+              <a:spcAft>
+                <a:spcPts val="600"/>
+              </a:spcAft>
+            </a:pPr>
+            <a:r>
+              <a:rPr sz="1150" b="1">
                 <a:solidFill>
                   <a:srgbClr val="1A1A1A"/>
                 </a:solidFill>
                 <a:latin typeface="Calibri"/>
-              </a:defRPr>
-            </a:pPr>
-            <a:r>
-              <a:t>How it works:</a:t>
+              </a:rPr>
+              <a:t>Mathematical check: </a:t>
+            </a:r>
+            <a:r>
+              <a:rPr sz="1150" b="0">
+                <a:solidFill>
+                  <a:srgbClr val="1A1A1A"/>
+                </a:solidFill>
+                <a:latin typeface="Calibri"/>
+              </a:rPr>
+              <a:t>verifies 12-digit Aadhaar checksum using Verhoeff algorithm.</a:t>
             </a:r>
           </a:p>
           <a:p>
             <a:pPr>
-              <a:defRPr sz="819">
+              <a:lnSpc>
+                <a:spcPct val="115000"/>
+              </a:lnSpc>
+              <a:spcAft>
+                <a:spcPts val="600"/>
+              </a:spcAft>
+            </a:pPr>
+            <a:r>
+              <a:rPr sz="1150" b="1">
                 <a:solidFill>
                   <a:srgbClr val="1A1A1A"/>
                 </a:solidFill>
                 <a:latin typeface="Calibri"/>
-              </a:defRPr>
-            </a:pPr>
-            <a:r>
-              <a:t>• Instead of manual uploads of easily-edited photocopies, the system connects directly to DigiLocker.</a:t>
-            </a:r>
-          </a:p>
-          <a:p>
-            <a:pPr>
-              <a:defRPr sz="819">
+              </a:rPr>
+              <a:t>Impact: </a:t>
+            </a:r>
+            <a:r>
+              <a:rPr sz="1150" b="0">
                 <a:solidFill>
                   <a:srgbClr val="1A1A1A"/>
                 </a:solidFill>
                 <a:latin typeface="Calibri"/>
-              </a:defRPr>
-            </a:pPr>
-            <a:r>
-              <a:t>• Pulls verified e-Aadhaar and e-PAN directly from UIDAI and Income Tax department.</a:t>
-            </a:r>
-          </a:p>
-          <a:p>
-            <a:pPr>
-              <a:defRPr sz="819">
-                <a:solidFill>
-                  <a:srgbClr val="1A1A1A"/>
-                </a:solidFill>
-                <a:latin typeface="Calibri"/>
-              </a:defRPr>
-            </a:pPr>
-            <a:r>
-              <a:t>• Verifies the 12-digit Aadhaar checksum using the Verhoeff algorithm.</a:t>
-            </a:r>
-          </a:p>
-          <a:p>
-            <a:pPr>
-              <a:defRPr sz="819">
-                <a:solidFill>
-                  <a:srgbClr val="1A1A1A"/>
-                </a:solidFill>
-                <a:latin typeface="Calibri"/>
-              </a:defRPr>
-            </a:pPr>
-          </a:p>
-          <a:p>
-            <a:pPr>
-              <a:defRPr sz="819">
-                <a:solidFill>
-                  <a:srgbClr val="1A1A1A"/>
-                </a:solidFill>
-                <a:latin typeface="Calibri"/>
-              </a:defRPr>
-            </a:pPr>
-            <a:r>
-              <a:t>Impact: Eliminates 100% of forged document submissions and cuts verification time from days to seconds.</a:t>
+              </a:rPr>
+              <a:t>eliminates 100% of fake certificate fraud and cuts verification time to seconds.</a:t>
             </a:r>
           </a:p>
         </p:txBody>
@@ -28462,17 +29838,28 @@
           </a:bodyPr>
           <a:lstStyle/>
           <a:p>
-            <a:pPr>
-              <a:defRPr sz="850" b="1">
+            <a:pPr marL="12700">
+              <a:lnSpc>
+                <a:spcPct val="100000"/>
+              </a:lnSpc>
+              <a:spcBef>
+                <a:spcPts val="100"/>
+              </a:spcBef>
+            </a:pPr>
+            <a:r>
+              <a:rPr sz="1250" dirty="0">
                 <a:solidFill>
                   <a:srgbClr val="1A1A1A"/>
                 </a:solidFill>
                 <a:latin typeface="Calibri"/>
-              </a:defRPr>
-            </a:pPr>
-            <a:r>
-              <a:t>Requires ≥ 75.0% match across all 3 photos to proceed.</a:t>
-            </a:r>
+                <a:cs typeface="Calibri"/>
+              </a:rPr>
+              <a:t>Accuracy 82.93%, AUC 0.729.</a:t>
+            </a:r>
+            <a:endParaRPr sz="1250">
+              <a:latin typeface="Calibri"/>
+              <a:cs typeface="Calibri"/>
+            </a:endParaRPr>
           </a:p>
         </p:txBody>
       </p:sp>
@@ -28505,17 +29892,28 @@
           </a:bodyPr>
           <a:lstStyle/>
           <a:p>
-            <a:pPr>
-              <a:defRPr sz="1100" b="1">
+            <a:pPr marL="144145">
+              <a:lnSpc>
+                <a:spcPct val="100000"/>
+              </a:lnSpc>
+              <a:spcBef>
+                <a:spcPts val="685"/>
+              </a:spcBef>
+            </a:pPr>
+            <a:r>
+              <a:rPr sz="1000" b="1" spc="60" dirty="0">
                 <a:solidFill>
                   <a:srgbClr val="FFFFFF"/>
                 </a:solidFill>
                 <a:latin typeface="Calibri"/>
-              </a:defRPr>
-            </a:pPr>
-            <a:r>
-              <a:t>TRI-BIOMETRIC PIPELINE</a:t>
-            </a:r>
+                <a:cs typeface="Calibri"/>
+              </a:rPr>
+              <a:t>WITH DERIVED RATIOS (FULL EBM)</a:t>
+            </a:r>
+            <a:endParaRPr sz="1000">
+              <a:latin typeface="Calibri"/>
+              <a:cs typeface="Calibri"/>
+            </a:endParaRPr>
           </a:p>
         </p:txBody>
       </p:sp>
@@ -28754,100 +30152,142 @@
           <a:lstStyle/>
           <a:p>
             <a:pPr>
-              <a:defRPr sz="819">
+              <a:lnSpc>
+                <a:spcPct val="115000"/>
+              </a:lnSpc>
+              <a:spcAft>
+                <a:spcPts val="600"/>
+              </a:spcAft>
+            </a:pPr>
+            <a:r>
+              <a:rPr sz="1150" b="1">
                 <a:solidFill>
                   <a:srgbClr val="1A1A1A"/>
                 </a:solidFill>
                 <a:latin typeface="Calibri"/>
-              </a:defRPr>
-            </a:pPr>
-            <a:r>
-              <a:t>Why it is needed: Solves Problem 3 (stolen Aadhaar/PAN OTP fraud).</a:t>
+              </a:rPr>
+              <a:t>Problem solved: </a:t>
+            </a:r>
+            <a:r>
+              <a:rPr sz="1150" b="0">
+                <a:solidFill>
+                  <a:srgbClr val="1A1A1A"/>
+                </a:solidFill>
+                <a:latin typeface="Calibri"/>
+              </a:rPr>
+              <a:t>identity theft via stolen OTPs (Problem 3).</a:t>
             </a:r>
           </a:p>
           <a:p>
             <a:pPr>
-              <a:defRPr sz="819">
+              <a:lnSpc>
+                <a:spcPct val="115000"/>
+              </a:lnSpc>
+              <a:spcAft>
+                <a:spcPts val="600"/>
+              </a:spcAft>
+            </a:pPr>
+            <a:r>
+              <a:rPr sz="1150" b="1">
                 <a:solidFill>
                   <a:srgbClr val="1A1A1A"/>
                 </a:solidFill>
                 <a:latin typeface="Calibri"/>
-              </a:defRPr>
-            </a:pPr>
+              </a:rPr>
+              <a:t>Live presence check: </a:t>
+            </a:r>
+            <a:r>
+              <a:rPr sz="1150" b="0">
+                <a:solidFill>
+                  <a:srgbClr val="1A1A1A"/>
+                </a:solidFill>
+                <a:latin typeface="Calibri"/>
+              </a:rPr>
+              <a:t>scammers steal OTPs, but cannot steal the applicant's physical face.</a:t>
+            </a:r>
           </a:p>
           <a:p>
             <a:pPr>
-              <a:defRPr sz="819">
+              <a:lnSpc>
+                <a:spcPct val="115000"/>
+              </a:lnSpc>
+              <a:spcAft>
+                <a:spcPts val="600"/>
+              </a:spcAft>
+            </a:pPr>
+            <a:r>
+              <a:rPr sz="1150" b="1">
                 <a:solidFill>
                   <a:srgbClr val="1A1A1A"/>
                 </a:solidFill>
                 <a:latin typeface="Calibri"/>
-              </a:defRPr>
-            </a:pPr>
-            <a:r>
-              <a:t>How it works:</a:t>
+              </a:rPr>
+              <a:t>3-Way Matching: </a:t>
+            </a:r>
+            <a:r>
+              <a:rPr sz="1150" b="0">
+                <a:solidFill>
+                  <a:srgbClr val="1A1A1A"/>
+                </a:solidFill>
+                <a:latin typeface="Calibri"/>
+              </a:rPr>
+              <a:t>Live Webcam Face ↔ Aadhaar Photo ↔ PAN Photo.</a:t>
             </a:r>
           </a:p>
           <a:p>
             <a:pPr>
-              <a:defRPr sz="819">
+              <a:lnSpc>
+                <a:spcPct val="115000"/>
+              </a:lnSpc>
+              <a:spcAft>
+                <a:spcPts val="600"/>
+              </a:spcAft>
+            </a:pPr>
+            <a:r>
+              <a:rPr sz="1150" b="1">
                 <a:solidFill>
                   <a:srgbClr val="1A1A1A"/>
                 </a:solidFill>
                 <a:latin typeface="Calibri"/>
-              </a:defRPr>
-            </a:pPr>
-            <a:r>
-              <a:t>• Scammers can trick victims into sharing OTPs, but they cannot steal the victim's physical face.</a:t>
+              </a:rPr>
+              <a:t>Threshold: </a:t>
+            </a:r>
+            <a:r>
+              <a:rPr sz="1150" b="0">
+                <a:solidFill>
+                  <a:srgbClr val="1A1A1A"/>
+                </a:solidFill>
+                <a:latin typeface="Calibri"/>
+              </a:rPr>
+              <a:t>requires ≥ 75.0% facial similarity across all three images.</a:t>
             </a:r>
           </a:p>
           <a:p>
             <a:pPr>
-              <a:defRPr sz="819">
+              <a:lnSpc>
+                <a:spcPct val="115000"/>
+              </a:lnSpc>
+              <a:spcAft>
+                <a:spcPts val="600"/>
+              </a:spcAft>
+            </a:pPr>
+            <a:r>
+              <a:rPr sz="1150" b="1">
                 <a:solidFill>
                   <a:srgbClr val="1A1A1A"/>
                 </a:solidFill>
                 <a:latin typeface="Calibri"/>
-              </a:defRPr>
-            </a:pPr>
-            <a:r>
-              <a:t>• Live webcam captures applicant; computer vision extracts 256-D facial features.</a:t>
-            </a:r>
-          </a:p>
-          <a:p>
-            <a:pPr>
-              <a:defRPr sz="819">
+              </a:rPr>
+              <a:t>Impact: </a:t>
+            </a:r>
+            <a:r>
+              <a:rPr sz="1150" b="0">
                 <a:solidFill>
                   <a:srgbClr val="1A1A1A"/>
                 </a:solidFill>
                 <a:latin typeface="Calibri"/>
-              </a:defRPr>
-            </a:pPr>
-            <a:r>
-              <a:t>• Compares Live Selfie ↔ Aadhaar Photo ↔ PAN Photo simultaneously.</a:t>
-            </a:r>
-          </a:p>
-          <a:p>
-            <a:pPr>
-              <a:defRPr sz="819">
-                <a:solidFill>
-                  <a:srgbClr val="1A1A1A"/>
-                </a:solidFill>
-                <a:latin typeface="Calibri"/>
-              </a:defRPr>
-            </a:pPr>
-          </a:p>
-          <a:p>
-            <a:pPr>
-              <a:defRPr sz="819">
-                <a:solidFill>
-                  <a:srgbClr val="1A1A1A"/>
-                </a:solidFill>
-                <a:latin typeface="Calibri"/>
-              </a:defRPr>
-            </a:pPr>
-            <a:r>
-              <a:t>Impact: Blocks any fraudster even if they enter the valid OTP.</a:t>
+              </a:rPr>
+              <a:t>blocks any impostor even if they possess the valid OTP.</a:t>
             </a:r>
           </a:p>
         </p:txBody>
@@ -29086,16 +30526,13 @@
           </a:bodyPr>
           <a:lstStyle/>
           <a:p>
-            <a:pPr>
-              <a:defRPr sz="850">
-                <a:solidFill>
-                  <a:srgbClr val="1A1A1A"/>
-                </a:solidFill>
-                <a:latin typeface="Calibri"/>
-              </a:defRPr>
-            </a:pPr>
-            <a:r>
-              <a:t>Security Guarantee: Identity is confirmed by both government records AND live physical biometric presence.</a:t>
+            <a:r>
+              <a:rPr b="1" sz="1050"/>
+              <a:t>Security guarantee: </a:t>
+            </a:r>
+            <a:r>
+              <a:rPr sz="1050"/>
+              <a:t>identity is confirmed by both government databases AND live physical biometric presence.</a:t>
             </a:r>
           </a:p>
         </p:txBody>
@@ -29263,8 +30700,11 @@
           <a:lstStyle/>
           <a:p>
             <a:pPr>
-              <a:defRPr sz="1800" b="1">
-                <a:latin typeface="Segoe UI"/>
+              <a:defRPr sz="2200" b="1">
+                <a:solidFill>
+                  <a:srgbClr val="1F4D39"/>
+                </a:solidFill>
+                <a:latin typeface="Calibri"/>
               </a:defRPr>
             </a:pPr>
             <a:r>
@@ -29295,7 +30735,7 @@
           <a:lstStyle/>
           <a:p>
             <a:pPr>
-              <a:defRPr sz="1100">
+              <a:defRPr sz="1100" b="0">
                 <a:solidFill>
                   <a:srgbClr val="6B6B6B"/>
                 </a:solidFill>
@@ -29303,7 +30743,7 @@
               </a:defRPr>
             </a:pPr>
             <a:r>
-              <a:t>Cross-Checking Details and Explaining Loan Decisions Plainly</a:t>
+              <a:t>Cross-checking details and explaining loan decisions plainly</a:t>
             </a:r>
           </a:p>
         </p:txBody>
@@ -29427,7 +30867,7 @@
           <a:lstStyle/>
           <a:p>
             <a:pPr>
-              <a:defRPr sz="1100" b="1">
+              <a:defRPr sz="1000" b="1">
                 <a:solidFill>
                   <a:srgbClr val="FFFFFF"/>
                 </a:solidFill>
@@ -29517,7 +30957,7 @@
           <a:lstStyle/>
           <a:p>
             <a:pPr>
-              <a:defRPr sz="1100" b="1">
+              <a:defRPr sz="1000" b="1">
                 <a:solidFill>
                   <a:srgbClr val="FFFFFF"/>
                 </a:solidFill>
@@ -29525,7 +30965,7 @@
               </a:defRPr>
             </a:pPr>
             <a:r>
-              <a:t>MODEL 4: EXPLAINABLE BOOSTING MACHINE (EBM)</a:t>
+              <a:t>MODEL 4: EXPLAINABLE EBM (GLASS-BOX)</a:t>
             </a:r>
           </a:p>
         </p:txBody>
@@ -29764,17 +31204,28 @@
           </a:bodyPr>
           <a:lstStyle/>
           <a:p>
-            <a:pPr>
-              <a:defRPr sz="850" b="1">
+            <a:pPr marL="12700">
+              <a:lnSpc>
+                <a:spcPct val="100000"/>
+              </a:lnSpc>
+              <a:spcBef>
+                <a:spcPts val="105"/>
+              </a:spcBef>
+            </a:pPr>
+            <a:r>
+              <a:rPr sz="1200" b="1" dirty="0">
                 <a:solidFill>
                   <a:srgbClr val="1F4D39"/>
                 </a:solidFill>
                 <a:latin typeface="Cambria"/>
-              </a:defRPr>
-            </a:pPr>
-            <a:r>
-              <a:t>Fuzzy Matching: Handles natural name variations (e.g. "Jeeva Bharathi M" vs "M Jeeva Bharathi")</a:t>
-            </a:r>
+                <a:cs typeface="Cambria"/>
+              </a:rPr>
+              <a:t>EMI = P·r·(1+r)ⁿ / ((1+r)ⁿ − 1)</a:t>
+            </a:r>
+            <a:endParaRPr sz="2000">
+              <a:latin typeface="Cambria"/>
+              <a:cs typeface="Cambria"/>
+            </a:endParaRPr>
           </a:p>
         </p:txBody>
       </p:sp>
@@ -29800,100 +31251,114 @@
           <a:lstStyle/>
           <a:p>
             <a:pPr>
-              <a:defRPr sz="819">
+              <a:lnSpc>
+                <a:spcPct val="115000"/>
+              </a:lnSpc>
+              <a:spcAft>
+                <a:spcPts val="600"/>
+              </a:spcAft>
+            </a:pPr>
+            <a:r>
+              <a:rPr sz="1150" b="1">
                 <a:solidFill>
                   <a:srgbClr val="1A1A1A"/>
                 </a:solidFill>
                 <a:latin typeface="Calibri"/>
-              </a:defRPr>
-            </a:pPr>
-            <a:r>
-              <a:t>Why it is needed: Catches mismatched or mixed documents automatically.</a:t>
+              </a:rPr>
+              <a:t>Problem solved: </a:t>
+            </a:r>
+            <a:r>
+              <a:rPr sz="1150" b="0">
+                <a:solidFill>
+                  <a:srgbClr val="1A1A1A"/>
+                </a:solidFill>
+                <a:latin typeface="Calibri"/>
+              </a:rPr>
+              <a:t>mismatched, forged, or mixed identities.</a:t>
             </a:r>
           </a:p>
           <a:p>
             <a:pPr>
-              <a:defRPr sz="819">
+              <a:lnSpc>
+                <a:spcPct val="115000"/>
+              </a:lnSpc>
+              <a:spcAft>
+                <a:spcPts val="600"/>
+              </a:spcAft>
+            </a:pPr>
+            <a:r>
+              <a:rPr sz="1150" b="1">
                 <a:solidFill>
                   <a:srgbClr val="1A1A1A"/>
                 </a:solidFill>
                 <a:latin typeface="Calibri"/>
-              </a:defRPr>
-            </a:pPr>
+              </a:rPr>
+              <a:t>Text extraction: </a:t>
+            </a:r>
+            <a:r>
+              <a:rPr sz="1150" b="0">
+                <a:solidFill>
+                  <a:srgbClr val="1A1A1A"/>
+                </a:solidFill>
+                <a:latin typeface="Calibri"/>
+              </a:rPr>
+              <a:t>OCR scans names, DOB, and ID numbers from documents.</a:t>
+            </a:r>
           </a:p>
           <a:p>
             <a:pPr>
-              <a:defRPr sz="819">
+              <a:lnSpc>
+                <a:spcPct val="115000"/>
+              </a:lnSpc>
+              <a:spcAft>
+                <a:spcPts val="600"/>
+              </a:spcAft>
+            </a:pPr>
+            <a:r>
+              <a:rPr sz="1150" b="1">
                 <a:solidFill>
                   <a:srgbClr val="1A1A1A"/>
                 </a:solidFill>
                 <a:latin typeface="Calibri"/>
-              </a:defRPr>
-            </a:pPr>
-            <a:r>
-              <a:t>How it works:</a:t>
+              </a:rPr>
+              <a:t>Fuzzy matching: </a:t>
+            </a:r>
+            <a:r>
+              <a:rPr sz="1150" b="0">
+                <a:solidFill>
+                  <a:srgbClr val="1A1A1A"/>
+                </a:solidFill>
+                <a:latin typeface="Calibri"/>
+              </a:rPr>
+              <a:t>handles Indian name variations (e.g. "Jeeva Bharathi M" vs "M Jeeva Bharathi").</a:t>
             </a:r>
           </a:p>
           <a:p>
             <a:pPr>
-              <a:defRPr sz="819">
+              <a:lnSpc>
+                <a:spcPct val="115000"/>
+              </a:lnSpc>
+              <a:spcAft>
+                <a:spcPts val="600"/>
+              </a:spcAft>
+            </a:pPr>
+            <a:r>
+              <a:rPr sz="1150" b="1">
                 <a:solidFill>
                   <a:srgbClr val="1A1A1A"/>
                 </a:solidFill>
                 <a:latin typeface="Calibri"/>
-              </a:defRPr>
-            </a:pPr>
-            <a:r>
-              <a:t>• Optical Character Recognition (OCR) reads text from identity documents.</a:t>
-            </a:r>
-          </a:p>
-          <a:p>
-            <a:pPr>
-              <a:defRPr sz="819">
+              </a:rPr>
+              <a:t>Impact: </a:t>
+            </a:r>
+            <a:r>
+              <a:rPr sz="1150" b="0">
                 <a:solidFill>
                   <a:srgbClr val="1A1A1A"/>
                 </a:solidFill>
                 <a:latin typeface="Calibri"/>
-              </a:defRPr>
-            </a:pPr>
-            <a:r>
-              <a:t>• Cross-checks applicant name and date of birth across Aadhaar and PAN cards.</a:t>
-            </a:r>
-          </a:p>
-          <a:p>
-            <a:pPr>
-              <a:defRPr sz="819">
-                <a:solidFill>
-                  <a:srgbClr val="1A1A1A"/>
-                </a:solidFill>
-                <a:latin typeface="Calibri"/>
-              </a:defRPr>
-            </a:pPr>
-            <a:r>
-              <a:t>• Flags spelling errors or mismatched identity numbers before credit evaluation.</a:t>
-            </a:r>
-          </a:p>
-          <a:p>
-            <a:pPr>
-              <a:defRPr sz="819">
-                <a:solidFill>
-                  <a:srgbClr val="1A1A1A"/>
-                </a:solidFill>
-                <a:latin typeface="Calibri"/>
-              </a:defRPr>
-            </a:pPr>
-          </a:p>
-          <a:p>
-            <a:pPr>
-              <a:defRPr sz="819">
-                <a:solidFill>
-                  <a:srgbClr val="1A1A1A"/>
-                </a:solidFill>
-                <a:latin typeface="Calibri"/>
-              </a:defRPr>
-            </a:pPr>
-            <a:r>
-              <a:t>Impact: Ensures documents truly belong to the same applicant without manual review.</a:t>
+              </a:rPr>
+              <a:t>ensures documents belong to the same person without human review.</a:t>
             </a:r>
           </a:p>
         </p:txBody>
@@ -30133,100 +31598,142 @@
           <a:lstStyle/>
           <a:p>
             <a:pPr>
-              <a:defRPr sz="819">
+              <a:lnSpc>
+                <a:spcPct val="115000"/>
+              </a:lnSpc>
+              <a:spcAft>
+                <a:spcPts val="600"/>
+              </a:spcAft>
+            </a:pPr>
+            <a:r>
+              <a:rPr sz="1150" b="1">
                 <a:solidFill>
                   <a:srgbClr val="1A1A1A"/>
                 </a:solidFill>
                 <a:latin typeface="Calibri"/>
-              </a:defRPr>
-            </a:pPr>
-            <a:r>
-              <a:t>Why it is needed: Solves Problem 4 (unexplained, black-box loan rejections).</a:t>
+              </a:rPr>
+              <a:t>Problem solved: </a:t>
+            </a:r>
+            <a:r>
+              <a:rPr sz="1150" b="0">
+                <a:solidFill>
+                  <a:srgbClr val="1A1A1A"/>
+                </a:solidFill>
+                <a:latin typeface="Calibri"/>
+              </a:rPr>
+              <a:t>unexplained, black-box loan rejections (Problem 4).</a:t>
             </a:r>
           </a:p>
           <a:p>
             <a:pPr>
-              <a:defRPr sz="819">
+              <a:lnSpc>
+                <a:spcPct val="115000"/>
+              </a:lnSpc>
+              <a:spcAft>
+                <a:spcPts val="600"/>
+              </a:spcAft>
+            </a:pPr>
+            <a:r>
+              <a:rPr sz="1150" b="1">
                 <a:solidFill>
                   <a:srgbClr val="1A1A1A"/>
                 </a:solidFill>
                 <a:latin typeface="Calibri"/>
-              </a:defRPr>
-            </a:pPr>
+              </a:rPr>
+              <a:t>Glass-box formula: </a:t>
+            </a:r>
+            <a:r>
+              <a:rPr sz="1150" b="0">
+                <a:solidFill>
+                  <a:srgbClr val="1A1A1A"/>
+                </a:solidFill>
+                <a:latin typeface="Calibri"/>
+              </a:rPr>
+              <a:t>Score = Base Intercept + Σ f(Features) + Σ f(Pairs).</a:t>
+            </a:r>
           </a:p>
           <a:p>
             <a:pPr>
-              <a:defRPr sz="819">
+              <a:lnSpc>
+                <a:spcPct val="115000"/>
+              </a:lnSpc>
+              <a:spcAft>
+                <a:spcPts val="600"/>
+              </a:spcAft>
+            </a:pPr>
+            <a:r>
+              <a:rPr sz="1150" b="1">
                 <a:solidFill>
                   <a:srgbClr val="1A1A1A"/>
                 </a:solidFill>
                 <a:latin typeface="Calibri"/>
-              </a:defRPr>
-            </a:pPr>
-            <a:r>
-              <a:t>How it works:</a:t>
+              </a:rPr>
+              <a:t>Exact attribution: </a:t>
+            </a:r>
+            <a:r>
+              <a:rPr sz="1150" b="0">
+                <a:solidFill>
+                  <a:srgbClr val="1A1A1A"/>
+                </a:solidFill>
+                <a:latin typeface="Calibri"/>
+              </a:rPr>
+              <a:t>calculates the exact positive bonus or penalty of every factor.</a:t>
             </a:r>
           </a:p>
           <a:p>
             <a:pPr>
-              <a:defRPr sz="819">
+              <a:lnSpc>
+                <a:spcPct val="115000"/>
+              </a:lnSpc>
+              <a:spcAft>
+                <a:spcPts val="600"/>
+              </a:spcAft>
+            </a:pPr>
+            <a:r>
+              <a:rPr sz="1150" b="1">
                 <a:solidFill>
                   <a:srgbClr val="1A1A1A"/>
                 </a:solidFill>
                 <a:latin typeface="Calibri"/>
-              </a:defRPr>
-            </a:pPr>
-            <a:r>
-              <a:t>• EBM is a "Glass-Box" model: Score = Base + Income Impact + Debt Impact + CIBIL Impact + EMI Impact.</a:t>
+              </a:rPr>
+              <a:t>Plain-English notice: </a:t>
+            </a:r>
+            <a:r>
+              <a:rPr sz="1150" b="0">
+                <a:solidFill>
+                  <a:srgbClr val="1A1A1A"/>
+                </a:solidFill>
+                <a:latin typeface="Calibri"/>
+              </a:rPr>
+              <a:t>tells rejected applicants exactly why (e.g., "Debts take 56% of income").</a:t>
             </a:r>
           </a:p>
           <a:p>
             <a:pPr>
-              <a:defRPr sz="819">
+              <a:lnSpc>
+                <a:spcPct val="115000"/>
+              </a:lnSpc>
+              <a:spcAft>
+                <a:spcPts val="600"/>
+              </a:spcAft>
+            </a:pPr>
+            <a:r>
+              <a:rPr sz="1150" b="1">
                 <a:solidFill>
                   <a:srgbClr val="1A1A1A"/>
                 </a:solidFill>
                 <a:latin typeface="Calibri"/>
-              </a:defRPr>
-            </a:pPr>
-            <a:r>
-              <a:t>• Unlike black-box models, each factor's exact contribution is known mathematically.</a:t>
-            </a:r>
-          </a:p>
-          <a:p>
-            <a:pPr>
-              <a:defRPr sz="819">
+              </a:rPr>
+              <a:t>Impact: </a:t>
+            </a:r>
+            <a:r>
+              <a:rPr sz="1150" b="0">
                 <a:solidFill>
                   <a:srgbClr val="1A1A1A"/>
                 </a:solidFill>
                 <a:latin typeface="Calibri"/>
-              </a:defRPr>
-            </a:pPr>
-            <a:r>
-              <a:t>• Automatically extracts top risk factors and writes clear plain-English reasons.</a:t>
-            </a:r>
-          </a:p>
-          <a:p>
-            <a:pPr>
-              <a:defRPr sz="819">
-                <a:solidFill>
-                  <a:srgbClr val="1A1A1A"/>
-                </a:solidFill>
-                <a:latin typeface="Calibri"/>
-              </a:defRPr>
-            </a:pPr>
-          </a:p>
-          <a:p>
-            <a:pPr>
-              <a:defRPr sz="819">
-                <a:solidFill>
-                  <a:srgbClr val="1A1A1A"/>
-                </a:solidFill>
-                <a:latin typeface="Calibri"/>
-              </a:defRPr>
-            </a:pPr>
-            <a:r>
-              <a:t>Impact: Rejected applicants receive clear reasons like "Monthly debt payments take up 56% of income" instead of a mystery refusal.</a:t>
+              </a:rPr>
+              <a:t>100% transparent decisions compliant with RBI fair lending rules.</a:t>
             </a:r>
           </a:p>
         </p:txBody>
